--- a/output/wordlabs-war-3day.pptx
+++ b/output/wordlabs-war-3day.pptx
@@ -4240,7 +4240,7 @@
                 <a:ea typeface="Calibri" pitchFamily="34" charset="-122"/>
                 <a:cs typeface="Calibri" pitchFamily="34" charset="-120"/>
               </a:rPr>
-              <a:t>"conflict, fighting, armed struggle"</a:t>
+              <a:t>"armed conflict between groups"</a:t>
             </a:r>
             <a:endParaRPr lang="en-US" sz="2200" dirty="0"/>
           </a:p>
@@ -4279,7 +4279,7 @@
                 <a:ea typeface="Calibri" pitchFamily="34" charset="-122"/>
                 <a:cs typeface="Calibri" pitchFamily="34" charset="-120"/>
               </a:rPr>
-              <a:t>Origin: Old English: werre</a:t>
+              <a:t>Origin: Core English root</a:t>
             </a:r>
             <a:endParaRPr lang="en-US" sz="1300" dirty="0"/>
           </a:p>
@@ -5288,7 +5288,7 @@
                 <a:ea typeface="Calibri" pitchFamily="34" charset="-122"/>
                 <a:cs typeface="Calibri" pitchFamily="34" charset="-120"/>
               </a:rPr>
-              <a:t>Word Labs  •  wordlabs.app  •  Root: 'war' = conflict, fighting, armed struggle</a:t>
+              <a:t>Word Labs  •  wordlabs.app  •  Root: 'war' = armed conflict between groups</a:t>
             </a:r>
             <a:endParaRPr lang="en-US" sz="800" dirty="0"/>
           </a:p>
@@ -5622,7 +5622,7 @@
                 <a:ea typeface="Trebuchet MS" pitchFamily="34" charset="-122"/>
                 <a:cs typeface="Trebuchet MS" pitchFamily="34" charset="-120"/>
               </a:rPr>
-              <a:t>1</a:t>
+              <a:t>0</a:t>
             </a:r>
             <a:pPr algn="ctr" indent="0" marL="0">
               <a:buNone/>
@@ -5928,7 +5928,7 @@
                 <a:ea typeface="Calibri" pitchFamily="34" charset="-122"/>
                 <a:cs typeface="Calibri" pitchFamily="34" charset="-120"/>
               </a:rPr>
-              <a:t>Word Labs  •  wordlabs.app  •  Root: 'war' = conflict, fighting, armed struggle</a:t>
+              <a:t>Word Labs  •  wordlabs.app  •  Root: 'war' = armed conflict between groups</a:t>
             </a:r>
             <a:endParaRPr lang="en-US" sz="800" dirty="0"/>
           </a:p>
@@ -6040,7 +6040,7 @@
                 <a:ea typeface="Calibri" pitchFamily="34" charset="-122"/>
                 <a:cs typeface="Calibri" pitchFamily="34" charset="-120"/>
               </a:rPr>
-              <a:t>The fearless </a:t>
+              <a:t>The </a:t>
             </a:r>
             <a:pPr algn="l" indent="0" marL="0">
               <a:buNone/>
@@ -6057,7 +6057,7 @@
                 <a:ea typeface="Calibri" pitchFamily="34" charset="-122"/>
                 <a:cs typeface="Calibri" pitchFamily="34" charset="-120"/>
               </a:rPr>
-              <a:t>warrior</a:t>
+              <a:t>postwar</a:t>
             </a:r>
             <a:pPr algn="l" indent="0" marL="0">
               <a:buNone/>
@@ -6071,7 +6071,7 @@
                 <a:ea typeface="Calibri" pitchFamily="34" charset="-122"/>
                 <a:cs typeface="Calibri" pitchFamily="34" charset="-120"/>
               </a:rPr>
-              <a:t> trained every day, and the </a:t>
+              <a:t> years saw rapid rebuilding of the city. The police obtained a </a:t>
             </a:r>
             <a:pPr algn="l" indent="0" marL="0">
               <a:buNone/>
@@ -6088,7 +6088,7 @@
                 <a:ea typeface="Calibri" pitchFamily="34" charset="-122"/>
                 <a:cs typeface="Calibri" pitchFamily="34" charset="-120"/>
               </a:rPr>
-              <a:t>warship</a:t>
+              <a:t>warrant</a:t>
             </a:r>
             <a:pPr algn="l" indent="0" marL="0">
               <a:buNone/>
@@ -6102,7 +6102,7 @@
                 <a:ea typeface="Calibri" pitchFamily="34" charset="-122"/>
                 <a:cs typeface="Calibri" pitchFamily="34" charset="-120"/>
               </a:rPr>
-              <a:t> set sail at dawn.</a:t>
+              <a:t> to search the house.</a:t>
             </a:r>
             <a:endParaRPr lang="en-US" sz="1800" dirty="0"/>
           </a:p>
@@ -6257,7 +6257,7 @@
                 <a:ea typeface="Trebuchet MS" pitchFamily="34" charset="-122"/>
                 <a:cs typeface="Trebuchet MS" pitchFamily="34" charset="-120"/>
               </a:rPr>
-              <a:t>warrior</a:t>
+              <a:t>postwar</a:t>
             </a:r>
             <a:endParaRPr lang="en-US" sz="1400" dirty="0"/>
           </a:p>
@@ -6385,7 +6385,7 @@
                 <a:ea typeface="Trebuchet MS" pitchFamily="34" charset="-122"/>
                 <a:cs typeface="Trebuchet MS" pitchFamily="34" charset="-120"/>
               </a:rPr>
-              <a:t>warship</a:t>
+              <a:t>warrant</a:t>
             </a:r>
             <a:endParaRPr lang="en-US" sz="1400" dirty="0"/>
           </a:p>
@@ -6716,7 +6716,7 @@
                 <a:ea typeface="Calibri" pitchFamily="34" charset="-122"/>
                 <a:cs typeface="Calibri" pitchFamily="34" charset="-120"/>
               </a:rPr>
-              <a:t>Word Labs  •  wordlabs.app  •  Root: 'war' = conflict, fighting, armed struggle</a:t>
+              <a:t>Word Labs  •  wordlabs.app  •  Root: 'war' = armed conflict between groups</a:t>
             </a:r>
             <a:endParaRPr lang="en-US" sz="800" dirty="0"/>
           </a:p>
@@ -6855,7 +6855,7 @@
                 <a:ea typeface="Trebuchet MS" pitchFamily="34" charset="-122"/>
                 <a:cs typeface="Trebuchet MS" pitchFamily="34" charset="-120"/>
               </a:rPr>
-              <a:t>warrior</a:t>
+              <a:t>postwar</a:t>
             </a:r>
             <a:endParaRPr lang="en-US" sz="2800" dirty="0"/>
           </a:p>
@@ -7543,7 +7543,7 @@
                 <a:ea typeface="Calibri" pitchFamily="34" charset="-122"/>
                 <a:cs typeface="Calibri" pitchFamily="34" charset="-120"/>
               </a:rPr>
-              <a:t>Word Labs  •  wordlabs.app  •  Root: 'war' = conflict, fighting, armed struggle</a:t>
+              <a:t>Word Labs  •  wordlabs.app  •  Root: 'war' = armed conflict between groups</a:t>
             </a:r>
             <a:endParaRPr lang="en-US" sz="800" dirty="0"/>
           </a:p>
@@ -7682,7 +7682,7 @@
                 <a:ea typeface="Trebuchet MS" pitchFamily="34" charset="-122"/>
                 <a:cs typeface="Trebuchet MS" pitchFamily="34" charset="-120"/>
               </a:rPr>
-              <a:t>warrior</a:t>
+              <a:t>postwar</a:t>
             </a:r>
             <a:endParaRPr lang="en-US" sz="2800" dirty="0"/>
           </a:p>
@@ -7771,11 +7771,11 @@
             </a:avLst>
           </a:prstGeom>
           <a:solidFill>
-            <a:srgbClr val="CCFBF1"/>
+            <a:srgbClr val="DDD6FE"/>
           </a:solidFill>
           <a:ln w="19050">
             <a:solidFill>
-              <a:srgbClr val="0D9488"/>
+              <a:srgbClr val="7C3AED"/>
             </a:solidFill>
             <a:prstDash val="solid"/>
           </a:ln>
@@ -7815,13 +7815,13 @@
             <a:r>
               <a:rPr lang="en-US" sz="1300" b="1" dirty="0">
                 <a:solidFill>
-                  <a:srgbClr val="0F766E"/>
+                  <a:srgbClr val="4C1D95"/>
                 </a:solidFill>
                 <a:latin typeface="Trebuchet MS" pitchFamily="34" charset="0"/>
                 <a:ea typeface="Trebuchet MS" pitchFamily="34" charset="-122"/>
                 <a:cs typeface="Trebuchet MS" pitchFamily="34" charset="-120"/>
               </a:rPr>
-              <a:t>war</a:t>
+              <a:t>post</a:t>
             </a:r>
             <a:endParaRPr lang="en-US" sz="1300" dirty="0"/>
           </a:p>
@@ -7860,7 +7860,7 @@
                 <a:ea typeface="Calibri" pitchFamily="34" charset="-122"/>
                 <a:cs typeface="Calibri" pitchFamily="34" charset="-120"/>
               </a:rPr>
-              <a:t>conflict, fighting</a:t>
+              <a:t>after</a:t>
             </a:r>
             <a:endParaRPr lang="en-US" sz="850" dirty="0"/>
           </a:p>
@@ -7883,11 +7883,11 @@
             </a:avLst>
           </a:prstGeom>
           <a:solidFill>
-            <a:srgbClr val="FCE7F3"/>
+            <a:srgbClr val="CCFBF1"/>
           </a:solidFill>
           <a:ln w="19050">
             <a:solidFill>
-              <a:srgbClr val="DB2777"/>
+              <a:srgbClr val="0D9488"/>
             </a:solidFill>
             <a:prstDash val="solid"/>
           </a:ln>
@@ -7927,13 +7927,13 @@
             <a:r>
               <a:rPr lang="en-US" sz="1300" b="1" dirty="0">
                 <a:solidFill>
-                  <a:srgbClr val="9D174D"/>
+                  <a:srgbClr val="0F766E"/>
                 </a:solidFill>
                 <a:latin typeface="Trebuchet MS" pitchFamily="34" charset="0"/>
                 <a:ea typeface="Trebuchet MS" pitchFamily="34" charset="-122"/>
                 <a:cs typeface="Trebuchet MS" pitchFamily="34" charset="-120"/>
               </a:rPr>
-              <a:t>rior</a:t>
+              <a:t>war</a:t>
             </a:r>
             <a:endParaRPr lang="en-US" sz="1300" dirty="0"/>
           </a:p>
@@ -7972,7 +7972,7 @@
                 <a:ea typeface="Calibri" pitchFamily="34" charset="-122"/>
                 <a:cs typeface="Calibri" pitchFamily="34" charset="-120"/>
               </a:rPr>
-              <a:t>one who does</a:t>
+              <a:t>armed conflict between groups</a:t>
             </a:r>
             <a:endParaRPr lang="en-US" sz="850" dirty="0"/>
           </a:p>
@@ -8528,7 +8528,7 @@
                 <a:ea typeface="Calibri" pitchFamily="34" charset="-122"/>
                 <a:cs typeface="Calibri" pitchFamily="34" charset="-120"/>
               </a:rPr>
-              <a:t>Word Labs  •  wordlabs.app  •  Root: 'war' = conflict, fighting, armed struggle</a:t>
+              <a:t>Word Labs  •  wordlabs.app  •  Root: 'war' = armed conflict between groups</a:t>
             </a:r>
             <a:endParaRPr lang="en-US" sz="800" dirty="0"/>
           </a:p>
@@ -8667,7 +8667,7 @@
                 <a:ea typeface="Trebuchet MS" pitchFamily="34" charset="-122"/>
                 <a:cs typeface="Trebuchet MS" pitchFamily="34" charset="-120"/>
               </a:rPr>
-              <a:t>warrior</a:t>
+              <a:t>postwar</a:t>
             </a:r>
             <a:endParaRPr lang="en-US" sz="2800" dirty="0"/>
           </a:p>
@@ -8756,11 +8756,11 @@
             </a:avLst>
           </a:prstGeom>
           <a:solidFill>
-            <a:srgbClr val="CCFBF1"/>
+            <a:srgbClr val="DDD6FE"/>
           </a:solidFill>
           <a:ln w="19050">
             <a:solidFill>
-              <a:srgbClr val="0D9488"/>
+              <a:srgbClr val="7C3AED"/>
             </a:solidFill>
             <a:prstDash val="solid"/>
           </a:ln>
@@ -8800,13 +8800,13 @@
             <a:r>
               <a:rPr lang="en-US" sz="1300" b="1" dirty="0">
                 <a:solidFill>
-                  <a:srgbClr val="0F766E"/>
+                  <a:srgbClr val="4C1D95"/>
                 </a:solidFill>
                 <a:latin typeface="Trebuchet MS" pitchFamily="34" charset="0"/>
                 <a:ea typeface="Trebuchet MS" pitchFamily="34" charset="-122"/>
                 <a:cs typeface="Trebuchet MS" pitchFamily="34" charset="-120"/>
               </a:rPr>
-              <a:t>war</a:t>
+              <a:t>post</a:t>
             </a:r>
             <a:endParaRPr lang="en-US" sz="1300" dirty="0"/>
           </a:p>
@@ -8845,7 +8845,7 @@
                 <a:ea typeface="Calibri" pitchFamily="34" charset="-122"/>
                 <a:cs typeface="Calibri" pitchFamily="34" charset="-120"/>
               </a:rPr>
-              <a:t>conflict, fighting</a:t>
+              <a:t>after</a:t>
             </a:r>
             <a:endParaRPr lang="en-US" sz="850" dirty="0"/>
           </a:p>
@@ -8868,11 +8868,11 @@
             </a:avLst>
           </a:prstGeom>
           <a:solidFill>
-            <a:srgbClr val="FCE7F3"/>
+            <a:srgbClr val="CCFBF1"/>
           </a:solidFill>
           <a:ln w="19050">
             <a:solidFill>
-              <a:srgbClr val="DB2777"/>
+              <a:srgbClr val="0D9488"/>
             </a:solidFill>
             <a:prstDash val="solid"/>
           </a:ln>
@@ -8912,13 +8912,13 @@
             <a:r>
               <a:rPr lang="en-US" sz="1300" b="1" dirty="0">
                 <a:solidFill>
-                  <a:srgbClr val="9D174D"/>
+                  <a:srgbClr val="0F766E"/>
                 </a:solidFill>
                 <a:latin typeface="Trebuchet MS" pitchFamily="34" charset="0"/>
                 <a:ea typeface="Trebuchet MS" pitchFamily="34" charset="-122"/>
                 <a:cs typeface="Trebuchet MS" pitchFamily="34" charset="-120"/>
               </a:rPr>
-              <a:t>rior</a:t>
+              <a:t>war</a:t>
             </a:r>
             <a:endParaRPr lang="en-US" sz="1300" dirty="0"/>
           </a:p>
@@ -8957,7 +8957,7 @@
                 <a:ea typeface="Calibri" pitchFamily="34" charset="-122"/>
                 <a:cs typeface="Calibri" pitchFamily="34" charset="-120"/>
               </a:rPr>
-              <a:t>one who does</a:t>
+              <a:t>armed conflict between groups</a:t>
             </a:r>
             <a:endParaRPr lang="en-US" sz="850" dirty="0"/>
           </a:p>
@@ -9064,7 +9064,7 @@
         </p:nvSpPr>
         <p:spPr>
           <a:xfrm>
-            <a:off x="2313432" y="3364992"/>
+            <a:off x="2999232" y="3364992"/>
             <a:ext cx="1645920" cy="475488"/>
           </a:xfrm>
           <a:prstGeom prst="rect">
@@ -9091,7 +9091,7 @@
         </p:nvSpPr>
         <p:spPr>
           <a:xfrm>
-            <a:off x="2313432" y="3364992"/>
+            <a:off x="2999232" y="3364992"/>
             <a:ext cx="1645920" cy="475488"/>
           </a:xfrm>
           <a:prstGeom prst="rect">
@@ -9116,7 +9116,7 @@
                 <a:ea typeface="Trebuchet MS" pitchFamily="34" charset="-122"/>
                 <a:cs typeface="Trebuchet MS" pitchFamily="34" charset="-120"/>
               </a:rPr>
-              <a:t>war</a:t>
+              <a:t>post</a:t>
             </a:r>
             <a:endParaRPr lang="en-US" sz="1400" dirty="0"/>
           </a:p>
@@ -9130,8 +9130,8 @@
         </p:nvSpPr>
         <p:spPr>
           <a:xfrm>
-            <a:off x="3959352" y="3364992"/>
-            <a:ext cx="411480" cy="475488"/>
+            <a:off x="4645152" y="3364992"/>
+            <a:ext cx="1097280" cy="475488"/>
           </a:xfrm>
           <a:prstGeom prst="rect">
             <a:avLst/>
@@ -9169,7 +9169,7 @@
         </p:nvSpPr>
         <p:spPr>
           <a:xfrm>
-            <a:off x="4370832" y="3364992"/>
+            <a:off x="5742432" y="3364992"/>
             <a:ext cx="1645920" cy="475488"/>
           </a:xfrm>
           <a:prstGeom prst="rect">
@@ -9196,7 +9196,7 @@
         </p:nvSpPr>
         <p:spPr>
           <a:xfrm>
-            <a:off x="4370832" y="3364992"/>
+            <a:off x="5742432" y="3364992"/>
             <a:ext cx="1645920" cy="475488"/>
           </a:xfrm>
           <a:prstGeom prst="rect">
@@ -9221,7 +9221,7 @@
                 <a:ea typeface="Trebuchet MS" pitchFamily="34" charset="-122"/>
                 <a:cs typeface="Trebuchet MS" pitchFamily="34" charset="-120"/>
               </a:rPr>
-              <a:t>ri</a:t>
+              <a:t>war</a:t>
             </a:r>
             <a:endParaRPr lang="en-US" sz="1400" dirty="0"/>
           </a:p>
@@ -9229,14 +9229,41 @@
       </p:sp>
       <p:sp>
         <p:nvSpPr>
-          <p:cNvPr id="30" name="Text 28"/>
-          <p:cNvSpPr/>
-          <p:nvPr/>
-        </p:nvSpPr>
-        <p:spPr>
-          <a:xfrm>
-            <a:off x="6016752" y="3364992"/>
-            <a:ext cx="411480" cy="475488"/>
+          <p:cNvPr id="30" name="Shape 28"/>
+          <p:cNvSpPr/>
+          <p:nvPr/>
+        </p:nvSpPr>
+        <p:spPr>
+          <a:xfrm>
+            <a:off x="365760" y="4096512"/>
+            <a:ext cx="1371600" cy="804672"/>
+          </a:xfrm>
+          <a:prstGeom prst="rect">
+            <a:avLst>
+              <a:gd name="adj" fmla="val 6818"/>
+            </a:avLst>
+          </a:prstGeom>
+          <a:solidFill>
+            <a:srgbClr val="E2E8F0"/>
+          </a:solidFill>
+          <a:ln w="12700">
+            <a:solidFill>
+              <a:srgbClr val="E2E8F0"/>
+            </a:solidFill>
+            <a:prstDash val="solid"/>
+          </a:ln>
+        </p:spPr>
+      </p:sp>
+      <p:sp>
+        <p:nvSpPr>
+          <p:cNvPr id="31" name="Text 29"/>
+          <p:cNvSpPr/>
+          <p:nvPr/>
+        </p:nvSpPr>
+        <p:spPr>
+          <a:xfrm>
+            <a:off x="365760" y="4096512"/>
+            <a:ext cx="1371600" cy="804672"/>
           </a:xfrm>
           <a:prstGeom prst="rect">
             <a:avLst/>
@@ -9252,96 +9279,30 @@
               <a:buNone/>
             </a:pPr>
             <a:r>
-              <a:rPr lang="en-US" sz="1600" b="1" dirty="0">
-                <a:solidFill>
-                  <a:srgbClr val="0D9488"/>
+              <a:rPr lang="en-US" sz="1100" b="1" dirty="0">
+                <a:solidFill>
+                  <a:srgbClr val="475569"/>
                 </a:solidFill>
                 <a:latin typeface="Trebuchet MS" pitchFamily="34" charset="0"/>
                 <a:ea typeface="Trebuchet MS" pitchFamily="34" charset="-122"/>
                 <a:cs typeface="Trebuchet MS" pitchFamily="34" charset="-120"/>
               </a:rPr>
-              <a:t>·</a:t>
-            </a:r>
-            <a:endParaRPr lang="en-US" sz="1600" dirty="0"/>
-          </a:p>
-        </p:txBody>
-      </p:sp>
-      <p:sp>
-        <p:nvSpPr>
-          <p:cNvPr id="31" name="Shape 29"/>
-          <p:cNvSpPr/>
-          <p:nvPr/>
-        </p:nvSpPr>
-        <p:spPr>
-          <a:xfrm>
-            <a:off x="6428232" y="3364992"/>
-            <a:ext cx="1645920" cy="475488"/>
-          </a:xfrm>
-          <a:prstGeom prst="rect">
-            <a:avLst>
-              <a:gd name="adj" fmla="val 9615"/>
-            </a:avLst>
-          </a:prstGeom>
-          <a:solidFill>
-            <a:srgbClr val="FFFFFF"/>
-          </a:solidFill>
-          <a:ln w="12700">
-            <a:solidFill>
-              <a:srgbClr val="0D9488"/>
-            </a:solidFill>
-            <a:prstDash val="solid"/>
-          </a:ln>
-        </p:spPr>
-      </p:sp>
-      <p:sp>
-        <p:nvSpPr>
-          <p:cNvPr id="32" name="Text 30"/>
-          <p:cNvSpPr/>
-          <p:nvPr/>
-        </p:nvSpPr>
-        <p:spPr>
-          <a:xfrm>
-            <a:off x="6428232" y="3364992"/>
-            <a:ext cx="1645920" cy="475488"/>
-          </a:xfrm>
-          <a:prstGeom prst="rect">
-            <a:avLst/>
-          </a:prstGeom>
-          <a:noFill/>
-          <a:ln/>
-        </p:spPr>
-        <p:txBody>
-          <a:bodyPr wrap="square" lIns="0" tIns="0" rIns="0" bIns="0" rtlCol="0" anchor="ctr"/>
-          <a:lstStyle/>
-          <a:p>
-            <a:pPr algn="ctr" indent="0" marL="0">
-              <a:buNone/>
-            </a:pPr>
-            <a:r>
-              <a:rPr lang="en-US" sz="1400" b="1" dirty="0">
-                <a:solidFill>
-                  <a:srgbClr val="0D9488"/>
-                </a:solidFill>
-                <a:latin typeface="Trebuchet MS" pitchFamily="34" charset="0"/>
-                <a:ea typeface="Trebuchet MS" pitchFamily="34" charset="-122"/>
-                <a:cs typeface="Trebuchet MS" pitchFamily="34" charset="-120"/>
-              </a:rPr>
-              <a:t>or</a:t>
-            </a:r>
-            <a:endParaRPr lang="en-US" sz="1400" dirty="0"/>
-          </a:p>
-        </p:txBody>
-      </p:sp>
-      <p:sp>
-        <p:nvSpPr>
-          <p:cNvPr id="33" name="Shape 31"/>
-          <p:cNvSpPr/>
-          <p:nvPr/>
-        </p:nvSpPr>
-        <p:spPr>
-          <a:xfrm>
-            <a:off x="365760" y="4096512"/>
-            <a:ext cx="1371600" cy="804672"/>
+              <a:t>Phonemes</a:t>
+            </a:r>
+            <a:endParaRPr lang="en-US" sz="1100" dirty="0"/>
+          </a:p>
+        </p:txBody>
+      </p:sp>
+      <p:sp>
+        <p:nvSpPr>
+          <p:cNvPr id="32" name="Shape 30"/>
+          <p:cNvSpPr/>
+          <p:nvPr/>
+        </p:nvSpPr>
+        <p:spPr>
+          <a:xfrm>
+            <a:off x="1874520" y="4096512"/>
+            <a:ext cx="6903720" cy="804672"/>
           </a:xfrm>
           <a:prstGeom prst="rect">
             <a:avLst>
@@ -9349,85 +9310,19 @@
             </a:avLst>
           </a:prstGeom>
           <a:solidFill>
-            <a:srgbClr val="E2E8F0"/>
+            <a:srgbClr val="F8FAFC"/>
           </a:solidFill>
           <a:ln w="12700">
             <a:solidFill>
               <a:srgbClr val="E2E8F0"/>
             </a:solidFill>
-            <a:prstDash val="solid"/>
-          </a:ln>
-        </p:spPr>
-      </p:sp>
-      <p:sp>
-        <p:nvSpPr>
-          <p:cNvPr id="34" name="Text 32"/>
-          <p:cNvSpPr/>
-          <p:nvPr/>
-        </p:nvSpPr>
-        <p:spPr>
-          <a:xfrm>
-            <a:off x="365760" y="4096512"/>
-            <a:ext cx="1371600" cy="804672"/>
-          </a:xfrm>
-          <a:prstGeom prst="rect">
-            <a:avLst/>
-          </a:prstGeom>
-          <a:noFill/>
-          <a:ln/>
-        </p:spPr>
-        <p:txBody>
-          <a:bodyPr wrap="square" lIns="0" tIns="0" rIns="0" bIns="0" rtlCol="0" anchor="ctr"/>
-          <a:lstStyle/>
-          <a:p>
-            <a:pPr algn="ctr" indent="0" marL="0">
-              <a:buNone/>
-            </a:pPr>
-            <a:r>
-              <a:rPr lang="en-US" sz="1100" b="1" dirty="0">
-                <a:solidFill>
-                  <a:srgbClr val="475569"/>
-                </a:solidFill>
-                <a:latin typeface="Trebuchet MS" pitchFamily="34" charset="0"/>
-                <a:ea typeface="Trebuchet MS" pitchFamily="34" charset="-122"/>
-                <a:cs typeface="Trebuchet MS" pitchFamily="34" charset="-120"/>
-              </a:rPr>
-              <a:t>Phonemes</a:t>
-            </a:r>
-            <a:endParaRPr lang="en-US" sz="1100" dirty="0"/>
-          </a:p>
-        </p:txBody>
-      </p:sp>
-      <p:sp>
-        <p:nvSpPr>
-          <p:cNvPr id="35" name="Shape 33"/>
-          <p:cNvSpPr/>
-          <p:nvPr/>
-        </p:nvSpPr>
-        <p:spPr>
-          <a:xfrm>
-            <a:off x="1874520" y="4096512"/>
-            <a:ext cx="6903720" cy="804672"/>
-          </a:xfrm>
-          <a:prstGeom prst="rect">
-            <a:avLst>
-              <a:gd name="adj" fmla="val 6818"/>
-            </a:avLst>
-          </a:prstGeom>
-          <a:solidFill>
-            <a:srgbClr val="F8FAFC"/>
-          </a:solidFill>
-          <a:ln w="12700">
-            <a:solidFill>
-              <a:srgbClr val="E2E8F0"/>
-            </a:solidFill>
             <a:prstDash val="dash"/>
           </a:ln>
         </p:spPr>
       </p:sp>
       <p:sp>
         <p:nvSpPr>
-          <p:cNvPr id="36" name="Text 34"/>
+          <p:cNvPr id="33" name="Text 31"/>
           <p:cNvSpPr/>
           <p:nvPr/>
         </p:nvSpPr>
@@ -9750,7 +9645,7 @@
                 <a:ea typeface="Calibri" pitchFamily="34" charset="-122"/>
                 <a:cs typeface="Calibri" pitchFamily="34" charset="-120"/>
               </a:rPr>
-              <a:t>Word Labs  •  wordlabs.app  •  Root: 'war' = conflict, fighting, armed struggle</a:t>
+              <a:t>Word Labs  •  wordlabs.app  •  Root: 'war' = armed conflict between groups</a:t>
             </a:r>
             <a:endParaRPr lang="en-US" sz="800" dirty="0"/>
           </a:p>
@@ -9889,7 +9784,7 @@
                 <a:ea typeface="Trebuchet MS" pitchFamily="34" charset="-122"/>
                 <a:cs typeface="Trebuchet MS" pitchFamily="34" charset="-120"/>
               </a:rPr>
-              <a:t>warrior</a:t>
+              <a:t>postwar</a:t>
             </a:r>
             <a:endParaRPr lang="en-US" sz="2800" dirty="0"/>
           </a:p>
@@ -9978,11 +9873,11 @@
             </a:avLst>
           </a:prstGeom>
           <a:solidFill>
-            <a:srgbClr val="CCFBF1"/>
+            <a:srgbClr val="DDD6FE"/>
           </a:solidFill>
           <a:ln w="19050">
             <a:solidFill>
-              <a:srgbClr val="0D9488"/>
+              <a:srgbClr val="7C3AED"/>
             </a:solidFill>
             <a:prstDash val="solid"/>
           </a:ln>
@@ -10022,13 +9917,13 @@
             <a:r>
               <a:rPr lang="en-US" sz="1300" b="1" dirty="0">
                 <a:solidFill>
-                  <a:srgbClr val="0F766E"/>
+                  <a:srgbClr val="4C1D95"/>
                 </a:solidFill>
                 <a:latin typeface="Trebuchet MS" pitchFamily="34" charset="0"/>
                 <a:ea typeface="Trebuchet MS" pitchFamily="34" charset="-122"/>
                 <a:cs typeface="Trebuchet MS" pitchFamily="34" charset="-120"/>
               </a:rPr>
-              <a:t>war</a:t>
+              <a:t>post</a:t>
             </a:r>
             <a:endParaRPr lang="en-US" sz="1300" dirty="0"/>
           </a:p>
@@ -10067,7 +9962,7 @@
                 <a:ea typeface="Calibri" pitchFamily="34" charset="-122"/>
                 <a:cs typeface="Calibri" pitchFamily="34" charset="-120"/>
               </a:rPr>
-              <a:t>conflict, fighting</a:t>
+              <a:t>after</a:t>
             </a:r>
             <a:endParaRPr lang="en-US" sz="850" dirty="0"/>
           </a:p>
@@ -10090,11 +9985,11 @@
             </a:avLst>
           </a:prstGeom>
           <a:solidFill>
-            <a:srgbClr val="FCE7F3"/>
+            <a:srgbClr val="CCFBF1"/>
           </a:solidFill>
           <a:ln w="19050">
             <a:solidFill>
-              <a:srgbClr val="DB2777"/>
+              <a:srgbClr val="0D9488"/>
             </a:solidFill>
             <a:prstDash val="solid"/>
           </a:ln>
@@ -10134,13 +10029,13 @@
             <a:r>
               <a:rPr lang="en-US" sz="1300" b="1" dirty="0">
                 <a:solidFill>
-                  <a:srgbClr val="9D174D"/>
+                  <a:srgbClr val="0F766E"/>
                 </a:solidFill>
                 <a:latin typeface="Trebuchet MS" pitchFamily="34" charset="0"/>
                 <a:ea typeface="Trebuchet MS" pitchFamily="34" charset="-122"/>
                 <a:cs typeface="Trebuchet MS" pitchFamily="34" charset="-120"/>
               </a:rPr>
-              <a:t>rior</a:t>
+              <a:t>war</a:t>
             </a:r>
             <a:endParaRPr lang="en-US" sz="1300" dirty="0"/>
           </a:p>
@@ -10179,7 +10074,7 @@
                 <a:ea typeface="Calibri" pitchFamily="34" charset="-122"/>
                 <a:cs typeface="Calibri" pitchFamily="34" charset="-120"/>
               </a:rPr>
-              <a:t>one who does</a:t>
+              <a:t>armed conflict between groups</a:t>
             </a:r>
             <a:endParaRPr lang="en-US" sz="850" dirty="0"/>
           </a:p>
@@ -10286,7 +10181,7 @@
         </p:nvSpPr>
         <p:spPr>
           <a:xfrm>
-            <a:off x="2313432" y="3364992"/>
+            <a:off x="2999232" y="3364992"/>
             <a:ext cx="1645920" cy="475488"/>
           </a:xfrm>
           <a:prstGeom prst="rect">
@@ -10313,7 +10208,7 @@
         </p:nvSpPr>
         <p:spPr>
           <a:xfrm>
-            <a:off x="2313432" y="3364992"/>
+            <a:off x="2999232" y="3364992"/>
             <a:ext cx="1645920" cy="475488"/>
           </a:xfrm>
           <a:prstGeom prst="rect">
@@ -10338,7 +10233,7 @@
                 <a:ea typeface="Trebuchet MS" pitchFamily="34" charset="-122"/>
                 <a:cs typeface="Trebuchet MS" pitchFamily="34" charset="-120"/>
               </a:rPr>
-              <a:t>war</a:t>
+              <a:t>post</a:t>
             </a:r>
             <a:endParaRPr lang="en-US" sz="1400" dirty="0"/>
           </a:p>
@@ -10352,8 +10247,8 @@
         </p:nvSpPr>
         <p:spPr>
           <a:xfrm>
-            <a:off x="3959352" y="3364992"/>
-            <a:ext cx="411480" cy="475488"/>
+            <a:off x="4645152" y="3364992"/>
+            <a:ext cx="1097280" cy="475488"/>
           </a:xfrm>
           <a:prstGeom prst="rect">
             <a:avLst/>
@@ -10391,7 +10286,7 @@
         </p:nvSpPr>
         <p:spPr>
           <a:xfrm>
-            <a:off x="4370832" y="3364992"/>
+            <a:off x="5742432" y="3364992"/>
             <a:ext cx="1645920" cy="475488"/>
           </a:xfrm>
           <a:prstGeom prst="rect">
@@ -10418,7 +10313,7 @@
         </p:nvSpPr>
         <p:spPr>
           <a:xfrm>
-            <a:off x="4370832" y="3364992"/>
+            <a:off x="5742432" y="3364992"/>
             <a:ext cx="1645920" cy="475488"/>
           </a:xfrm>
           <a:prstGeom prst="rect">
@@ -10443,7 +10338,7 @@
                 <a:ea typeface="Trebuchet MS" pitchFamily="34" charset="-122"/>
                 <a:cs typeface="Trebuchet MS" pitchFamily="34" charset="-120"/>
               </a:rPr>
-              <a:t>ri</a:t>
+              <a:t>war</a:t>
             </a:r>
             <a:endParaRPr lang="en-US" sz="1400" dirty="0"/>
           </a:p>
@@ -10451,14 +10346,41 @@
       </p:sp>
       <p:sp>
         <p:nvSpPr>
-          <p:cNvPr id="30" name="Text 28"/>
-          <p:cNvSpPr/>
-          <p:nvPr/>
-        </p:nvSpPr>
-        <p:spPr>
-          <a:xfrm>
-            <a:off x="6016752" y="3364992"/>
-            <a:ext cx="411480" cy="475488"/>
+          <p:cNvPr id="30" name="Shape 28"/>
+          <p:cNvSpPr/>
+          <p:nvPr/>
+        </p:nvSpPr>
+        <p:spPr>
+          <a:xfrm>
+            <a:off x="365760" y="4096512"/>
+            <a:ext cx="1371600" cy="804672"/>
+          </a:xfrm>
+          <a:prstGeom prst="rect">
+            <a:avLst>
+              <a:gd name="adj" fmla="val 6818"/>
+            </a:avLst>
+          </a:prstGeom>
+          <a:solidFill>
+            <a:srgbClr val="E2E8F0"/>
+          </a:solidFill>
+          <a:ln w="12700">
+            <a:solidFill>
+              <a:srgbClr val="E2E8F0"/>
+            </a:solidFill>
+            <a:prstDash val="solid"/>
+          </a:ln>
+        </p:spPr>
+      </p:sp>
+      <p:sp>
+        <p:nvSpPr>
+          <p:cNvPr id="31" name="Text 29"/>
+          <p:cNvSpPr/>
+          <p:nvPr/>
+        </p:nvSpPr>
+        <p:spPr>
+          <a:xfrm>
+            <a:off x="365760" y="4096512"/>
+            <a:ext cx="1371600" cy="804672"/>
           </a:xfrm>
           <a:prstGeom prst="rect">
             <a:avLst/>
@@ -10474,57 +10396,84 @@
               <a:buNone/>
             </a:pPr>
             <a:r>
-              <a:rPr lang="en-US" sz="1600" b="1" dirty="0">
-                <a:solidFill>
-                  <a:srgbClr val="0D9488"/>
+              <a:rPr lang="en-US" sz="1100" b="1" dirty="0">
+                <a:solidFill>
+                  <a:srgbClr val="475569"/>
                 </a:solidFill>
                 <a:latin typeface="Trebuchet MS" pitchFamily="34" charset="0"/>
                 <a:ea typeface="Trebuchet MS" pitchFamily="34" charset="-122"/>
                 <a:cs typeface="Trebuchet MS" pitchFamily="34" charset="-120"/>
               </a:rPr>
-              <a:t>·</a:t>
-            </a:r>
-            <a:endParaRPr lang="en-US" sz="1600" dirty="0"/>
-          </a:p>
-        </p:txBody>
-      </p:sp>
-      <p:sp>
-        <p:nvSpPr>
-          <p:cNvPr id="31" name="Shape 29"/>
-          <p:cNvSpPr/>
-          <p:nvPr/>
-        </p:nvSpPr>
-        <p:spPr>
-          <a:xfrm>
-            <a:off x="6428232" y="3364992"/>
-            <a:ext cx="1645920" cy="475488"/>
+              <a:t>Phonemes</a:t>
+            </a:r>
+            <a:endParaRPr lang="en-US" sz="1100" dirty="0"/>
+          </a:p>
+        </p:txBody>
+      </p:sp>
+      <p:sp>
+        <p:nvSpPr>
+          <p:cNvPr id="32" name="Shape 30"/>
+          <p:cNvSpPr/>
+          <p:nvPr/>
+        </p:nvSpPr>
+        <p:spPr>
+          <a:xfrm>
+            <a:off x="1874520" y="4096512"/>
+            <a:ext cx="6903720" cy="658368"/>
           </a:xfrm>
           <a:prstGeom prst="rect">
             <a:avLst>
-              <a:gd name="adj" fmla="val 9615"/>
+              <a:gd name="adj" fmla="val 8333"/>
             </a:avLst>
           </a:prstGeom>
           <a:solidFill>
+            <a:srgbClr val="FCE7F3"/>
+          </a:solidFill>
+          <a:ln w="12700">
+            <a:solidFill>
+              <a:srgbClr val="DB2777"/>
+            </a:solidFill>
+            <a:prstDash val="solid"/>
+          </a:ln>
+        </p:spPr>
+      </p:sp>
+      <p:sp>
+        <p:nvSpPr>
+          <p:cNvPr id="33" name="Shape 31"/>
+          <p:cNvSpPr/>
+          <p:nvPr/>
+        </p:nvSpPr>
+        <p:spPr>
+          <a:xfrm>
+            <a:off x="2254649" y="4169664"/>
+            <a:ext cx="685800" cy="475488"/>
+          </a:xfrm>
+          <a:prstGeom prst="rect">
+            <a:avLst>
+              <a:gd name="adj" fmla="val 7692"/>
+            </a:avLst>
+          </a:prstGeom>
+          <a:solidFill>
             <a:srgbClr val="FFFFFF"/>
           </a:solidFill>
           <a:ln w="12700">
             <a:solidFill>
-              <a:srgbClr val="0D9488"/>
-            </a:solidFill>
-            <a:prstDash val="solid"/>
-          </a:ln>
-        </p:spPr>
-      </p:sp>
-      <p:sp>
-        <p:nvSpPr>
-          <p:cNvPr id="32" name="Text 30"/>
-          <p:cNvSpPr/>
-          <p:nvPr/>
-        </p:nvSpPr>
-        <p:spPr>
-          <a:xfrm>
-            <a:off x="6428232" y="3364992"/>
-            <a:ext cx="1645920" cy="475488"/>
+              <a:srgbClr val="DB2777"/>
+            </a:solidFill>
+            <a:prstDash val="solid"/>
+          </a:ln>
+        </p:spPr>
+      </p:sp>
+      <p:sp>
+        <p:nvSpPr>
+          <p:cNvPr id="34" name="Text 32"/>
+          <p:cNvSpPr/>
+          <p:nvPr/>
+        </p:nvSpPr>
+        <p:spPr>
+          <a:xfrm>
+            <a:off x="2254649" y="4169664"/>
+            <a:ext cx="685800" cy="475488"/>
           </a:xfrm>
           <a:prstGeom prst="rect">
             <a:avLst/>
@@ -10540,57 +10489,57 @@
               <a:buNone/>
             </a:pPr>
             <a:r>
-              <a:rPr lang="en-US" sz="1400" b="1" dirty="0">
-                <a:solidFill>
-                  <a:srgbClr val="0D9488"/>
+              <a:rPr lang="en-US" sz="900" b="1" dirty="0">
+                <a:solidFill>
+                  <a:srgbClr val="9D174D"/>
                 </a:solidFill>
                 <a:latin typeface="Trebuchet MS" pitchFamily="34" charset="0"/>
                 <a:ea typeface="Trebuchet MS" pitchFamily="34" charset="-122"/>
                 <a:cs typeface="Trebuchet MS" pitchFamily="34" charset="-120"/>
               </a:rPr>
-              <a:t>or</a:t>
-            </a:r>
-            <a:endParaRPr lang="en-US" sz="1400" dirty="0"/>
-          </a:p>
-        </p:txBody>
-      </p:sp>
-      <p:sp>
-        <p:nvSpPr>
-          <p:cNvPr id="33" name="Shape 31"/>
-          <p:cNvSpPr/>
-          <p:nvPr/>
-        </p:nvSpPr>
-        <p:spPr>
-          <a:xfrm>
-            <a:off x="365760" y="4096512"/>
-            <a:ext cx="1371600" cy="804672"/>
+              <a:t>p</a:t>
+            </a:r>
+            <a:endParaRPr lang="en-US" sz="900" dirty="0"/>
+          </a:p>
+        </p:txBody>
+      </p:sp>
+      <p:sp>
+        <p:nvSpPr>
+          <p:cNvPr id="35" name="Shape 33"/>
+          <p:cNvSpPr/>
+          <p:nvPr/>
+        </p:nvSpPr>
+        <p:spPr>
+          <a:xfrm>
+            <a:off x="3293146" y="4169664"/>
+            <a:ext cx="685800" cy="475488"/>
           </a:xfrm>
           <a:prstGeom prst="rect">
             <a:avLst>
-              <a:gd name="adj" fmla="val 6818"/>
+              <a:gd name="adj" fmla="val 7692"/>
             </a:avLst>
           </a:prstGeom>
           <a:solidFill>
-            <a:srgbClr val="E2E8F0"/>
-          </a:solidFill>
-          <a:ln w="12700">
-            <a:solidFill>
-              <a:srgbClr val="E2E8F0"/>
-            </a:solidFill>
-            <a:prstDash val="solid"/>
-          </a:ln>
-        </p:spPr>
-      </p:sp>
-      <p:sp>
-        <p:nvSpPr>
-          <p:cNvPr id="34" name="Text 32"/>
-          <p:cNvSpPr/>
-          <p:nvPr/>
-        </p:nvSpPr>
-        <p:spPr>
-          <a:xfrm>
-            <a:off x="365760" y="4096512"/>
-            <a:ext cx="1371600" cy="804672"/>
+            <a:srgbClr val="FFFFFF"/>
+          </a:solidFill>
+          <a:ln w="12700">
+            <a:solidFill>
+              <a:srgbClr val="DB2777"/>
+            </a:solidFill>
+            <a:prstDash val="solid"/>
+          </a:ln>
+        </p:spPr>
+      </p:sp>
+      <p:sp>
+        <p:nvSpPr>
+          <p:cNvPr id="36" name="Text 34"/>
+          <p:cNvSpPr/>
+          <p:nvPr/>
+        </p:nvSpPr>
+        <p:spPr>
+          <a:xfrm>
+            <a:off x="3293146" y="4169664"/>
+            <a:ext cx="685800" cy="475488"/>
           </a:xfrm>
           <a:prstGeom prst="rect">
             <a:avLst/>
@@ -10606,56 +10555,29 @@
               <a:buNone/>
             </a:pPr>
             <a:r>
-              <a:rPr lang="en-US" sz="1100" b="1" dirty="0">
-                <a:solidFill>
-                  <a:srgbClr val="475569"/>
+              <a:rPr lang="en-US" sz="900" b="1" dirty="0">
+                <a:solidFill>
+                  <a:srgbClr val="9D174D"/>
                 </a:solidFill>
                 <a:latin typeface="Trebuchet MS" pitchFamily="34" charset="0"/>
                 <a:ea typeface="Trebuchet MS" pitchFamily="34" charset="-122"/>
                 <a:cs typeface="Trebuchet MS" pitchFamily="34" charset="-120"/>
               </a:rPr>
-              <a:t>Phonemes</a:t>
-            </a:r>
-            <a:endParaRPr lang="en-US" sz="1100" dirty="0"/>
-          </a:p>
-        </p:txBody>
-      </p:sp>
-      <p:sp>
-        <p:nvSpPr>
-          <p:cNvPr id="35" name="Shape 33"/>
-          <p:cNvSpPr/>
-          <p:nvPr/>
-        </p:nvSpPr>
-        <p:spPr>
-          <a:xfrm>
-            <a:off x="1874520" y="4096512"/>
-            <a:ext cx="6903720" cy="658368"/>
-          </a:xfrm>
-          <a:prstGeom prst="rect">
-            <a:avLst>
-              <a:gd name="adj" fmla="val 8333"/>
-            </a:avLst>
-          </a:prstGeom>
-          <a:solidFill>
-            <a:srgbClr val="FCE7F3"/>
-          </a:solidFill>
-          <a:ln w="12700">
-            <a:solidFill>
-              <a:srgbClr val="DB2777"/>
-            </a:solidFill>
-            <a:prstDash val="solid"/>
-          </a:ln>
-        </p:spPr>
-      </p:sp>
-      <p:sp>
-        <p:nvSpPr>
-          <p:cNvPr id="36" name="Shape 34"/>
-          <p:cNvSpPr/>
-          <p:nvPr/>
-        </p:nvSpPr>
-        <p:spPr>
-          <a:xfrm>
-            <a:off x="2427732" y="4169664"/>
+              <a:t>o</a:t>
+            </a:r>
+            <a:endParaRPr lang="en-US" sz="900" dirty="0"/>
+          </a:p>
+        </p:txBody>
+      </p:sp>
+      <p:sp>
+        <p:nvSpPr>
+          <p:cNvPr id="37" name="Shape 35"/>
+          <p:cNvSpPr/>
+          <p:nvPr/>
+        </p:nvSpPr>
+        <p:spPr>
+          <a:xfrm>
+            <a:off x="4331643" y="4169664"/>
             <a:ext cx="685800" cy="475488"/>
           </a:xfrm>
           <a:prstGeom prst="rect">
@@ -10676,13 +10598,13 @@
       </p:sp>
       <p:sp>
         <p:nvSpPr>
-          <p:cNvPr id="37" name="Text 35"/>
-          <p:cNvSpPr/>
-          <p:nvPr/>
-        </p:nvSpPr>
-        <p:spPr>
-          <a:xfrm>
-            <a:off x="2427732" y="4169664"/>
+          <p:cNvPr id="38" name="Text 36"/>
+          <p:cNvSpPr/>
+          <p:nvPr/>
+        </p:nvSpPr>
+        <p:spPr>
+          <a:xfrm>
+            <a:off x="4331643" y="4169664"/>
             <a:ext cx="685800" cy="475488"/>
           </a:xfrm>
           <a:prstGeom prst="rect">
@@ -10707,7 +10629,7 @@
                 <a:ea typeface="Trebuchet MS" pitchFamily="34" charset="-122"/>
                 <a:cs typeface="Trebuchet MS" pitchFamily="34" charset="-120"/>
               </a:rPr>
-              <a:t>w</a:t>
+              <a:t>s</a:t>
             </a:r>
             <a:endParaRPr lang="en-US" sz="900" dirty="0"/>
           </a:p>
@@ -10715,13 +10637,13 @@
       </p:sp>
       <p:sp>
         <p:nvSpPr>
-          <p:cNvPr id="38" name="Shape 36"/>
-          <p:cNvSpPr/>
-          <p:nvPr/>
-        </p:nvSpPr>
-        <p:spPr>
-          <a:xfrm>
-            <a:off x="3639312" y="4169664"/>
+          <p:cNvPr id="39" name="Shape 37"/>
+          <p:cNvSpPr/>
+          <p:nvPr/>
+        </p:nvSpPr>
+        <p:spPr>
+          <a:xfrm>
+            <a:off x="5370141" y="4169664"/>
             <a:ext cx="685800" cy="475488"/>
           </a:xfrm>
           <a:prstGeom prst="rect">
@@ -10742,13 +10664,13 @@
       </p:sp>
       <p:sp>
         <p:nvSpPr>
-          <p:cNvPr id="39" name="Text 37"/>
-          <p:cNvSpPr/>
-          <p:nvPr/>
-        </p:nvSpPr>
-        <p:spPr>
-          <a:xfrm>
-            <a:off x="3639312" y="4169664"/>
+          <p:cNvPr id="40" name="Text 38"/>
+          <p:cNvSpPr/>
+          <p:nvPr/>
+        </p:nvSpPr>
+        <p:spPr>
+          <a:xfrm>
+            <a:off x="5370141" y="4169664"/>
             <a:ext cx="685800" cy="475488"/>
           </a:xfrm>
           <a:prstGeom prst="rect">
@@ -10773,7 +10695,7 @@
                 <a:ea typeface="Trebuchet MS" pitchFamily="34" charset="-122"/>
                 <a:cs typeface="Trebuchet MS" pitchFamily="34" charset="-120"/>
               </a:rPr>
-              <a:t>ar</a:t>
+              <a:t>t</a:t>
             </a:r>
             <a:endParaRPr lang="en-US" sz="900" dirty="0"/>
           </a:p>
@@ -10781,13 +10703,13 @@
       </p:sp>
       <p:sp>
         <p:nvSpPr>
-          <p:cNvPr id="40" name="Shape 38"/>
-          <p:cNvSpPr/>
-          <p:nvPr/>
-        </p:nvSpPr>
-        <p:spPr>
-          <a:xfrm>
-            <a:off x="4850892" y="4169664"/>
+          <p:cNvPr id="41" name="Shape 39"/>
+          <p:cNvSpPr/>
+          <p:nvPr/>
+        </p:nvSpPr>
+        <p:spPr>
+          <a:xfrm>
+            <a:off x="6408638" y="4169664"/>
             <a:ext cx="685800" cy="475488"/>
           </a:xfrm>
           <a:prstGeom prst="rect">
@@ -10808,13 +10730,13 @@
       </p:sp>
       <p:sp>
         <p:nvSpPr>
-          <p:cNvPr id="41" name="Text 39"/>
-          <p:cNvSpPr/>
-          <p:nvPr/>
-        </p:nvSpPr>
-        <p:spPr>
-          <a:xfrm>
-            <a:off x="4850892" y="4169664"/>
+          <p:cNvPr id="42" name="Text 40"/>
+          <p:cNvSpPr/>
+          <p:nvPr/>
+        </p:nvSpPr>
+        <p:spPr>
+          <a:xfrm>
+            <a:off x="6408638" y="4169664"/>
             <a:ext cx="685800" cy="475488"/>
           </a:xfrm>
           <a:prstGeom prst="rect">
@@ -10839,7 +10761,7 @@
                 <a:ea typeface="Trebuchet MS" pitchFamily="34" charset="-122"/>
                 <a:cs typeface="Trebuchet MS" pitchFamily="34" charset="-120"/>
               </a:rPr>
-              <a:t>r</a:t>
+              <a:t>w</a:t>
             </a:r>
             <a:endParaRPr lang="en-US" sz="900" dirty="0"/>
           </a:p>
@@ -10847,13 +10769,13 @@
       </p:sp>
       <p:sp>
         <p:nvSpPr>
-          <p:cNvPr id="42" name="Shape 40"/>
-          <p:cNvSpPr/>
-          <p:nvPr/>
-        </p:nvSpPr>
-        <p:spPr>
-          <a:xfrm>
-            <a:off x="6062472" y="4169664"/>
+          <p:cNvPr id="43" name="Shape 41"/>
+          <p:cNvSpPr/>
+          <p:nvPr/>
+        </p:nvSpPr>
+        <p:spPr>
+          <a:xfrm>
+            <a:off x="7447135" y="4169664"/>
             <a:ext cx="685800" cy="475488"/>
           </a:xfrm>
           <a:prstGeom prst="rect">
@@ -10874,13 +10796,13 @@
       </p:sp>
       <p:sp>
         <p:nvSpPr>
-          <p:cNvPr id="43" name="Text 41"/>
-          <p:cNvSpPr/>
-          <p:nvPr/>
-        </p:nvSpPr>
-        <p:spPr>
-          <a:xfrm>
-            <a:off x="6062472" y="4169664"/>
+          <p:cNvPr id="44" name="Text 42"/>
+          <p:cNvSpPr/>
+          <p:nvPr/>
+        </p:nvSpPr>
+        <p:spPr>
+          <a:xfrm>
+            <a:off x="7447135" y="4169664"/>
             <a:ext cx="685800" cy="475488"/>
           </a:xfrm>
           <a:prstGeom prst="rect">
@@ -10905,73 +10827,7 @@
                 <a:ea typeface="Trebuchet MS" pitchFamily="34" charset="-122"/>
                 <a:cs typeface="Trebuchet MS" pitchFamily="34" charset="-120"/>
               </a:rPr>
-              <a:t>i</a:t>
-            </a:r>
-            <a:endParaRPr lang="en-US" sz="900" dirty="0"/>
-          </a:p>
-        </p:txBody>
-      </p:sp>
-      <p:sp>
-        <p:nvSpPr>
-          <p:cNvPr id="44" name="Shape 42"/>
-          <p:cNvSpPr/>
-          <p:nvPr/>
-        </p:nvSpPr>
-        <p:spPr>
-          <a:xfrm>
-            <a:off x="7274052" y="4169664"/>
-            <a:ext cx="685800" cy="475488"/>
-          </a:xfrm>
-          <a:prstGeom prst="rect">
-            <a:avLst>
-              <a:gd name="adj" fmla="val 7692"/>
-            </a:avLst>
-          </a:prstGeom>
-          <a:solidFill>
-            <a:srgbClr val="FFFFFF"/>
-          </a:solidFill>
-          <a:ln w="12700">
-            <a:solidFill>
-              <a:srgbClr val="DB2777"/>
-            </a:solidFill>
-            <a:prstDash val="solid"/>
-          </a:ln>
-        </p:spPr>
-      </p:sp>
-      <p:sp>
-        <p:nvSpPr>
-          <p:cNvPr id="45" name="Text 43"/>
-          <p:cNvSpPr/>
-          <p:nvPr/>
-        </p:nvSpPr>
-        <p:spPr>
-          <a:xfrm>
-            <a:off x="7274052" y="4169664"/>
-            <a:ext cx="685800" cy="475488"/>
-          </a:xfrm>
-          <a:prstGeom prst="rect">
-            <a:avLst/>
-          </a:prstGeom>
-          <a:noFill/>
-          <a:ln/>
-        </p:spPr>
-        <p:txBody>
-          <a:bodyPr wrap="square" lIns="0" tIns="0" rIns="0" bIns="0" rtlCol="0" anchor="ctr"/>
-          <a:lstStyle/>
-          <a:p>
-            <a:pPr algn="ctr" indent="0" marL="0">
-              <a:buNone/>
-            </a:pPr>
-            <a:r>
-              <a:rPr lang="en-US" sz="900" b="1" dirty="0">
-                <a:solidFill>
-                  <a:srgbClr val="9D174D"/>
-                </a:solidFill>
-                <a:latin typeface="Trebuchet MS" pitchFamily="34" charset="0"/>
-                <a:ea typeface="Trebuchet MS" pitchFamily="34" charset="-122"/>
-                <a:cs typeface="Trebuchet MS" pitchFamily="34" charset="-120"/>
-              </a:rPr>
-              <a:t>or</a:t>
+              <a:t>ar</a:t>
             </a:r>
             <a:endParaRPr lang="en-US" sz="900" dirty="0"/>
           </a:p>
@@ -11263,7 +11119,7 @@
                 <a:ea typeface="Calibri" pitchFamily="34" charset="-122"/>
                 <a:cs typeface="Calibri" pitchFamily="34" charset="-120"/>
               </a:rPr>
-              <a:t>Word Labs  •  wordlabs.app  •  Root: 'war' = conflict, fighting, armed struggle</a:t>
+              <a:t>Word Labs  •  wordlabs.app  •  Root: 'war' = armed conflict between groups</a:t>
             </a:r>
             <a:endParaRPr lang="en-US" sz="800" dirty="0"/>
           </a:p>
@@ -11402,7 +11258,7 @@
                 <a:ea typeface="Trebuchet MS" pitchFamily="34" charset="-122"/>
                 <a:cs typeface="Trebuchet MS" pitchFamily="34" charset="-120"/>
               </a:rPr>
-              <a:t>warship</a:t>
+              <a:t>warrant</a:t>
             </a:r>
             <a:endParaRPr lang="en-US" sz="2800" dirty="0"/>
           </a:p>
@@ -12090,7 +11946,7 @@
                 <a:ea typeface="Calibri" pitchFamily="34" charset="-122"/>
                 <a:cs typeface="Calibri" pitchFamily="34" charset="-120"/>
               </a:rPr>
-              <a:t>Word Labs  •  wordlabs.app  •  Root: 'war' = conflict, fighting, armed struggle</a:t>
+              <a:t>Word Labs  •  wordlabs.app  •  Root: 'war' = armed conflict between groups</a:t>
             </a:r>
             <a:endParaRPr lang="en-US" sz="800" dirty="0"/>
           </a:p>
@@ -12229,7 +12085,7 @@
                 <a:ea typeface="Trebuchet MS" pitchFamily="34" charset="-122"/>
                 <a:cs typeface="Trebuchet MS" pitchFamily="34" charset="-120"/>
               </a:rPr>
-              <a:t>warship</a:t>
+              <a:t>warrant</a:t>
             </a:r>
             <a:endParaRPr lang="en-US" sz="2800" dirty="0"/>
           </a:p>
@@ -12407,7 +12263,7 @@
                 <a:ea typeface="Calibri" pitchFamily="34" charset="-122"/>
                 <a:cs typeface="Calibri" pitchFamily="34" charset="-120"/>
               </a:rPr>
-              <a:t>conflict, fighting</a:t>
+              <a:t>armed conflict between groups</a:t>
             </a:r>
             <a:endParaRPr lang="en-US" sz="850" dirty="0"/>
           </a:p>
@@ -12480,7 +12336,7 @@
                 <a:ea typeface="Trebuchet MS" pitchFamily="34" charset="-122"/>
                 <a:cs typeface="Trebuchet MS" pitchFamily="34" charset="-120"/>
               </a:rPr>
-              <a:t>ship</a:t>
+              <a:t>ant</a:t>
             </a:r>
             <a:endParaRPr lang="en-US" sz="1300" dirty="0"/>
           </a:p>
@@ -12519,7 +12375,7 @@
                 <a:ea typeface="Calibri" pitchFamily="34" charset="-122"/>
                 <a:cs typeface="Calibri" pitchFamily="34" charset="-120"/>
               </a:rPr>
-              <a:t>a vessel or craft</a:t>
+              <a:t>person or thing that</a:t>
             </a:r>
             <a:endParaRPr lang="en-US" sz="850" dirty="0"/>
           </a:p>
@@ -13075,7 +12931,7 @@
                 <a:ea typeface="Calibri" pitchFamily="34" charset="-122"/>
                 <a:cs typeface="Calibri" pitchFamily="34" charset="-120"/>
               </a:rPr>
-              <a:t>Word Labs  •  wordlabs.app  •  Root: 'war' = conflict, fighting, armed struggle</a:t>
+              <a:t>Word Labs  •  wordlabs.app  •  Root: 'war' = armed conflict between groups</a:t>
             </a:r>
             <a:endParaRPr lang="en-US" sz="800" dirty="0"/>
           </a:p>
@@ -13214,7 +13070,7 @@
                 <a:ea typeface="Trebuchet MS" pitchFamily="34" charset="-122"/>
                 <a:cs typeface="Trebuchet MS" pitchFamily="34" charset="-120"/>
               </a:rPr>
-              <a:t>warship</a:t>
+              <a:t>warrant</a:t>
             </a:r>
             <a:endParaRPr lang="en-US" sz="2800" dirty="0"/>
           </a:p>
@@ -13392,7 +13248,7 @@
                 <a:ea typeface="Calibri" pitchFamily="34" charset="-122"/>
                 <a:cs typeface="Calibri" pitchFamily="34" charset="-120"/>
               </a:rPr>
-              <a:t>conflict, fighting</a:t>
+              <a:t>armed conflict between groups</a:t>
             </a:r>
             <a:endParaRPr lang="en-US" sz="850" dirty="0"/>
           </a:p>
@@ -13465,7 +13321,7 @@
                 <a:ea typeface="Trebuchet MS" pitchFamily="34" charset="-122"/>
                 <a:cs typeface="Trebuchet MS" pitchFamily="34" charset="-120"/>
               </a:rPr>
-              <a:t>ship</a:t>
+              <a:t>ant</a:t>
             </a:r>
             <a:endParaRPr lang="en-US" sz="1300" dirty="0"/>
           </a:p>
@@ -13504,7 +13360,7 @@
                 <a:ea typeface="Calibri" pitchFamily="34" charset="-122"/>
                 <a:cs typeface="Calibri" pitchFamily="34" charset="-120"/>
               </a:rPr>
-              <a:t>a vessel or craft</a:t>
+              <a:t>person or thing that</a:t>
             </a:r>
             <a:endParaRPr lang="en-US" sz="850" dirty="0"/>
           </a:p>
@@ -13768,7 +13624,7 @@
                 <a:ea typeface="Trebuchet MS" pitchFamily="34" charset="-122"/>
                 <a:cs typeface="Trebuchet MS" pitchFamily="34" charset="-120"/>
               </a:rPr>
-              <a:t>ship</a:t>
+              <a:t>rant</a:t>
             </a:r>
             <a:endParaRPr lang="en-US" sz="1400" dirty="0"/>
           </a:p>
@@ -14101,7 +13957,7 @@
                 <a:ea typeface="Calibri" pitchFamily="34" charset="-122"/>
                 <a:cs typeface="Calibri" pitchFamily="34" charset="-120"/>
               </a:rPr>
-              <a:t>Root 'war' — conflict, fighting, armed struggle</a:t>
+              <a:t>Root 'war' — armed conflict between groups</a:t>
             </a:r>
             <a:endParaRPr lang="en-US" sz="1600" dirty="0"/>
           </a:p>
@@ -14457,7 +14313,7 @@
                 <a:ea typeface="Calibri" pitchFamily="34" charset="-122"/>
                 <a:cs typeface="Calibri" pitchFamily="34" charset="-120"/>
               </a:rPr>
-              <a:t>Word Labs  •  wordlabs.app  •  Root: 'war' = conflict, fighting, armed struggle</a:t>
+              <a:t>Word Labs  •  wordlabs.app  •  Root: 'war' = armed conflict between groups</a:t>
             </a:r>
             <a:endParaRPr lang="en-US" sz="800" dirty="0"/>
           </a:p>
@@ -14596,7 +14452,7 @@
                 <a:ea typeface="Trebuchet MS" pitchFamily="34" charset="-122"/>
                 <a:cs typeface="Trebuchet MS" pitchFamily="34" charset="-120"/>
               </a:rPr>
-              <a:t>warship</a:t>
+              <a:t>warrant</a:t>
             </a:r>
             <a:endParaRPr lang="en-US" sz="2800" dirty="0"/>
           </a:p>
@@ -14774,7 +14630,7 @@
                 <a:ea typeface="Calibri" pitchFamily="34" charset="-122"/>
                 <a:cs typeface="Calibri" pitchFamily="34" charset="-120"/>
               </a:rPr>
-              <a:t>conflict, fighting</a:t>
+              <a:t>armed conflict between groups</a:t>
             </a:r>
             <a:endParaRPr lang="en-US" sz="850" dirty="0"/>
           </a:p>
@@ -14847,7 +14703,7 @@
                 <a:ea typeface="Trebuchet MS" pitchFamily="34" charset="-122"/>
                 <a:cs typeface="Trebuchet MS" pitchFamily="34" charset="-120"/>
               </a:rPr>
-              <a:t>ship</a:t>
+              <a:t>ant</a:t>
             </a:r>
             <a:endParaRPr lang="en-US" sz="1300" dirty="0"/>
           </a:p>
@@ -14886,7 +14742,7 @@
                 <a:ea typeface="Calibri" pitchFamily="34" charset="-122"/>
                 <a:cs typeface="Calibri" pitchFamily="34" charset="-120"/>
               </a:rPr>
-              <a:t>a vessel or craft</a:t>
+              <a:t>person or thing that</a:t>
             </a:r>
             <a:endParaRPr lang="en-US" sz="850" dirty="0"/>
           </a:p>
@@ -15150,7 +15006,7 @@
                 <a:ea typeface="Trebuchet MS" pitchFamily="34" charset="-122"/>
                 <a:cs typeface="Trebuchet MS" pitchFamily="34" charset="-120"/>
               </a:rPr>
-              <a:t>ship</a:t>
+              <a:t>rant</a:t>
             </a:r>
             <a:endParaRPr lang="en-US" sz="1400" dirty="0"/>
           </a:p>
@@ -15257,7 +15113,7 @@
         </p:nvSpPr>
         <p:spPr>
           <a:xfrm>
-            <a:off x="2427732" y="4169664"/>
+            <a:off x="2254649" y="4169664"/>
             <a:ext cx="685800" cy="475488"/>
           </a:xfrm>
           <a:prstGeom prst="rect">
@@ -15284,7 +15140,7 @@
         </p:nvSpPr>
         <p:spPr>
           <a:xfrm>
-            <a:off x="2427732" y="4169664"/>
+            <a:off x="2254649" y="4169664"/>
             <a:ext cx="685800" cy="475488"/>
           </a:xfrm>
           <a:prstGeom prst="rect">
@@ -15323,7 +15179,7 @@
         </p:nvSpPr>
         <p:spPr>
           <a:xfrm>
-            <a:off x="3639312" y="4169664"/>
+            <a:off x="3293146" y="4169664"/>
             <a:ext cx="685800" cy="475488"/>
           </a:xfrm>
           <a:prstGeom prst="rect">
@@ -15350,7 +15206,7 @@
         </p:nvSpPr>
         <p:spPr>
           <a:xfrm>
-            <a:off x="3639312" y="4169664"/>
+            <a:off x="3293146" y="4169664"/>
             <a:ext cx="685800" cy="475488"/>
           </a:xfrm>
           <a:prstGeom prst="rect">
@@ -15375,7 +15231,7 @@
                 <a:ea typeface="Trebuchet MS" pitchFamily="34" charset="-122"/>
                 <a:cs typeface="Trebuchet MS" pitchFamily="34" charset="-120"/>
               </a:rPr>
-              <a:t>ar</a:t>
+              <a:t>a</a:t>
             </a:r>
             <a:endParaRPr lang="en-US" sz="900" dirty="0"/>
           </a:p>
@@ -15389,7 +15245,7 @@
         </p:nvSpPr>
         <p:spPr>
           <a:xfrm>
-            <a:off x="4850892" y="4169664"/>
+            <a:off x="4331643" y="4169664"/>
             <a:ext cx="685800" cy="475488"/>
           </a:xfrm>
           <a:prstGeom prst="rect">
@@ -15416,7 +15272,7 @@
         </p:nvSpPr>
         <p:spPr>
           <a:xfrm>
-            <a:off x="4850892" y="4169664"/>
+            <a:off x="4331643" y="4169664"/>
             <a:ext cx="685800" cy="475488"/>
           </a:xfrm>
           <a:prstGeom prst="rect">
@@ -15441,7 +15297,7 @@
                 <a:ea typeface="Trebuchet MS" pitchFamily="34" charset="-122"/>
                 <a:cs typeface="Trebuchet MS" pitchFamily="34" charset="-120"/>
               </a:rPr>
-              <a:t>sh</a:t>
+              <a:t>rr</a:t>
             </a:r>
             <a:endParaRPr lang="en-US" sz="900" dirty="0"/>
           </a:p>
@@ -15455,7 +15311,7 @@
         </p:nvSpPr>
         <p:spPr>
           <a:xfrm>
-            <a:off x="6062472" y="4169664"/>
+            <a:off x="5370141" y="4169664"/>
             <a:ext cx="685800" cy="475488"/>
           </a:xfrm>
           <a:prstGeom prst="rect">
@@ -15482,7 +15338,7 @@
         </p:nvSpPr>
         <p:spPr>
           <a:xfrm>
-            <a:off x="6062472" y="4169664"/>
+            <a:off x="5370141" y="4169664"/>
             <a:ext cx="685800" cy="475488"/>
           </a:xfrm>
           <a:prstGeom prst="rect">
@@ -15507,7 +15363,7 @@
                 <a:ea typeface="Trebuchet MS" pitchFamily="34" charset="-122"/>
                 <a:cs typeface="Trebuchet MS" pitchFamily="34" charset="-120"/>
               </a:rPr>
-              <a:t>i</a:t>
+              <a:t>a</a:t>
             </a:r>
             <a:endParaRPr lang="en-US" sz="900" dirty="0"/>
           </a:p>
@@ -15521,7 +15377,7 @@
         </p:nvSpPr>
         <p:spPr>
           <a:xfrm>
-            <a:off x="7274052" y="4169664"/>
+            <a:off x="6408638" y="4169664"/>
             <a:ext cx="685800" cy="475488"/>
           </a:xfrm>
           <a:prstGeom prst="rect">
@@ -15548,7 +15404,7 @@
         </p:nvSpPr>
         <p:spPr>
           <a:xfrm>
-            <a:off x="7274052" y="4169664"/>
+            <a:off x="6408638" y="4169664"/>
             <a:ext cx="685800" cy="475488"/>
           </a:xfrm>
           <a:prstGeom prst="rect">
@@ -15573,7 +15429,73 @@
                 <a:ea typeface="Trebuchet MS" pitchFamily="34" charset="-122"/>
                 <a:cs typeface="Trebuchet MS" pitchFamily="34" charset="-120"/>
               </a:rPr>
-              <a:t>p</a:t>
+              <a:t>n</a:t>
+            </a:r>
+            <a:endParaRPr lang="en-US" sz="900" dirty="0"/>
+          </a:p>
+        </p:txBody>
+      </p:sp>
+      <p:sp>
+        <p:nvSpPr>
+          <p:cNvPr id="43" name="Shape 41"/>
+          <p:cNvSpPr/>
+          <p:nvPr/>
+        </p:nvSpPr>
+        <p:spPr>
+          <a:xfrm>
+            <a:off x="7447135" y="4169664"/>
+            <a:ext cx="685800" cy="475488"/>
+          </a:xfrm>
+          <a:prstGeom prst="rect">
+            <a:avLst>
+              <a:gd name="adj" fmla="val 7692"/>
+            </a:avLst>
+          </a:prstGeom>
+          <a:solidFill>
+            <a:srgbClr val="FFFFFF"/>
+          </a:solidFill>
+          <a:ln w="12700">
+            <a:solidFill>
+              <a:srgbClr val="DB2777"/>
+            </a:solidFill>
+            <a:prstDash val="solid"/>
+          </a:ln>
+        </p:spPr>
+      </p:sp>
+      <p:sp>
+        <p:nvSpPr>
+          <p:cNvPr id="44" name="Text 42"/>
+          <p:cNvSpPr/>
+          <p:nvPr/>
+        </p:nvSpPr>
+        <p:spPr>
+          <a:xfrm>
+            <a:off x="7447135" y="4169664"/>
+            <a:ext cx="685800" cy="475488"/>
+          </a:xfrm>
+          <a:prstGeom prst="rect">
+            <a:avLst/>
+          </a:prstGeom>
+          <a:noFill/>
+          <a:ln/>
+        </p:spPr>
+        <p:txBody>
+          <a:bodyPr wrap="square" lIns="0" tIns="0" rIns="0" bIns="0" rtlCol="0" anchor="ctr"/>
+          <a:lstStyle/>
+          <a:p>
+            <a:pPr algn="ctr" indent="0" marL="0">
+              <a:buNone/>
+            </a:pPr>
+            <a:r>
+              <a:rPr lang="en-US" sz="900" b="1" dirty="0">
+                <a:solidFill>
+                  <a:srgbClr val="9D174D"/>
+                </a:solidFill>
+                <a:latin typeface="Trebuchet MS" pitchFamily="34" charset="0"/>
+                <a:ea typeface="Trebuchet MS" pitchFamily="34" charset="-122"/>
+                <a:cs typeface="Trebuchet MS" pitchFamily="34" charset="-120"/>
+              </a:rPr>
+              <a:t>t</a:t>
             </a:r>
             <a:endParaRPr lang="en-US" sz="900" dirty="0"/>
           </a:p>
@@ -16147,7 +16069,7 @@
                 <a:ea typeface="Calibri" pitchFamily="34" charset="-122"/>
                 <a:cs typeface="Calibri" pitchFamily="34" charset="-120"/>
               </a:rPr>
-              <a:t>Word Labs  •  wordlabs.app  •  Root: 'war' = conflict, fighting, armed struggle</a:t>
+              <a:t>Word Labs  •  wordlabs.app  •  Root: 'war' = armed conflict between groups</a:t>
             </a:r>
             <a:endParaRPr lang="en-US" sz="800" dirty="0"/>
           </a:p>
@@ -16481,7 +16403,7 @@
                 <a:ea typeface="Trebuchet MS" pitchFamily="34" charset="-122"/>
                 <a:cs typeface="Trebuchet MS" pitchFamily="34" charset="-120"/>
               </a:rPr>
-              <a:t>2</a:t>
+              <a:t>0</a:t>
             </a:r>
             <a:pPr algn="ctr" indent="0" marL="0">
               <a:buNone/>
@@ -16495,7 +16417,7 @@
                 <a:ea typeface="Trebuchet MS" pitchFamily="34" charset="-122"/>
                 <a:cs typeface="Trebuchet MS" pitchFamily="34" charset="-120"/>
               </a:rPr>
-              <a:t>  punctuation marks</a:t>
+              <a:t>  punctuation mark</a:t>
             </a:r>
             <a:endParaRPr lang="en-US" sz="2800" dirty="0"/>
           </a:p>
@@ -16787,7 +16709,7 @@
                 <a:ea typeface="Calibri" pitchFamily="34" charset="-122"/>
                 <a:cs typeface="Calibri" pitchFamily="34" charset="-120"/>
               </a:rPr>
-              <a:t>Word Labs  •  wordlabs.app  •  Root: 'war' = conflict, fighting, armed struggle</a:t>
+              <a:t>Word Labs  •  wordlabs.app  •  Root: 'war' = armed conflict between groups</a:t>
             </a:r>
             <a:endParaRPr lang="en-US" sz="800" dirty="0"/>
           </a:p>
@@ -16899,7 +16821,7 @@
                 <a:ea typeface="Calibri" pitchFamily="34" charset="-122"/>
                 <a:cs typeface="Calibri" pitchFamily="34" charset="-120"/>
               </a:rPr>
-              <a:t>During the </a:t>
+              <a:t>The police obtained </a:t>
             </a:r>
             <a:pPr algn="l" indent="0" marL="0">
               <a:buNone/>
@@ -16916,7 +16838,7 @@
                 <a:ea typeface="Calibri" pitchFamily="34" charset="-122"/>
                 <a:cs typeface="Calibri" pitchFamily="34" charset="-120"/>
               </a:rPr>
-              <a:t>prewar</a:t>
+              <a:t>warrants</a:t>
             </a:r>
             <a:pPr algn="l" indent="0" marL="0">
               <a:buNone/>
@@ -16930,7 +16852,7 @@
                 <a:ea typeface="Calibri" pitchFamily="34" charset="-122"/>
                 <a:cs typeface="Calibri" pitchFamily="34" charset="-120"/>
               </a:rPr>
-              <a:t> years, the </a:t>
+              <a:t> to search the house. The new phone came with a two-year </a:t>
             </a:r>
             <a:pPr algn="l" indent="0" marL="0">
               <a:buNone/>
@@ -16947,7 +16869,7 @@
                 <a:ea typeface="Calibri" pitchFamily="34" charset="-122"/>
                 <a:cs typeface="Calibri" pitchFamily="34" charset="-120"/>
               </a:rPr>
-              <a:t>warlike</a:t>
+              <a:t>warranty</a:t>
             </a:r>
             <a:pPr algn="l" indent="0" marL="0">
               <a:buNone/>
@@ -16961,7 +16883,7 @@
                 <a:ea typeface="Calibri" pitchFamily="34" charset="-122"/>
                 <a:cs typeface="Calibri" pitchFamily="34" charset="-120"/>
               </a:rPr>
-              <a:t> tribes gathered supplies; however, </a:t>
+              <a:t>. Her anger was </a:t>
             </a:r>
             <a:pPr algn="l" indent="0" marL="0">
               <a:buNone/>
@@ -16978,7 +16900,7 @@
                 <a:ea typeface="Calibri" pitchFamily="34" charset="-122"/>
                 <a:cs typeface="Calibri" pitchFamily="34" charset="-120"/>
               </a:rPr>
-              <a:t>warfare</a:t>
+              <a:t>warranted</a:t>
             </a:r>
             <a:pPr algn="l" indent="0" marL="0">
               <a:buNone/>
@@ -16992,7 +16914,7 @@
                 <a:ea typeface="Calibri" pitchFamily="34" charset="-122"/>
                 <a:cs typeface="Calibri" pitchFamily="34" charset="-120"/>
               </a:rPr>
-              <a:t> eventually broke out across the land.</a:t>
+              <a:t> after being treated so unfairly.</a:t>
             </a:r>
             <a:endParaRPr lang="en-US" sz="1800" dirty="0"/>
           </a:p>
@@ -17147,7 +17069,7 @@
                 <a:ea typeface="Trebuchet MS" pitchFamily="34" charset="-122"/>
                 <a:cs typeface="Trebuchet MS" pitchFamily="34" charset="-120"/>
               </a:rPr>
-              <a:t>prewar</a:t>
+              <a:t>warrants</a:t>
             </a:r>
             <a:endParaRPr lang="en-US" sz="1400" dirty="0"/>
           </a:p>
@@ -17275,7 +17197,7 @@
                 <a:ea typeface="Trebuchet MS" pitchFamily="34" charset="-122"/>
                 <a:cs typeface="Trebuchet MS" pitchFamily="34" charset="-120"/>
               </a:rPr>
-              <a:t>warlike</a:t>
+              <a:t>warranty</a:t>
             </a:r>
             <a:endParaRPr lang="en-US" sz="1400" dirty="0"/>
           </a:p>
@@ -17403,7 +17325,7 @@
                 <a:ea typeface="Trebuchet MS" pitchFamily="34" charset="-122"/>
                 <a:cs typeface="Trebuchet MS" pitchFamily="34" charset="-120"/>
               </a:rPr>
-              <a:t>warfare</a:t>
+              <a:t>warranted</a:t>
             </a:r>
             <a:endParaRPr lang="en-US" sz="1400" dirty="0"/>
           </a:p>
@@ -17734,7 +17656,7 @@
                 <a:ea typeface="Calibri" pitchFamily="34" charset="-122"/>
                 <a:cs typeface="Calibri" pitchFamily="34" charset="-120"/>
               </a:rPr>
-              <a:t>Word Labs  •  wordlabs.app  •  Root: 'war' = conflict, fighting, armed struggle</a:t>
+              <a:t>Word Labs  •  wordlabs.app  •  Root: 'war' = armed conflict between groups</a:t>
             </a:r>
             <a:endParaRPr lang="en-US" sz="800" dirty="0"/>
           </a:p>
@@ -17873,7 +17795,7 @@
                 <a:ea typeface="Trebuchet MS" pitchFamily="34" charset="-122"/>
                 <a:cs typeface="Trebuchet MS" pitchFamily="34" charset="-120"/>
               </a:rPr>
-              <a:t>prewar</a:t>
+              <a:t>warrants</a:t>
             </a:r>
             <a:endParaRPr lang="en-US" sz="2800" dirty="0"/>
           </a:p>
@@ -18561,7 +18483,7 @@
                 <a:ea typeface="Calibri" pitchFamily="34" charset="-122"/>
                 <a:cs typeface="Calibri" pitchFamily="34" charset="-120"/>
               </a:rPr>
-              <a:t>Word Labs  •  wordlabs.app  •  Root: 'war' = conflict, fighting, armed struggle</a:t>
+              <a:t>Word Labs  •  wordlabs.app  •  Root: 'war' = armed conflict between groups</a:t>
             </a:r>
             <a:endParaRPr lang="en-US" sz="800" dirty="0"/>
           </a:p>
@@ -18700,7 +18622,7 @@
                 <a:ea typeface="Trebuchet MS" pitchFamily="34" charset="-122"/>
                 <a:cs typeface="Trebuchet MS" pitchFamily="34" charset="-120"/>
               </a:rPr>
-              <a:t>prewar</a:t>
+              <a:t>warrants</a:t>
             </a:r>
             <a:endParaRPr lang="en-US" sz="2800" dirty="0"/>
           </a:p>
@@ -18780,7 +18702,7 @@
         </p:nvSpPr>
         <p:spPr>
           <a:xfrm>
-            <a:off x="2938272" y="2258568"/>
+            <a:off x="2221992" y="2258568"/>
             <a:ext cx="1828800" cy="292608"/>
           </a:xfrm>
           <a:prstGeom prst="rect">
@@ -18789,11 +18711,11 @@
             </a:avLst>
           </a:prstGeom>
           <a:solidFill>
-            <a:srgbClr val="DDD6FE"/>
+            <a:srgbClr val="CCFBF1"/>
           </a:solidFill>
           <a:ln w="19050">
             <a:solidFill>
-              <a:srgbClr val="7C3AED"/>
+              <a:srgbClr val="0D9488"/>
             </a:solidFill>
             <a:prstDash val="solid"/>
           </a:ln>
@@ -18814,7 +18736,7 @@
         </p:nvSpPr>
         <p:spPr>
           <a:xfrm>
-            <a:off x="2938272" y="2258568"/>
+            <a:off x="2221992" y="2258568"/>
             <a:ext cx="1828800" cy="292608"/>
           </a:xfrm>
           <a:prstGeom prst="rect">
@@ -18833,13 +18755,13 @@
             <a:r>
               <a:rPr lang="en-US" sz="1300" b="1" dirty="0">
                 <a:solidFill>
-                  <a:srgbClr val="4C1D95"/>
+                  <a:srgbClr val="0F766E"/>
                 </a:solidFill>
                 <a:latin typeface="Trebuchet MS" pitchFamily="34" charset="0"/>
                 <a:ea typeface="Trebuchet MS" pitchFamily="34" charset="-122"/>
                 <a:cs typeface="Trebuchet MS" pitchFamily="34" charset="-120"/>
               </a:rPr>
-              <a:t>pre</a:t>
+              <a:t>war</a:t>
             </a:r>
             <a:endParaRPr lang="en-US" sz="1300" dirty="0"/>
           </a:p>
@@ -18853,7 +18775,7 @@
         </p:nvSpPr>
         <p:spPr>
           <a:xfrm>
-            <a:off x="2938272" y="2569464"/>
+            <a:off x="2221992" y="2569464"/>
             <a:ext cx="1828800" cy="201168"/>
           </a:xfrm>
           <a:prstGeom prst="rect">
@@ -18878,7 +18800,7 @@
                 <a:ea typeface="Calibri" pitchFamily="34" charset="-122"/>
                 <a:cs typeface="Calibri" pitchFamily="34" charset="-120"/>
               </a:rPr>
-              <a:t>before</a:t>
+              <a:t>armed conflict between groups</a:t>
             </a:r>
             <a:endParaRPr lang="en-US" sz="850" dirty="0"/>
           </a:p>
@@ -18892,7 +18814,7 @@
         </p:nvSpPr>
         <p:spPr>
           <a:xfrm>
-            <a:off x="5803392" y="2258568"/>
+            <a:off x="4370832" y="2258568"/>
             <a:ext cx="1828800" cy="292608"/>
           </a:xfrm>
           <a:prstGeom prst="rect">
@@ -18901,11 +18823,11 @@
             </a:avLst>
           </a:prstGeom>
           <a:solidFill>
-            <a:srgbClr val="CCFBF1"/>
+            <a:srgbClr val="FCE7F3"/>
           </a:solidFill>
           <a:ln w="19050">
             <a:solidFill>
-              <a:srgbClr val="0D9488"/>
+              <a:srgbClr val="DB2777"/>
             </a:solidFill>
             <a:prstDash val="solid"/>
           </a:ln>
@@ -18926,7 +18848,7 @@
         </p:nvSpPr>
         <p:spPr>
           <a:xfrm>
-            <a:off x="5803392" y="2258568"/>
+            <a:off x="4370832" y="2258568"/>
             <a:ext cx="1828800" cy="292608"/>
           </a:xfrm>
           <a:prstGeom prst="rect">
@@ -18945,13 +18867,13 @@
             <a:r>
               <a:rPr lang="en-US" sz="1300" b="1" dirty="0">
                 <a:solidFill>
-                  <a:srgbClr val="0F766E"/>
+                  <a:srgbClr val="9D174D"/>
                 </a:solidFill>
                 <a:latin typeface="Trebuchet MS" pitchFamily="34" charset="0"/>
                 <a:ea typeface="Trebuchet MS" pitchFamily="34" charset="-122"/>
                 <a:cs typeface="Trebuchet MS" pitchFamily="34" charset="-120"/>
               </a:rPr>
-              <a:t>war</a:t>
+              <a:t>ant</a:t>
             </a:r>
             <a:endParaRPr lang="en-US" sz="1300" dirty="0"/>
           </a:p>
@@ -18965,7 +18887,7 @@
         </p:nvSpPr>
         <p:spPr>
           <a:xfrm>
-            <a:off x="5803392" y="2569464"/>
+            <a:off x="4370832" y="2569464"/>
             <a:ext cx="1828800" cy="201168"/>
           </a:xfrm>
           <a:prstGeom prst="rect">
@@ -18990,7 +18912,7 @@
                 <a:ea typeface="Calibri" pitchFamily="34" charset="-122"/>
                 <a:cs typeface="Calibri" pitchFamily="34" charset="-120"/>
               </a:rPr>
-              <a:t>conflict, fighting</a:t>
+              <a:t>person or thing that</a:t>
             </a:r>
             <a:endParaRPr lang="en-US" sz="850" dirty="0"/>
           </a:p>
@@ -18999,6 +18921,118 @@
       <p:sp>
         <p:nvSpPr>
           <p:cNvPr id="22" name="Shape 20"/>
+          <p:cNvSpPr/>
+          <p:nvPr/>
+        </p:nvSpPr>
+        <p:spPr>
+          <a:xfrm>
+            <a:off x="6519672" y="2258568"/>
+            <a:ext cx="1828800" cy="292608"/>
+          </a:xfrm>
+          <a:prstGeom prst="rect">
+            <a:avLst>
+              <a:gd name="adj" fmla="val 25000"/>
+            </a:avLst>
+          </a:prstGeom>
+          <a:solidFill>
+            <a:srgbClr val="FCE7F3"/>
+          </a:solidFill>
+          <a:ln w="19050">
+            <a:solidFill>
+              <a:srgbClr val="DB2777"/>
+            </a:solidFill>
+            <a:prstDash val="solid"/>
+          </a:ln>
+          <a:effectLst>
+            <a:outerShdw sx="100000" sy="100000" kx="0" ky="0" algn="bl" rotWithShape="0" blurRad="101600" dist="38100" dir="8100000">
+              <a:srgbClr val="000000">
+                <a:alpha val="12000"/>
+              </a:srgbClr>
+            </a:outerShdw>
+          </a:effectLst>
+        </p:spPr>
+      </p:sp>
+      <p:sp>
+        <p:nvSpPr>
+          <p:cNvPr id="23" name="Text 21"/>
+          <p:cNvSpPr/>
+          <p:nvPr/>
+        </p:nvSpPr>
+        <p:spPr>
+          <a:xfrm>
+            <a:off x="6519672" y="2258568"/>
+            <a:ext cx="1828800" cy="292608"/>
+          </a:xfrm>
+          <a:prstGeom prst="rect">
+            <a:avLst/>
+          </a:prstGeom>
+          <a:noFill/>
+          <a:ln/>
+        </p:spPr>
+        <p:txBody>
+          <a:bodyPr wrap="square" lIns="0" tIns="0" rIns="0" bIns="0" rtlCol="0" anchor="ctr"/>
+          <a:lstStyle/>
+          <a:p>
+            <a:pPr algn="ctr" indent="0" marL="0">
+              <a:buNone/>
+            </a:pPr>
+            <a:r>
+              <a:rPr lang="en-US" sz="1300" b="1" dirty="0">
+                <a:solidFill>
+                  <a:srgbClr val="9D174D"/>
+                </a:solidFill>
+                <a:latin typeface="Trebuchet MS" pitchFamily="34" charset="0"/>
+                <a:ea typeface="Trebuchet MS" pitchFamily="34" charset="-122"/>
+                <a:cs typeface="Trebuchet MS" pitchFamily="34" charset="-120"/>
+              </a:rPr>
+              <a:t>s</a:t>
+            </a:r>
+            <a:endParaRPr lang="en-US" sz="1300" dirty="0"/>
+          </a:p>
+        </p:txBody>
+      </p:sp>
+      <p:sp>
+        <p:nvSpPr>
+          <p:cNvPr id="24" name="Text 22"/>
+          <p:cNvSpPr/>
+          <p:nvPr/>
+        </p:nvSpPr>
+        <p:spPr>
+          <a:xfrm>
+            <a:off x="6519672" y="2569464"/>
+            <a:ext cx="1828800" cy="201168"/>
+          </a:xfrm>
+          <a:prstGeom prst="rect">
+            <a:avLst/>
+          </a:prstGeom>
+          <a:noFill/>
+          <a:ln/>
+        </p:spPr>
+        <p:txBody>
+          <a:bodyPr wrap="square" lIns="0" tIns="0" rIns="0" bIns="0" rtlCol="0" anchor="t"/>
+          <a:lstStyle/>
+          <a:p>
+            <a:pPr algn="ctr" indent="0" marL="0">
+              <a:buNone/>
+            </a:pPr>
+            <a:r>
+              <a:rPr lang="en-US" sz="850" dirty="0">
+                <a:solidFill>
+                  <a:srgbClr val="475569"/>
+                </a:solidFill>
+                <a:latin typeface="Calibri" pitchFamily="34" charset="0"/>
+                <a:ea typeface="Calibri" pitchFamily="34" charset="-122"/>
+                <a:cs typeface="Calibri" pitchFamily="34" charset="-120"/>
+              </a:rPr>
+              <a:t>plural or present tense</a:t>
+            </a:r>
+            <a:endParaRPr lang="en-US" sz="850" dirty="0"/>
+          </a:p>
+        </p:txBody>
+      </p:sp>
+      <p:sp>
+        <p:nvSpPr>
+          <p:cNvPr id="25" name="Shape 23"/>
           <p:cNvSpPr/>
           <p:nvPr/>
         </p:nvSpPr>
@@ -19025,7 +19059,7 @@
       </p:sp>
       <p:sp>
         <p:nvSpPr>
-          <p:cNvPr id="23" name="Text 21"/>
+          <p:cNvPr id="26" name="Text 24"/>
           <p:cNvSpPr/>
           <p:nvPr/>
         </p:nvSpPr>
@@ -19064,7 +19098,7 @@
       </p:sp>
       <p:sp>
         <p:nvSpPr>
-          <p:cNvPr id="24" name="Shape 22"/>
+          <p:cNvPr id="27" name="Shape 25"/>
           <p:cNvSpPr/>
           <p:nvPr/>
         </p:nvSpPr>
@@ -19091,7 +19125,7 @@
       </p:sp>
       <p:sp>
         <p:nvSpPr>
-          <p:cNvPr id="25" name="Text 23"/>
+          <p:cNvPr id="28" name="Text 26"/>
           <p:cNvSpPr/>
           <p:nvPr/>
         </p:nvSpPr>
@@ -19130,7 +19164,7 @@
       </p:sp>
       <p:sp>
         <p:nvSpPr>
-          <p:cNvPr id="26" name="Shape 24"/>
+          <p:cNvPr id="29" name="Shape 27"/>
           <p:cNvSpPr/>
           <p:nvPr/>
         </p:nvSpPr>
@@ -19157,7 +19191,7 @@
       </p:sp>
       <p:sp>
         <p:nvSpPr>
-          <p:cNvPr id="27" name="Text 25"/>
+          <p:cNvPr id="30" name="Text 28"/>
           <p:cNvSpPr/>
           <p:nvPr/>
         </p:nvSpPr>
@@ -19196,7 +19230,7 @@
       </p:sp>
       <p:sp>
         <p:nvSpPr>
-          <p:cNvPr id="28" name="Shape 26"/>
+          <p:cNvPr id="31" name="Shape 29"/>
           <p:cNvSpPr/>
           <p:nvPr/>
         </p:nvSpPr>
@@ -19223,7 +19257,7 @@
       </p:sp>
       <p:sp>
         <p:nvSpPr>
-          <p:cNvPr id="29" name="Text 27"/>
+          <p:cNvPr id="32" name="Text 30"/>
           <p:cNvSpPr/>
           <p:nvPr/>
         </p:nvSpPr>
@@ -19546,7 +19580,7 @@
                 <a:ea typeface="Calibri" pitchFamily="34" charset="-122"/>
                 <a:cs typeface="Calibri" pitchFamily="34" charset="-120"/>
               </a:rPr>
-              <a:t>Word Labs  •  wordlabs.app  •  Root: 'war' = conflict, fighting, armed struggle</a:t>
+              <a:t>Word Labs  •  wordlabs.app  •  Root: 'war' = armed conflict between groups</a:t>
             </a:r>
             <a:endParaRPr lang="en-US" sz="800" dirty="0"/>
           </a:p>
@@ -19685,7 +19719,7 @@
                 <a:ea typeface="Trebuchet MS" pitchFamily="34" charset="-122"/>
                 <a:cs typeface="Trebuchet MS" pitchFamily="34" charset="-120"/>
               </a:rPr>
-              <a:t>prewar</a:t>
+              <a:t>warrants</a:t>
             </a:r>
             <a:endParaRPr lang="en-US" sz="2800" dirty="0"/>
           </a:p>
@@ -19765,7 +19799,7 @@
         </p:nvSpPr>
         <p:spPr>
           <a:xfrm>
-            <a:off x="2938272" y="2258568"/>
+            <a:off x="2221992" y="2258568"/>
             <a:ext cx="1828800" cy="292608"/>
           </a:xfrm>
           <a:prstGeom prst="rect">
@@ -19774,11 +19808,11 @@
             </a:avLst>
           </a:prstGeom>
           <a:solidFill>
-            <a:srgbClr val="DDD6FE"/>
+            <a:srgbClr val="CCFBF1"/>
           </a:solidFill>
           <a:ln w="19050">
             <a:solidFill>
-              <a:srgbClr val="7C3AED"/>
+              <a:srgbClr val="0D9488"/>
             </a:solidFill>
             <a:prstDash val="solid"/>
           </a:ln>
@@ -19799,7 +19833,7 @@
         </p:nvSpPr>
         <p:spPr>
           <a:xfrm>
-            <a:off x="2938272" y="2258568"/>
+            <a:off x="2221992" y="2258568"/>
             <a:ext cx="1828800" cy="292608"/>
           </a:xfrm>
           <a:prstGeom prst="rect">
@@ -19818,13 +19852,13 @@
             <a:r>
               <a:rPr lang="en-US" sz="1300" b="1" dirty="0">
                 <a:solidFill>
-                  <a:srgbClr val="4C1D95"/>
+                  <a:srgbClr val="0F766E"/>
                 </a:solidFill>
                 <a:latin typeface="Trebuchet MS" pitchFamily="34" charset="0"/>
                 <a:ea typeface="Trebuchet MS" pitchFamily="34" charset="-122"/>
                 <a:cs typeface="Trebuchet MS" pitchFamily="34" charset="-120"/>
               </a:rPr>
-              <a:t>pre</a:t>
+              <a:t>war</a:t>
             </a:r>
             <a:endParaRPr lang="en-US" sz="1300" dirty="0"/>
           </a:p>
@@ -19838,7 +19872,7 @@
         </p:nvSpPr>
         <p:spPr>
           <a:xfrm>
-            <a:off x="2938272" y="2569464"/>
+            <a:off x="2221992" y="2569464"/>
             <a:ext cx="1828800" cy="201168"/>
           </a:xfrm>
           <a:prstGeom prst="rect">
@@ -19863,7 +19897,7 @@
                 <a:ea typeface="Calibri" pitchFamily="34" charset="-122"/>
                 <a:cs typeface="Calibri" pitchFamily="34" charset="-120"/>
               </a:rPr>
-              <a:t>before</a:t>
+              <a:t>armed conflict between groups</a:t>
             </a:r>
             <a:endParaRPr lang="en-US" sz="850" dirty="0"/>
           </a:p>
@@ -19877,7 +19911,7 @@
         </p:nvSpPr>
         <p:spPr>
           <a:xfrm>
-            <a:off x="5803392" y="2258568"/>
+            <a:off x="4370832" y="2258568"/>
             <a:ext cx="1828800" cy="292608"/>
           </a:xfrm>
           <a:prstGeom prst="rect">
@@ -19886,11 +19920,11 @@
             </a:avLst>
           </a:prstGeom>
           <a:solidFill>
-            <a:srgbClr val="CCFBF1"/>
+            <a:srgbClr val="FCE7F3"/>
           </a:solidFill>
           <a:ln w="19050">
             <a:solidFill>
-              <a:srgbClr val="0D9488"/>
+              <a:srgbClr val="DB2777"/>
             </a:solidFill>
             <a:prstDash val="solid"/>
           </a:ln>
@@ -19911,7 +19945,7 @@
         </p:nvSpPr>
         <p:spPr>
           <a:xfrm>
-            <a:off x="5803392" y="2258568"/>
+            <a:off x="4370832" y="2258568"/>
             <a:ext cx="1828800" cy="292608"/>
           </a:xfrm>
           <a:prstGeom prst="rect">
@@ -19930,13 +19964,13 @@
             <a:r>
               <a:rPr lang="en-US" sz="1300" b="1" dirty="0">
                 <a:solidFill>
-                  <a:srgbClr val="0F766E"/>
+                  <a:srgbClr val="9D174D"/>
                 </a:solidFill>
                 <a:latin typeface="Trebuchet MS" pitchFamily="34" charset="0"/>
                 <a:ea typeface="Trebuchet MS" pitchFamily="34" charset="-122"/>
                 <a:cs typeface="Trebuchet MS" pitchFamily="34" charset="-120"/>
               </a:rPr>
-              <a:t>war</a:t>
+              <a:t>ant</a:t>
             </a:r>
             <a:endParaRPr lang="en-US" sz="1300" dirty="0"/>
           </a:p>
@@ -19950,7 +19984,7 @@
         </p:nvSpPr>
         <p:spPr>
           <a:xfrm>
-            <a:off x="5803392" y="2569464"/>
+            <a:off x="4370832" y="2569464"/>
             <a:ext cx="1828800" cy="201168"/>
           </a:xfrm>
           <a:prstGeom prst="rect">
@@ -19975,7 +20009,7 @@
                 <a:ea typeface="Calibri" pitchFamily="34" charset="-122"/>
                 <a:cs typeface="Calibri" pitchFamily="34" charset="-120"/>
               </a:rPr>
-              <a:t>conflict, fighting</a:t>
+              <a:t>person or thing that</a:t>
             </a:r>
             <a:endParaRPr lang="en-US" sz="850" dirty="0"/>
           </a:p>
@@ -19984,6 +20018,118 @@
       <p:sp>
         <p:nvSpPr>
           <p:cNvPr id="22" name="Shape 20"/>
+          <p:cNvSpPr/>
+          <p:nvPr/>
+        </p:nvSpPr>
+        <p:spPr>
+          <a:xfrm>
+            <a:off x="6519672" y="2258568"/>
+            <a:ext cx="1828800" cy="292608"/>
+          </a:xfrm>
+          <a:prstGeom prst="rect">
+            <a:avLst>
+              <a:gd name="adj" fmla="val 25000"/>
+            </a:avLst>
+          </a:prstGeom>
+          <a:solidFill>
+            <a:srgbClr val="FCE7F3"/>
+          </a:solidFill>
+          <a:ln w="19050">
+            <a:solidFill>
+              <a:srgbClr val="DB2777"/>
+            </a:solidFill>
+            <a:prstDash val="solid"/>
+          </a:ln>
+          <a:effectLst>
+            <a:outerShdw sx="100000" sy="100000" kx="0" ky="0" algn="bl" rotWithShape="0" blurRad="101600" dist="38100" dir="8100000">
+              <a:srgbClr val="000000">
+                <a:alpha val="12000"/>
+              </a:srgbClr>
+            </a:outerShdw>
+          </a:effectLst>
+        </p:spPr>
+      </p:sp>
+      <p:sp>
+        <p:nvSpPr>
+          <p:cNvPr id="23" name="Text 21"/>
+          <p:cNvSpPr/>
+          <p:nvPr/>
+        </p:nvSpPr>
+        <p:spPr>
+          <a:xfrm>
+            <a:off x="6519672" y="2258568"/>
+            <a:ext cx="1828800" cy="292608"/>
+          </a:xfrm>
+          <a:prstGeom prst="rect">
+            <a:avLst/>
+          </a:prstGeom>
+          <a:noFill/>
+          <a:ln/>
+        </p:spPr>
+        <p:txBody>
+          <a:bodyPr wrap="square" lIns="0" tIns="0" rIns="0" bIns="0" rtlCol="0" anchor="ctr"/>
+          <a:lstStyle/>
+          <a:p>
+            <a:pPr algn="ctr" indent="0" marL="0">
+              <a:buNone/>
+            </a:pPr>
+            <a:r>
+              <a:rPr lang="en-US" sz="1300" b="1" dirty="0">
+                <a:solidFill>
+                  <a:srgbClr val="9D174D"/>
+                </a:solidFill>
+                <a:latin typeface="Trebuchet MS" pitchFamily="34" charset="0"/>
+                <a:ea typeface="Trebuchet MS" pitchFamily="34" charset="-122"/>
+                <a:cs typeface="Trebuchet MS" pitchFamily="34" charset="-120"/>
+              </a:rPr>
+              <a:t>s</a:t>
+            </a:r>
+            <a:endParaRPr lang="en-US" sz="1300" dirty="0"/>
+          </a:p>
+        </p:txBody>
+      </p:sp>
+      <p:sp>
+        <p:nvSpPr>
+          <p:cNvPr id="24" name="Text 22"/>
+          <p:cNvSpPr/>
+          <p:nvPr/>
+        </p:nvSpPr>
+        <p:spPr>
+          <a:xfrm>
+            <a:off x="6519672" y="2569464"/>
+            <a:ext cx="1828800" cy="201168"/>
+          </a:xfrm>
+          <a:prstGeom prst="rect">
+            <a:avLst/>
+          </a:prstGeom>
+          <a:noFill/>
+          <a:ln/>
+        </p:spPr>
+        <p:txBody>
+          <a:bodyPr wrap="square" lIns="0" tIns="0" rIns="0" bIns="0" rtlCol="0" anchor="t"/>
+          <a:lstStyle/>
+          <a:p>
+            <a:pPr algn="ctr" indent="0" marL="0">
+              <a:buNone/>
+            </a:pPr>
+            <a:r>
+              <a:rPr lang="en-US" sz="850" dirty="0">
+                <a:solidFill>
+                  <a:srgbClr val="475569"/>
+                </a:solidFill>
+                <a:latin typeface="Calibri" pitchFamily="34" charset="0"/>
+                <a:ea typeface="Calibri" pitchFamily="34" charset="-122"/>
+                <a:cs typeface="Calibri" pitchFamily="34" charset="-120"/>
+              </a:rPr>
+              <a:t>plural or present tense</a:t>
+            </a:r>
+            <a:endParaRPr lang="en-US" sz="850" dirty="0"/>
+          </a:p>
+        </p:txBody>
+      </p:sp>
+      <p:sp>
+        <p:nvSpPr>
+          <p:cNvPr id="25" name="Shape 23"/>
           <p:cNvSpPr/>
           <p:nvPr/>
         </p:nvSpPr>
@@ -20010,7 +20156,7 @@
       </p:sp>
       <p:sp>
         <p:nvSpPr>
-          <p:cNvPr id="23" name="Text 21"/>
+          <p:cNvPr id="26" name="Text 24"/>
           <p:cNvSpPr/>
           <p:nvPr/>
         </p:nvSpPr>
@@ -20049,7 +20195,7 @@
       </p:sp>
       <p:sp>
         <p:nvSpPr>
-          <p:cNvPr id="24" name="Shape 22"/>
+          <p:cNvPr id="27" name="Shape 25"/>
           <p:cNvSpPr/>
           <p:nvPr/>
         </p:nvSpPr>
@@ -20076,7 +20222,7 @@
       </p:sp>
       <p:sp>
         <p:nvSpPr>
-          <p:cNvPr id="25" name="Shape 23"/>
+          <p:cNvPr id="28" name="Shape 26"/>
           <p:cNvSpPr/>
           <p:nvPr/>
         </p:nvSpPr>
@@ -20103,7 +20249,7 @@
       </p:sp>
       <p:sp>
         <p:nvSpPr>
-          <p:cNvPr id="26" name="Text 24"/>
+          <p:cNvPr id="29" name="Text 27"/>
           <p:cNvSpPr/>
           <p:nvPr/>
         </p:nvSpPr>
@@ -20134,7 +20280,7 @@
                 <a:ea typeface="Trebuchet MS" pitchFamily="34" charset="-122"/>
                 <a:cs typeface="Trebuchet MS" pitchFamily="34" charset="-120"/>
               </a:rPr>
-              <a:t>pre</a:t>
+              <a:t>war</a:t>
             </a:r>
             <a:endParaRPr lang="en-US" sz="1400" dirty="0"/>
           </a:p>
@@ -20142,7 +20288,7 @@
       </p:sp>
       <p:sp>
         <p:nvSpPr>
-          <p:cNvPr id="27" name="Text 25"/>
+          <p:cNvPr id="30" name="Text 28"/>
           <p:cNvSpPr/>
           <p:nvPr/>
         </p:nvSpPr>
@@ -20181,7 +20327,7 @@
       </p:sp>
       <p:sp>
         <p:nvSpPr>
-          <p:cNvPr id="28" name="Shape 26"/>
+          <p:cNvPr id="31" name="Shape 29"/>
           <p:cNvSpPr/>
           <p:nvPr/>
         </p:nvSpPr>
@@ -20208,7 +20354,7 @@
       </p:sp>
       <p:sp>
         <p:nvSpPr>
-          <p:cNvPr id="29" name="Text 27"/>
+          <p:cNvPr id="32" name="Text 30"/>
           <p:cNvSpPr/>
           <p:nvPr/>
         </p:nvSpPr>
@@ -20239,7 +20385,7 @@
                 <a:ea typeface="Trebuchet MS" pitchFamily="34" charset="-122"/>
                 <a:cs typeface="Trebuchet MS" pitchFamily="34" charset="-120"/>
               </a:rPr>
-              <a:t>war</a:t>
+              <a:t>rants</a:t>
             </a:r>
             <a:endParaRPr lang="en-US" sz="1400" dirty="0"/>
           </a:p>
@@ -20247,7 +20393,7 @@
       </p:sp>
       <p:sp>
         <p:nvSpPr>
-          <p:cNvPr id="30" name="Shape 28"/>
+          <p:cNvPr id="33" name="Shape 31"/>
           <p:cNvSpPr/>
           <p:nvPr/>
         </p:nvSpPr>
@@ -20274,7 +20420,7 @@
       </p:sp>
       <p:sp>
         <p:nvSpPr>
-          <p:cNvPr id="31" name="Text 29"/>
+          <p:cNvPr id="34" name="Text 32"/>
           <p:cNvSpPr/>
           <p:nvPr/>
         </p:nvSpPr>
@@ -20313,7 +20459,7 @@
       </p:sp>
       <p:sp>
         <p:nvSpPr>
-          <p:cNvPr id="32" name="Shape 30"/>
+          <p:cNvPr id="35" name="Shape 33"/>
           <p:cNvSpPr/>
           <p:nvPr/>
         </p:nvSpPr>
@@ -20340,7 +20486,7 @@
       </p:sp>
       <p:sp>
         <p:nvSpPr>
-          <p:cNvPr id="33" name="Text 31"/>
+          <p:cNvPr id="36" name="Text 34"/>
           <p:cNvSpPr/>
           <p:nvPr/>
         </p:nvSpPr>
@@ -20663,7 +20809,7 @@
                 <a:ea typeface="Calibri" pitchFamily="34" charset="-122"/>
                 <a:cs typeface="Calibri" pitchFamily="34" charset="-120"/>
               </a:rPr>
-              <a:t>Word Labs  •  wordlabs.app  •  Root: 'war' = conflict, fighting, armed struggle</a:t>
+              <a:t>Word Labs  •  wordlabs.app  •  Root: 'war' = armed conflict between groups</a:t>
             </a:r>
             <a:endParaRPr lang="en-US" sz="800" dirty="0"/>
           </a:p>
@@ -20802,7 +20948,7 @@
                 <a:ea typeface="Trebuchet MS" pitchFamily="34" charset="-122"/>
                 <a:cs typeface="Trebuchet MS" pitchFamily="34" charset="-120"/>
               </a:rPr>
-              <a:t>prewar</a:t>
+              <a:t>warrants</a:t>
             </a:r>
             <a:endParaRPr lang="en-US" sz="2800" dirty="0"/>
           </a:p>
@@ -20882,7 +21028,7 @@
         </p:nvSpPr>
         <p:spPr>
           <a:xfrm>
-            <a:off x="2938272" y="2258568"/>
+            <a:off x="2221992" y="2258568"/>
             <a:ext cx="1828800" cy="292608"/>
           </a:xfrm>
           <a:prstGeom prst="rect">
@@ -20891,11 +21037,11 @@
             </a:avLst>
           </a:prstGeom>
           <a:solidFill>
-            <a:srgbClr val="DDD6FE"/>
+            <a:srgbClr val="CCFBF1"/>
           </a:solidFill>
           <a:ln w="19050">
             <a:solidFill>
-              <a:srgbClr val="7C3AED"/>
+              <a:srgbClr val="0D9488"/>
             </a:solidFill>
             <a:prstDash val="solid"/>
           </a:ln>
@@ -20916,7 +21062,7 @@
         </p:nvSpPr>
         <p:spPr>
           <a:xfrm>
-            <a:off x="2938272" y="2258568"/>
+            <a:off x="2221992" y="2258568"/>
             <a:ext cx="1828800" cy="292608"/>
           </a:xfrm>
           <a:prstGeom prst="rect">
@@ -20935,13 +21081,13 @@
             <a:r>
               <a:rPr lang="en-US" sz="1300" b="1" dirty="0">
                 <a:solidFill>
-                  <a:srgbClr val="4C1D95"/>
+                  <a:srgbClr val="0F766E"/>
                 </a:solidFill>
                 <a:latin typeface="Trebuchet MS" pitchFamily="34" charset="0"/>
                 <a:ea typeface="Trebuchet MS" pitchFamily="34" charset="-122"/>
                 <a:cs typeface="Trebuchet MS" pitchFamily="34" charset="-120"/>
               </a:rPr>
-              <a:t>pre</a:t>
+              <a:t>war</a:t>
             </a:r>
             <a:endParaRPr lang="en-US" sz="1300" dirty="0"/>
           </a:p>
@@ -20955,7 +21101,7 @@
         </p:nvSpPr>
         <p:spPr>
           <a:xfrm>
-            <a:off x="2938272" y="2569464"/>
+            <a:off x="2221992" y="2569464"/>
             <a:ext cx="1828800" cy="201168"/>
           </a:xfrm>
           <a:prstGeom prst="rect">
@@ -20980,7 +21126,7 @@
                 <a:ea typeface="Calibri" pitchFamily="34" charset="-122"/>
                 <a:cs typeface="Calibri" pitchFamily="34" charset="-120"/>
               </a:rPr>
-              <a:t>before</a:t>
+              <a:t>armed conflict between groups</a:t>
             </a:r>
             <a:endParaRPr lang="en-US" sz="850" dirty="0"/>
           </a:p>
@@ -20994,7 +21140,7 @@
         </p:nvSpPr>
         <p:spPr>
           <a:xfrm>
-            <a:off x="5803392" y="2258568"/>
+            <a:off x="4370832" y="2258568"/>
             <a:ext cx="1828800" cy="292608"/>
           </a:xfrm>
           <a:prstGeom prst="rect">
@@ -21003,11 +21149,11 @@
             </a:avLst>
           </a:prstGeom>
           <a:solidFill>
-            <a:srgbClr val="CCFBF1"/>
+            <a:srgbClr val="FCE7F3"/>
           </a:solidFill>
           <a:ln w="19050">
             <a:solidFill>
-              <a:srgbClr val="0D9488"/>
+              <a:srgbClr val="DB2777"/>
             </a:solidFill>
             <a:prstDash val="solid"/>
           </a:ln>
@@ -21028,7 +21174,7 @@
         </p:nvSpPr>
         <p:spPr>
           <a:xfrm>
-            <a:off x="5803392" y="2258568"/>
+            <a:off x="4370832" y="2258568"/>
             <a:ext cx="1828800" cy="292608"/>
           </a:xfrm>
           <a:prstGeom prst="rect">
@@ -21047,13 +21193,13 @@
             <a:r>
               <a:rPr lang="en-US" sz="1300" b="1" dirty="0">
                 <a:solidFill>
-                  <a:srgbClr val="0F766E"/>
+                  <a:srgbClr val="9D174D"/>
                 </a:solidFill>
                 <a:latin typeface="Trebuchet MS" pitchFamily="34" charset="0"/>
                 <a:ea typeface="Trebuchet MS" pitchFamily="34" charset="-122"/>
                 <a:cs typeface="Trebuchet MS" pitchFamily="34" charset="-120"/>
               </a:rPr>
-              <a:t>war</a:t>
+              <a:t>ant</a:t>
             </a:r>
             <a:endParaRPr lang="en-US" sz="1300" dirty="0"/>
           </a:p>
@@ -21067,7 +21213,7 @@
         </p:nvSpPr>
         <p:spPr>
           <a:xfrm>
-            <a:off x="5803392" y="2569464"/>
+            <a:off x="4370832" y="2569464"/>
             <a:ext cx="1828800" cy="201168"/>
           </a:xfrm>
           <a:prstGeom prst="rect">
@@ -21092,7 +21238,7 @@
                 <a:ea typeface="Calibri" pitchFamily="34" charset="-122"/>
                 <a:cs typeface="Calibri" pitchFamily="34" charset="-120"/>
               </a:rPr>
-              <a:t>conflict, fighting</a:t>
+              <a:t>person or thing that</a:t>
             </a:r>
             <a:endParaRPr lang="en-US" sz="850" dirty="0"/>
           </a:p>
@@ -21101,6 +21247,118 @@
       <p:sp>
         <p:nvSpPr>
           <p:cNvPr id="22" name="Shape 20"/>
+          <p:cNvSpPr/>
+          <p:nvPr/>
+        </p:nvSpPr>
+        <p:spPr>
+          <a:xfrm>
+            <a:off x="6519672" y="2258568"/>
+            <a:ext cx="1828800" cy="292608"/>
+          </a:xfrm>
+          <a:prstGeom prst="rect">
+            <a:avLst>
+              <a:gd name="adj" fmla="val 25000"/>
+            </a:avLst>
+          </a:prstGeom>
+          <a:solidFill>
+            <a:srgbClr val="FCE7F3"/>
+          </a:solidFill>
+          <a:ln w="19050">
+            <a:solidFill>
+              <a:srgbClr val="DB2777"/>
+            </a:solidFill>
+            <a:prstDash val="solid"/>
+          </a:ln>
+          <a:effectLst>
+            <a:outerShdw sx="100000" sy="100000" kx="0" ky="0" algn="bl" rotWithShape="0" blurRad="101600" dist="38100" dir="8100000">
+              <a:srgbClr val="000000">
+                <a:alpha val="12000"/>
+              </a:srgbClr>
+            </a:outerShdw>
+          </a:effectLst>
+        </p:spPr>
+      </p:sp>
+      <p:sp>
+        <p:nvSpPr>
+          <p:cNvPr id="23" name="Text 21"/>
+          <p:cNvSpPr/>
+          <p:nvPr/>
+        </p:nvSpPr>
+        <p:spPr>
+          <a:xfrm>
+            <a:off x="6519672" y="2258568"/>
+            <a:ext cx="1828800" cy="292608"/>
+          </a:xfrm>
+          <a:prstGeom prst="rect">
+            <a:avLst/>
+          </a:prstGeom>
+          <a:noFill/>
+          <a:ln/>
+        </p:spPr>
+        <p:txBody>
+          <a:bodyPr wrap="square" lIns="0" tIns="0" rIns="0" bIns="0" rtlCol="0" anchor="ctr"/>
+          <a:lstStyle/>
+          <a:p>
+            <a:pPr algn="ctr" indent="0" marL="0">
+              <a:buNone/>
+            </a:pPr>
+            <a:r>
+              <a:rPr lang="en-US" sz="1300" b="1" dirty="0">
+                <a:solidFill>
+                  <a:srgbClr val="9D174D"/>
+                </a:solidFill>
+                <a:latin typeface="Trebuchet MS" pitchFamily="34" charset="0"/>
+                <a:ea typeface="Trebuchet MS" pitchFamily="34" charset="-122"/>
+                <a:cs typeface="Trebuchet MS" pitchFamily="34" charset="-120"/>
+              </a:rPr>
+              <a:t>s</a:t>
+            </a:r>
+            <a:endParaRPr lang="en-US" sz="1300" dirty="0"/>
+          </a:p>
+        </p:txBody>
+      </p:sp>
+      <p:sp>
+        <p:nvSpPr>
+          <p:cNvPr id="24" name="Text 22"/>
+          <p:cNvSpPr/>
+          <p:nvPr/>
+        </p:nvSpPr>
+        <p:spPr>
+          <a:xfrm>
+            <a:off x="6519672" y="2569464"/>
+            <a:ext cx="1828800" cy="201168"/>
+          </a:xfrm>
+          <a:prstGeom prst="rect">
+            <a:avLst/>
+          </a:prstGeom>
+          <a:noFill/>
+          <a:ln/>
+        </p:spPr>
+        <p:txBody>
+          <a:bodyPr wrap="square" lIns="0" tIns="0" rIns="0" bIns="0" rtlCol="0" anchor="t"/>
+          <a:lstStyle/>
+          <a:p>
+            <a:pPr algn="ctr" indent="0" marL="0">
+              <a:buNone/>
+            </a:pPr>
+            <a:r>
+              <a:rPr lang="en-US" sz="850" dirty="0">
+                <a:solidFill>
+                  <a:srgbClr val="475569"/>
+                </a:solidFill>
+                <a:latin typeface="Calibri" pitchFamily="34" charset="0"/>
+                <a:ea typeface="Calibri" pitchFamily="34" charset="-122"/>
+                <a:cs typeface="Calibri" pitchFamily="34" charset="-120"/>
+              </a:rPr>
+              <a:t>plural or present tense</a:t>
+            </a:r>
+            <a:endParaRPr lang="en-US" sz="850" dirty="0"/>
+          </a:p>
+        </p:txBody>
+      </p:sp>
+      <p:sp>
+        <p:nvSpPr>
+          <p:cNvPr id="25" name="Shape 23"/>
           <p:cNvSpPr/>
           <p:nvPr/>
         </p:nvSpPr>
@@ -21127,7 +21385,7 @@
       </p:sp>
       <p:sp>
         <p:nvSpPr>
-          <p:cNvPr id="23" name="Text 21"/>
+          <p:cNvPr id="26" name="Text 24"/>
           <p:cNvSpPr/>
           <p:nvPr/>
         </p:nvSpPr>
@@ -21166,7 +21424,7 @@
       </p:sp>
       <p:sp>
         <p:nvSpPr>
-          <p:cNvPr id="24" name="Shape 22"/>
+          <p:cNvPr id="27" name="Shape 25"/>
           <p:cNvSpPr/>
           <p:nvPr/>
         </p:nvSpPr>
@@ -21193,7 +21451,7 @@
       </p:sp>
       <p:sp>
         <p:nvSpPr>
-          <p:cNvPr id="25" name="Shape 23"/>
+          <p:cNvPr id="28" name="Shape 26"/>
           <p:cNvSpPr/>
           <p:nvPr/>
         </p:nvSpPr>
@@ -21220,7 +21478,7 @@
       </p:sp>
       <p:sp>
         <p:nvSpPr>
-          <p:cNvPr id="26" name="Text 24"/>
+          <p:cNvPr id="29" name="Text 27"/>
           <p:cNvSpPr/>
           <p:nvPr/>
         </p:nvSpPr>
@@ -21251,7 +21509,7 @@
                 <a:ea typeface="Trebuchet MS" pitchFamily="34" charset="-122"/>
                 <a:cs typeface="Trebuchet MS" pitchFamily="34" charset="-120"/>
               </a:rPr>
-              <a:t>pre</a:t>
+              <a:t>war</a:t>
             </a:r>
             <a:endParaRPr lang="en-US" sz="1400" dirty="0"/>
           </a:p>
@@ -21259,7 +21517,7 @@
       </p:sp>
       <p:sp>
         <p:nvSpPr>
-          <p:cNvPr id="27" name="Text 25"/>
+          <p:cNvPr id="30" name="Text 28"/>
           <p:cNvSpPr/>
           <p:nvPr/>
         </p:nvSpPr>
@@ -21298,7 +21556,7 @@
       </p:sp>
       <p:sp>
         <p:nvSpPr>
-          <p:cNvPr id="28" name="Shape 26"/>
+          <p:cNvPr id="31" name="Shape 29"/>
           <p:cNvSpPr/>
           <p:nvPr/>
         </p:nvSpPr>
@@ -21325,7 +21583,7 @@
       </p:sp>
       <p:sp>
         <p:nvSpPr>
-          <p:cNvPr id="29" name="Text 27"/>
+          <p:cNvPr id="32" name="Text 30"/>
           <p:cNvSpPr/>
           <p:nvPr/>
         </p:nvSpPr>
@@ -21356,7 +21614,7 @@
                 <a:ea typeface="Trebuchet MS" pitchFamily="34" charset="-122"/>
                 <a:cs typeface="Trebuchet MS" pitchFamily="34" charset="-120"/>
               </a:rPr>
-              <a:t>war</a:t>
+              <a:t>rants</a:t>
             </a:r>
             <a:endParaRPr lang="en-US" sz="1400" dirty="0"/>
           </a:p>
@@ -21364,7 +21622,7 @@
       </p:sp>
       <p:sp>
         <p:nvSpPr>
-          <p:cNvPr id="30" name="Shape 28"/>
+          <p:cNvPr id="33" name="Shape 31"/>
           <p:cNvSpPr/>
           <p:nvPr/>
         </p:nvSpPr>
@@ -21391,7 +21649,7 @@
       </p:sp>
       <p:sp>
         <p:nvSpPr>
-          <p:cNvPr id="31" name="Text 29"/>
+          <p:cNvPr id="34" name="Text 32"/>
           <p:cNvSpPr/>
           <p:nvPr/>
         </p:nvSpPr>
@@ -21430,7 +21688,7 @@
       </p:sp>
       <p:sp>
         <p:nvSpPr>
-          <p:cNvPr id="32" name="Shape 30"/>
+          <p:cNvPr id="35" name="Shape 33"/>
           <p:cNvSpPr/>
           <p:nvPr/>
         </p:nvSpPr>
@@ -21457,13 +21715,13 @@
       </p:sp>
       <p:sp>
         <p:nvSpPr>
-          <p:cNvPr id="33" name="Shape 31"/>
-          <p:cNvSpPr/>
-          <p:nvPr/>
-        </p:nvSpPr>
-        <p:spPr>
-          <a:xfrm>
-            <a:off x="2427732" y="4169664"/>
+          <p:cNvPr id="36" name="Shape 34"/>
+          <p:cNvSpPr/>
+          <p:nvPr/>
+        </p:nvSpPr>
+        <p:spPr>
+          <a:xfrm>
+            <a:off x="2124837" y="4169664"/>
             <a:ext cx="685800" cy="475488"/>
           </a:xfrm>
           <a:prstGeom prst="rect">
@@ -21484,13 +21742,13 @@
       </p:sp>
       <p:sp>
         <p:nvSpPr>
-          <p:cNvPr id="34" name="Text 32"/>
-          <p:cNvSpPr/>
-          <p:nvPr/>
-        </p:nvSpPr>
-        <p:spPr>
-          <a:xfrm>
-            <a:off x="2427732" y="4169664"/>
+          <p:cNvPr id="37" name="Text 35"/>
+          <p:cNvSpPr/>
+          <p:nvPr/>
+        </p:nvSpPr>
+        <p:spPr>
+          <a:xfrm>
+            <a:off x="2124837" y="4169664"/>
             <a:ext cx="685800" cy="475488"/>
           </a:xfrm>
           <a:prstGeom prst="rect">
@@ -21515,7 +21773,7 @@
                 <a:ea typeface="Trebuchet MS" pitchFamily="34" charset="-122"/>
                 <a:cs typeface="Trebuchet MS" pitchFamily="34" charset="-120"/>
               </a:rPr>
-              <a:t>p</a:t>
+              <a:t>w</a:t>
             </a:r>
             <a:endParaRPr lang="en-US" sz="900" dirty="0"/>
           </a:p>
@@ -21523,13 +21781,13 @@
       </p:sp>
       <p:sp>
         <p:nvSpPr>
-          <p:cNvPr id="35" name="Shape 33"/>
-          <p:cNvSpPr/>
-          <p:nvPr/>
-        </p:nvSpPr>
-        <p:spPr>
-          <a:xfrm>
-            <a:off x="3639312" y="4169664"/>
+          <p:cNvPr id="38" name="Shape 36"/>
+          <p:cNvSpPr/>
+          <p:nvPr/>
+        </p:nvSpPr>
+        <p:spPr>
+          <a:xfrm>
+            <a:off x="3033522" y="4169664"/>
             <a:ext cx="685800" cy="475488"/>
           </a:xfrm>
           <a:prstGeom prst="rect">
@@ -21550,13 +21808,13 @@
       </p:sp>
       <p:sp>
         <p:nvSpPr>
-          <p:cNvPr id="36" name="Text 34"/>
-          <p:cNvSpPr/>
-          <p:nvPr/>
-        </p:nvSpPr>
-        <p:spPr>
-          <a:xfrm>
-            <a:off x="3639312" y="4169664"/>
+          <p:cNvPr id="39" name="Text 37"/>
+          <p:cNvSpPr/>
+          <p:nvPr/>
+        </p:nvSpPr>
+        <p:spPr>
+          <a:xfrm>
+            <a:off x="3033522" y="4169664"/>
             <a:ext cx="685800" cy="475488"/>
           </a:xfrm>
           <a:prstGeom prst="rect">
@@ -21581,7 +21839,7 @@
                 <a:ea typeface="Trebuchet MS" pitchFamily="34" charset="-122"/>
                 <a:cs typeface="Trebuchet MS" pitchFamily="34" charset="-120"/>
               </a:rPr>
-              <a:t>r</a:t>
+              <a:t>a</a:t>
             </a:r>
             <a:endParaRPr lang="en-US" sz="900" dirty="0"/>
           </a:p>
@@ -21589,13 +21847,13 @@
       </p:sp>
       <p:sp>
         <p:nvSpPr>
-          <p:cNvPr id="37" name="Shape 35"/>
-          <p:cNvSpPr/>
-          <p:nvPr/>
-        </p:nvSpPr>
-        <p:spPr>
-          <a:xfrm>
-            <a:off x="4850892" y="4169664"/>
+          <p:cNvPr id="40" name="Shape 38"/>
+          <p:cNvSpPr/>
+          <p:nvPr/>
+        </p:nvSpPr>
+        <p:spPr>
+          <a:xfrm>
+            <a:off x="3942207" y="4169664"/>
             <a:ext cx="685800" cy="475488"/>
           </a:xfrm>
           <a:prstGeom prst="rect">
@@ -21616,13 +21874,13 @@
       </p:sp>
       <p:sp>
         <p:nvSpPr>
-          <p:cNvPr id="38" name="Text 36"/>
-          <p:cNvSpPr/>
-          <p:nvPr/>
-        </p:nvSpPr>
-        <p:spPr>
-          <a:xfrm>
-            <a:off x="4850892" y="4169664"/>
+          <p:cNvPr id="41" name="Text 39"/>
+          <p:cNvSpPr/>
+          <p:nvPr/>
+        </p:nvSpPr>
+        <p:spPr>
+          <a:xfrm>
+            <a:off x="3942207" y="4169664"/>
             <a:ext cx="685800" cy="475488"/>
           </a:xfrm>
           <a:prstGeom prst="rect">
@@ -21647,7 +21905,7 @@
                 <a:ea typeface="Trebuchet MS" pitchFamily="34" charset="-122"/>
                 <a:cs typeface="Trebuchet MS" pitchFamily="34" charset="-120"/>
               </a:rPr>
-              <a:t>e</a:t>
+              <a:t>rr</a:t>
             </a:r>
             <a:endParaRPr lang="en-US" sz="900" dirty="0"/>
           </a:p>
@@ -21655,13 +21913,13 @@
       </p:sp>
       <p:sp>
         <p:nvSpPr>
-          <p:cNvPr id="39" name="Shape 37"/>
-          <p:cNvSpPr/>
-          <p:nvPr/>
-        </p:nvSpPr>
-        <p:spPr>
-          <a:xfrm>
-            <a:off x="6062472" y="4169664"/>
+          <p:cNvPr id="42" name="Shape 40"/>
+          <p:cNvSpPr/>
+          <p:nvPr/>
+        </p:nvSpPr>
+        <p:spPr>
+          <a:xfrm>
+            <a:off x="4850892" y="4169664"/>
             <a:ext cx="685800" cy="475488"/>
           </a:xfrm>
           <a:prstGeom prst="rect">
@@ -21682,13 +21940,13 @@
       </p:sp>
       <p:sp>
         <p:nvSpPr>
-          <p:cNvPr id="40" name="Text 38"/>
-          <p:cNvSpPr/>
-          <p:nvPr/>
-        </p:nvSpPr>
-        <p:spPr>
-          <a:xfrm>
-            <a:off x="6062472" y="4169664"/>
+          <p:cNvPr id="43" name="Text 41"/>
+          <p:cNvSpPr/>
+          <p:nvPr/>
+        </p:nvSpPr>
+        <p:spPr>
+          <a:xfrm>
+            <a:off x="4850892" y="4169664"/>
             <a:ext cx="685800" cy="475488"/>
           </a:xfrm>
           <a:prstGeom prst="rect">
@@ -21713,7 +21971,7 @@
                 <a:ea typeface="Trebuchet MS" pitchFamily="34" charset="-122"/>
                 <a:cs typeface="Trebuchet MS" pitchFamily="34" charset="-120"/>
               </a:rPr>
-              <a:t>w</a:t>
+              <a:t>a</a:t>
             </a:r>
             <a:endParaRPr lang="en-US" sz="900" dirty="0"/>
           </a:p>
@@ -21721,13 +21979,13 @@
       </p:sp>
       <p:sp>
         <p:nvSpPr>
-          <p:cNvPr id="41" name="Shape 39"/>
-          <p:cNvSpPr/>
-          <p:nvPr/>
-        </p:nvSpPr>
-        <p:spPr>
-          <a:xfrm>
-            <a:off x="7274052" y="4169664"/>
+          <p:cNvPr id="44" name="Shape 42"/>
+          <p:cNvSpPr/>
+          <p:nvPr/>
+        </p:nvSpPr>
+        <p:spPr>
+          <a:xfrm>
+            <a:off x="5759577" y="4169664"/>
             <a:ext cx="685800" cy="475488"/>
           </a:xfrm>
           <a:prstGeom prst="rect">
@@ -21748,13 +22006,13 @@
       </p:sp>
       <p:sp>
         <p:nvSpPr>
-          <p:cNvPr id="42" name="Text 40"/>
-          <p:cNvSpPr/>
-          <p:nvPr/>
-        </p:nvSpPr>
-        <p:spPr>
-          <a:xfrm>
-            <a:off x="7274052" y="4169664"/>
+          <p:cNvPr id="45" name="Text 43"/>
+          <p:cNvSpPr/>
+          <p:nvPr/>
+        </p:nvSpPr>
+        <p:spPr>
+          <a:xfrm>
+            <a:off x="5759577" y="4169664"/>
             <a:ext cx="685800" cy="475488"/>
           </a:xfrm>
           <a:prstGeom prst="rect">
@@ -21779,7 +22037,139 @@
                 <a:ea typeface="Trebuchet MS" pitchFamily="34" charset="-122"/>
                 <a:cs typeface="Trebuchet MS" pitchFamily="34" charset="-120"/>
               </a:rPr>
-              <a:t>ar</a:t>
+              <a:t>n</a:t>
+            </a:r>
+            <a:endParaRPr lang="en-US" sz="900" dirty="0"/>
+          </a:p>
+        </p:txBody>
+      </p:sp>
+      <p:sp>
+        <p:nvSpPr>
+          <p:cNvPr id="46" name="Shape 44"/>
+          <p:cNvSpPr/>
+          <p:nvPr/>
+        </p:nvSpPr>
+        <p:spPr>
+          <a:xfrm>
+            <a:off x="6668262" y="4169664"/>
+            <a:ext cx="685800" cy="475488"/>
+          </a:xfrm>
+          <a:prstGeom prst="rect">
+            <a:avLst>
+              <a:gd name="adj" fmla="val 7692"/>
+            </a:avLst>
+          </a:prstGeom>
+          <a:solidFill>
+            <a:srgbClr val="FFFFFF"/>
+          </a:solidFill>
+          <a:ln w="12700">
+            <a:solidFill>
+              <a:srgbClr val="DB2777"/>
+            </a:solidFill>
+            <a:prstDash val="solid"/>
+          </a:ln>
+        </p:spPr>
+      </p:sp>
+      <p:sp>
+        <p:nvSpPr>
+          <p:cNvPr id="47" name="Text 45"/>
+          <p:cNvSpPr/>
+          <p:nvPr/>
+        </p:nvSpPr>
+        <p:spPr>
+          <a:xfrm>
+            <a:off x="6668262" y="4169664"/>
+            <a:ext cx="685800" cy="475488"/>
+          </a:xfrm>
+          <a:prstGeom prst="rect">
+            <a:avLst/>
+          </a:prstGeom>
+          <a:noFill/>
+          <a:ln/>
+        </p:spPr>
+        <p:txBody>
+          <a:bodyPr wrap="square" lIns="0" tIns="0" rIns="0" bIns="0" rtlCol="0" anchor="ctr"/>
+          <a:lstStyle/>
+          <a:p>
+            <a:pPr algn="ctr" indent="0" marL="0">
+              <a:buNone/>
+            </a:pPr>
+            <a:r>
+              <a:rPr lang="en-US" sz="900" b="1" dirty="0">
+                <a:solidFill>
+                  <a:srgbClr val="9D174D"/>
+                </a:solidFill>
+                <a:latin typeface="Trebuchet MS" pitchFamily="34" charset="0"/>
+                <a:ea typeface="Trebuchet MS" pitchFamily="34" charset="-122"/>
+                <a:cs typeface="Trebuchet MS" pitchFamily="34" charset="-120"/>
+              </a:rPr>
+              <a:t>t</a:t>
+            </a:r>
+            <a:endParaRPr lang="en-US" sz="900" dirty="0"/>
+          </a:p>
+        </p:txBody>
+      </p:sp>
+      <p:sp>
+        <p:nvSpPr>
+          <p:cNvPr id="48" name="Shape 46"/>
+          <p:cNvSpPr/>
+          <p:nvPr/>
+        </p:nvSpPr>
+        <p:spPr>
+          <a:xfrm>
+            <a:off x="7576947" y="4169664"/>
+            <a:ext cx="685800" cy="475488"/>
+          </a:xfrm>
+          <a:prstGeom prst="rect">
+            <a:avLst>
+              <a:gd name="adj" fmla="val 7692"/>
+            </a:avLst>
+          </a:prstGeom>
+          <a:solidFill>
+            <a:srgbClr val="FFFFFF"/>
+          </a:solidFill>
+          <a:ln w="12700">
+            <a:solidFill>
+              <a:srgbClr val="DB2777"/>
+            </a:solidFill>
+            <a:prstDash val="solid"/>
+          </a:ln>
+        </p:spPr>
+      </p:sp>
+      <p:sp>
+        <p:nvSpPr>
+          <p:cNvPr id="49" name="Text 47"/>
+          <p:cNvSpPr/>
+          <p:nvPr/>
+        </p:nvSpPr>
+        <p:spPr>
+          <a:xfrm>
+            <a:off x="7576947" y="4169664"/>
+            <a:ext cx="685800" cy="475488"/>
+          </a:xfrm>
+          <a:prstGeom prst="rect">
+            <a:avLst/>
+          </a:prstGeom>
+          <a:noFill/>
+          <a:ln/>
+        </p:spPr>
+        <p:txBody>
+          <a:bodyPr wrap="square" lIns="0" tIns="0" rIns="0" bIns="0" rtlCol="0" anchor="ctr"/>
+          <a:lstStyle/>
+          <a:p>
+            <a:pPr algn="ctr" indent="0" marL="0">
+              <a:buNone/>
+            </a:pPr>
+            <a:r>
+              <a:rPr lang="en-US" sz="900" b="1" dirty="0">
+                <a:solidFill>
+                  <a:srgbClr val="9D174D"/>
+                </a:solidFill>
+                <a:latin typeface="Trebuchet MS" pitchFamily="34" charset="0"/>
+                <a:ea typeface="Trebuchet MS" pitchFamily="34" charset="-122"/>
+                <a:cs typeface="Trebuchet MS" pitchFamily="34" charset="-120"/>
+              </a:rPr>
+              <a:t>s</a:t>
             </a:r>
             <a:endParaRPr lang="en-US" sz="900" dirty="0"/>
           </a:p>
@@ -22071,7 +22461,7 @@
                 <a:ea typeface="Calibri" pitchFamily="34" charset="-122"/>
                 <a:cs typeface="Calibri" pitchFamily="34" charset="-120"/>
               </a:rPr>
-              <a:t>Word Labs  •  wordlabs.app  •  Root: 'war' = conflict, fighting, armed struggle</a:t>
+              <a:t>Word Labs  •  wordlabs.app  •  Root: 'war' = armed conflict between groups</a:t>
             </a:r>
             <a:endParaRPr lang="en-US" sz="800" dirty="0"/>
           </a:p>
@@ -22210,7 +22600,7 @@
                 <a:ea typeface="Trebuchet MS" pitchFamily="34" charset="-122"/>
                 <a:cs typeface="Trebuchet MS" pitchFamily="34" charset="-120"/>
               </a:rPr>
-              <a:t>warlike</a:t>
+              <a:t>warranty</a:t>
             </a:r>
             <a:endParaRPr lang="en-US" sz="2800" dirty="0"/>
           </a:p>
@@ -22898,7 +23288,7 @@
                 <a:ea typeface="Calibri" pitchFamily="34" charset="-122"/>
                 <a:cs typeface="Calibri" pitchFamily="34" charset="-120"/>
               </a:rPr>
-              <a:t>Word Labs  •  wordlabs.app  •  Root: 'war' = conflict, fighting, armed struggle</a:t>
+              <a:t>Word Labs  •  wordlabs.app  •  Root: 'war' = armed conflict between groups</a:t>
             </a:r>
             <a:endParaRPr lang="en-US" sz="800" dirty="0"/>
           </a:p>
@@ -23037,7 +23427,7 @@
                 <a:ea typeface="Trebuchet MS" pitchFamily="34" charset="-122"/>
                 <a:cs typeface="Trebuchet MS" pitchFamily="34" charset="-120"/>
               </a:rPr>
-              <a:t>warlike</a:t>
+              <a:t>warranty</a:t>
             </a:r>
             <a:endParaRPr lang="en-US" sz="2800" dirty="0"/>
           </a:p>
@@ -23117,7 +23507,7 @@
         </p:nvSpPr>
         <p:spPr>
           <a:xfrm>
-            <a:off x="2938272" y="2258568"/>
+            <a:off x="2221992" y="2258568"/>
             <a:ext cx="1828800" cy="292608"/>
           </a:xfrm>
           <a:prstGeom prst="rect">
@@ -23151,7 +23541,7 @@
         </p:nvSpPr>
         <p:spPr>
           <a:xfrm>
-            <a:off x="2938272" y="2258568"/>
+            <a:off x="2221992" y="2258568"/>
             <a:ext cx="1828800" cy="292608"/>
           </a:xfrm>
           <a:prstGeom prst="rect">
@@ -23190,7 +23580,7 @@
         </p:nvSpPr>
         <p:spPr>
           <a:xfrm>
-            <a:off x="2938272" y="2569464"/>
+            <a:off x="2221992" y="2569464"/>
             <a:ext cx="1828800" cy="201168"/>
           </a:xfrm>
           <a:prstGeom prst="rect">
@@ -23215,7 +23605,7 @@
                 <a:ea typeface="Calibri" pitchFamily="34" charset="-122"/>
                 <a:cs typeface="Calibri" pitchFamily="34" charset="-120"/>
               </a:rPr>
-              <a:t>conflict, fighting</a:t>
+              <a:t>armed conflict between groups</a:t>
             </a:r>
             <a:endParaRPr lang="en-US" sz="850" dirty="0"/>
           </a:p>
@@ -23229,7 +23619,7 @@
         </p:nvSpPr>
         <p:spPr>
           <a:xfrm>
-            <a:off x="5803392" y="2258568"/>
+            <a:off x="4370832" y="2258568"/>
             <a:ext cx="1828800" cy="292608"/>
           </a:xfrm>
           <a:prstGeom prst="rect">
@@ -23263,7 +23653,7 @@
         </p:nvSpPr>
         <p:spPr>
           <a:xfrm>
-            <a:off x="5803392" y="2258568"/>
+            <a:off x="4370832" y="2258568"/>
             <a:ext cx="1828800" cy="292608"/>
           </a:xfrm>
           <a:prstGeom prst="rect">
@@ -23288,7 +23678,7 @@
                 <a:ea typeface="Trebuchet MS" pitchFamily="34" charset="-122"/>
                 <a:cs typeface="Trebuchet MS" pitchFamily="34" charset="-120"/>
               </a:rPr>
-              <a:t>like</a:t>
+              <a:t>ant</a:t>
             </a:r>
             <a:endParaRPr lang="en-US" sz="1300" dirty="0"/>
           </a:p>
@@ -23302,7 +23692,7 @@
         </p:nvSpPr>
         <p:spPr>
           <a:xfrm>
-            <a:off x="5803392" y="2569464"/>
+            <a:off x="4370832" y="2569464"/>
             <a:ext cx="1828800" cy="201168"/>
           </a:xfrm>
           <a:prstGeom prst="rect">
@@ -23327,7 +23717,7 @@
                 <a:ea typeface="Calibri" pitchFamily="34" charset="-122"/>
                 <a:cs typeface="Calibri" pitchFamily="34" charset="-120"/>
               </a:rPr>
-              <a:t>resembling, having qualities of</a:t>
+              <a:t>person or thing that</a:t>
             </a:r>
             <a:endParaRPr lang="en-US" sz="850" dirty="0"/>
           </a:p>
@@ -23336,6 +23726,118 @@
       <p:sp>
         <p:nvSpPr>
           <p:cNvPr id="22" name="Shape 20"/>
+          <p:cNvSpPr/>
+          <p:nvPr/>
+        </p:nvSpPr>
+        <p:spPr>
+          <a:xfrm>
+            <a:off x="6519672" y="2258568"/>
+            <a:ext cx="1828800" cy="292608"/>
+          </a:xfrm>
+          <a:prstGeom prst="rect">
+            <a:avLst>
+              <a:gd name="adj" fmla="val 25000"/>
+            </a:avLst>
+          </a:prstGeom>
+          <a:solidFill>
+            <a:srgbClr val="FCE7F3"/>
+          </a:solidFill>
+          <a:ln w="19050">
+            <a:solidFill>
+              <a:srgbClr val="DB2777"/>
+            </a:solidFill>
+            <a:prstDash val="solid"/>
+          </a:ln>
+          <a:effectLst>
+            <a:outerShdw sx="100000" sy="100000" kx="0" ky="0" algn="bl" rotWithShape="0" blurRad="101600" dist="38100" dir="8100000">
+              <a:srgbClr val="000000">
+                <a:alpha val="12000"/>
+              </a:srgbClr>
+            </a:outerShdw>
+          </a:effectLst>
+        </p:spPr>
+      </p:sp>
+      <p:sp>
+        <p:nvSpPr>
+          <p:cNvPr id="23" name="Text 21"/>
+          <p:cNvSpPr/>
+          <p:nvPr/>
+        </p:nvSpPr>
+        <p:spPr>
+          <a:xfrm>
+            <a:off x="6519672" y="2258568"/>
+            <a:ext cx="1828800" cy="292608"/>
+          </a:xfrm>
+          <a:prstGeom prst="rect">
+            <a:avLst/>
+          </a:prstGeom>
+          <a:noFill/>
+          <a:ln/>
+        </p:spPr>
+        <p:txBody>
+          <a:bodyPr wrap="square" lIns="0" tIns="0" rIns="0" bIns="0" rtlCol="0" anchor="ctr"/>
+          <a:lstStyle/>
+          <a:p>
+            <a:pPr algn="ctr" indent="0" marL="0">
+              <a:buNone/>
+            </a:pPr>
+            <a:r>
+              <a:rPr lang="en-US" sz="1300" b="1" dirty="0">
+                <a:solidFill>
+                  <a:srgbClr val="9D174D"/>
+                </a:solidFill>
+                <a:latin typeface="Trebuchet MS" pitchFamily="34" charset="0"/>
+                <a:ea typeface="Trebuchet MS" pitchFamily="34" charset="-122"/>
+                <a:cs typeface="Trebuchet MS" pitchFamily="34" charset="-120"/>
+              </a:rPr>
+              <a:t>y</a:t>
+            </a:r>
+            <a:endParaRPr lang="en-US" sz="1300" dirty="0"/>
+          </a:p>
+        </p:txBody>
+      </p:sp>
+      <p:sp>
+        <p:nvSpPr>
+          <p:cNvPr id="24" name="Text 22"/>
+          <p:cNvSpPr/>
+          <p:nvPr/>
+        </p:nvSpPr>
+        <p:spPr>
+          <a:xfrm>
+            <a:off x="6519672" y="2569464"/>
+            <a:ext cx="1828800" cy="201168"/>
+          </a:xfrm>
+          <a:prstGeom prst="rect">
+            <a:avLst/>
+          </a:prstGeom>
+          <a:noFill/>
+          <a:ln/>
+        </p:spPr>
+        <p:txBody>
+          <a:bodyPr wrap="square" lIns="0" tIns="0" rIns="0" bIns="0" rtlCol="0" anchor="t"/>
+          <a:lstStyle/>
+          <a:p>
+            <a:pPr algn="ctr" indent="0" marL="0">
+              <a:buNone/>
+            </a:pPr>
+            <a:r>
+              <a:rPr lang="en-US" sz="850" dirty="0">
+                <a:solidFill>
+                  <a:srgbClr val="475569"/>
+                </a:solidFill>
+                <a:latin typeface="Calibri" pitchFamily="34" charset="0"/>
+                <a:ea typeface="Calibri" pitchFamily="34" charset="-122"/>
+                <a:cs typeface="Calibri" pitchFamily="34" charset="-120"/>
+              </a:rPr>
+              <a:t>characterised by</a:t>
+            </a:r>
+            <a:endParaRPr lang="en-US" sz="850" dirty="0"/>
+          </a:p>
+        </p:txBody>
+      </p:sp>
+      <p:sp>
+        <p:nvSpPr>
+          <p:cNvPr id="25" name="Shape 23"/>
           <p:cNvSpPr/>
           <p:nvPr/>
         </p:nvSpPr>
@@ -23362,7 +23864,7 @@
       </p:sp>
       <p:sp>
         <p:nvSpPr>
-          <p:cNvPr id="23" name="Text 21"/>
+          <p:cNvPr id="26" name="Text 24"/>
           <p:cNvSpPr/>
           <p:nvPr/>
         </p:nvSpPr>
@@ -23401,7 +23903,7 @@
       </p:sp>
       <p:sp>
         <p:nvSpPr>
-          <p:cNvPr id="24" name="Shape 22"/>
+          <p:cNvPr id="27" name="Shape 25"/>
           <p:cNvSpPr/>
           <p:nvPr/>
         </p:nvSpPr>
@@ -23428,7 +23930,7 @@
       </p:sp>
       <p:sp>
         <p:nvSpPr>
-          <p:cNvPr id="25" name="Text 23"/>
+          <p:cNvPr id="28" name="Text 26"/>
           <p:cNvSpPr/>
           <p:nvPr/>
         </p:nvSpPr>
@@ -23467,7 +23969,7 @@
       </p:sp>
       <p:sp>
         <p:nvSpPr>
-          <p:cNvPr id="26" name="Shape 24"/>
+          <p:cNvPr id="29" name="Shape 27"/>
           <p:cNvSpPr/>
           <p:nvPr/>
         </p:nvSpPr>
@@ -23494,7 +23996,7 @@
       </p:sp>
       <p:sp>
         <p:nvSpPr>
-          <p:cNvPr id="27" name="Text 25"/>
+          <p:cNvPr id="30" name="Text 28"/>
           <p:cNvSpPr/>
           <p:nvPr/>
         </p:nvSpPr>
@@ -23533,7 +24035,7 @@
       </p:sp>
       <p:sp>
         <p:nvSpPr>
-          <p:cNvPr id="28" name="Shape 26"/>
+          <p:cNvPr id="31" name="Shape 29"/>
           <p:cNvSpPr/>
           <p:nvPr/>
         </p:nvSpPr>
@@ -23560,7 +24062,7 @@
       </p:sp>
       <p:sp>
         <p:nvSpPr>
-          <p:cNvPr id="29" name="Text 27"/>
+          <p:cNvPr id="32" name="Text 30"/>
           <p:cNvSpPr/>
           <p:nvPr/>
         </p:nvSpPr>
@@ -23883,7 +24385,7 @@
                 <a:ea typeface="Calibri" pitchFamily="34" charset="-122"/>
                 <a:cs typeface="Calibri" pitchFamily="34" charset="-120"/>
               </a:rPr>
-              <a:t>Word Labs  •  wordlabs.app  •  Root: 'war' = conflict, fighting, armed struggle</a:t>
+              <a:t>Word Labs  •  wordlabs.app  •  Root: 'war' = armed conflict between groups</a:t>
             </a:r>
             <a:endParaRPr lang="en-US" sz="800" dirty="0"/>
           </a:p>
@@ -23956,7 +24458,7 @@
                 <a:ea typeface="Trebuchet MS" pitchFamily="34" charset="-122"/>
                 <a:cs typeface="Trebuchet MS" pitchFamily="34" charset="-120"/>
               </a:rPr>
-              <a:t>We are learning that the root 'war' means 'conflict, fighting, armed struggle'.</a:t>
+              <a:t>We are learning that the root 'war' means 'armed conflict between groups'.</a:t>
             </a:r>
             <a:endParaRPr lang="en-US" sz="2000" dirty="0"/>
           </a:p>
@@ -24602,7 +25104,7 @@
                 <a:ea typeface="Calibri" pitchFamily="34" charset="-122"/>
                 <a:cs typeface="Calibri" pitchFamily="34" charset="-120"/>
               </a:rPr>
-              <a:t>Word Labs  •  wordlabs.app  •  Root: 'war' = conflict, fighting, armed struggle</a:t>
+              <a:t>Word Labs  •  wordlabs.app  •  Root: 'war' = armed conflict between groups</a:t>
             </a:r>
             <a:endParaRPr lang="en-US" sz="800" dirty="0"/>
           </a:p>
@@ -24741,7 +25243,7 @@
                 <a:ea typeface="Trebuchet MS" pitchFamily="34" charset="-122"/>
                 <a:cs typeface="Trebuchet MS" pitchFamily="34" charset="-120"/>
               </a:rPr>
-              <a:t>warlike</a:t>
+              <a:t>warranty</a:t>
             </a:r>
             <a:endParaRPr lang="en-US" sz="2800" dirty="0"/>
           </a:p>
@@ -24821,7 +25323,7 @@
         </p:nvSpPr>
         <p:spPr>
           <a:xfrm>
-            <a:off x="2938272" y="2258568"/>
+            <a:off x="2221992" y="2258568"/>
             <a:ext cx="1828800" cy="292608"/>
           </a:xfrm>
           <a:prstGeom prst="rect">
@@ -24855,7 +25357,7 @@
         </p:nvSpPr>
         <p:spPr>
           <a:xfrm>
-            <a:off x="2938272" y="2258568"/>
+            <a:off x="2221992" y="2258568"/>
             <a:ext cx="1828800" cy="292608"/>
           </a:xfrm>
           <a:prstGeom prst="rect">
@@ -24894,7 +25396,7 @@
         </p:nvSpPr>
         <p:spPr>
           <a:xfrm>
-            <a:off x="2938272" y="2569464"/>
+            <a:off x="2221992" y="2569464"/>
             <a:ext cx="1828800" cy="201168"/>
           </a:xfrm>
           <a:prstGeom prst="rect">
@@ -24919,7 +25421,7 @@
                 <a:ea typeface="Calibri" pitchFamily="34" charset="-122"/>
                 <a:cs typeface="Calibri" pitchFamily="34" charset="-120"/>
               </a:rPr>
-              <a:t>conflict, fighting</a:t>
+              <a:t>armed conflict between groups</a:t>
             </a:r>
             <a:endParaRPr lang="en-US" sz="850" dirty="0"/>
           </a:p>
@@ -24933,7 +25435,7 @@
         </p:nvSpPr>
         <p:spPr>
           <a:xfrm>
-            <a:off x="5803392" y="2258568"/>
+            <a:off x="4370832" y="2258568"/>
             <a:ext cx="1828800" cy="292608"/>
           </a:xfrm>
           <a:prstGeom prst="rect">
@@ -24967,7 +25469,7 @@
         </p:nvSpPr>
         <p:spPr>
           <a:xfrm>
-            <a:off x="5803392" y="2258568"/>
+            <a:off x="4370832" y="2258568"/>
             <a:ext cx="1828800" cy="292608"/>
           </a:xfrm>
           <a:prstGeom prst="rect">
@@ -24992,7 +25494,7 @@
                 <a:ea typeface="Trebuchet MS" pitchFamily="34" charset="-122"/>
                 <a:cs typeface="Trebuchet MS" pitchFamily="34" charset="-120"/>
               </a:rPr>
-              <a:t>like</a:t>
+              <a:t>ant</a:t>
             </a:r>
             <a:endParaRPr lang="en-US" sz="1300" dirty="0"/>
           </a:p>
@@ -25006,7 +25508,7 @@
         </p:nvSpPr>
         <p:spPr>
           <a:xfrm>
-            <a:off x="5803392" y="2569464"/>
+            <a:off x="4370832" y="2569464"/>
             <a:ext cx="1828800" cy="201168"/>
           </a:xfrm>
           <a:prstGeom prst="rect">
@@ -25031,7 +25533,7 @@
                 <a:ea typeface="Calibri" pitchFamily="34" charset="-122"/>
                 <a:cs typeface="Calibri" pitchFamily="34" charset="-120"/>
               </a:rPr>
-              <a:t>resembling, having qualities of</a:t>
+              <a:t>person or thing that</a:t>
             </a:r>
             <a:endParaRPr lang="en-US" sz="850" dirty="0"/>
           </a:p>
@@ -25040,6 +25542,118 @@
       <p:sp>
         <p:nvSpPr>
           <p:cNvPr id="22" name="Shape 20"/>
+          <p:cNvSpPr/>
+          <p:nvPr/>
+        </p:nvSpPr>
+        <p:spPr>
+          <a:xfrm>
+            <a:off x="6519672" y="2258568"/>
+            <a:ext cx="1828800" cy="292608"/>
+          </a:xfrm>
+          <a:prstGeom prst="rect">
+            <a:avLst>
+              <a:gd name="adj" fmla="val 25000"/>
+            </a:avLst>
+          </a:prstGeom>
+          <a:solidFill>
+            <a:srgbClr val="FCE7F3"/>
+          </a:solidFill>
+          <a:ln w="19050">
+            <a:solidFill>
+              <a:srgbClr val="DB2777"/>
+            </a:solidFill>
+            <a:prstDash val="solid"/>
+          </a:ln>
+          <a:effectLst>
+            <a:outerShdw sx="100000" sy="100000" kx="0" ky="0" algn="bl" rotWithShape="0" blurRad="101600" dist="38100" dir="8100000">
+              <a:srgbClr val="000000">
+                <a:alpha val="12000"/>
+              </a:srgbClr>
+            </a:outerShdw>
+          </a:effectLst>
+        </p:spPr>
+      </p:sp>
+      <p:sp>
+        <p:nvSpPr>
+          <p:cNvPr id="23" name="Text 21"/>
+          <p:cNvSpPr/>
+          <p:nvPr/>
+        </p:nvSpPr>
+        <p:spPr>
+          <a:xfrm>
+            <a:off x="6519672" y="2258568"/>
+            <a:ext cx="1828800" cy="292608"/>
+          </a:xfrm>
+          <a:prstGeom prst="rect">
+            <a:avLst/>
+          </a:prstGeom>
+          <a:noFill/>
+          <a:ln/>
+        </p:spPr>
+        <p:txBody>
+          <a:bodyPr wrap="square" lIns="0" tIns="0" rIns="0" bIns="0" rtlCol="0" anchor="ctr"/>
+          <a:lstStyle/>
+          <a:p>
+            <a:pPr algn="ctr" indent="0" marL="0">
+              <a:buNone/>
+            </a:pPr>
+            <a:r>
+              <a:rPr lang="en-US" sz="1300" b="1" dirty="0">
+                <a:solidFill>
+                  <a:srgbClr val="9D174D"/>
+                </a:solidFill>
+                <a:latin typeface="Trebuchet MS" pitchFamily="34" charset="0"/>
+                <a:ea typeface="Trebuchet MS" pitchFamily="34" charset="-122"/>
+                <a:cs typeface="Trebuchet MS" pitchFamily="34" charset="-120"/>
+              </a:rPr>
+              <a:t>y</a:t>
+            </a:r>
+            <a:endParaRPr lang="en-US" sz="1300" dirty="0"/>
+          </a:p>
+        </p:txBody>
+      </p:sp>
+      <p:sp>
+        <p:nvSpPr>
+          <p:cNvPr id="24" name="Text 22"/>
+          <p:cNvSpPr/>
+          <p:nvPr/>
+        </p:nvSpPr>
+        <p:spPr>
+          <a:xfrm>
+            <a:off x="6519672" y="2569464"/>
+            <a:ext cx="1828800" cy="201168"/>
+          </a:xfrm>
+          <a:prstGeom prst="rect">
+            <a:avLst/>
+          </a:prstGeom>
+          <a:noFill/>
+          <a:ln/>
+        </p:spPr>
+        <p:txBody>
+          <a:bodyPr wrap="square" lIns="0" tIns="0" rIns="0" bIns="0" rtlCol="0" anchor="t"/>
+          <a:lstStyle/>
+          <a:p>
+            <a:pPr algn="ctr" indent="0" marL="0">
+              <a:buNone/>
+            </a:pPr>
+            <a:r>
+              <a:rPr lang="en-US" sz="850" dirty="0">
+                <a:solidFill>
+                  <a:srgbClr val="475569"/>
+                </a:solidFill>
+                <a:latin typeface="Calibri" pitchFamily="34" charset="0"/>
+                <a:ea typeface="Calibri" pitchFamily="34" charset="-122"/>
+                <a:cs typeface="Calibri" pitchFamily="34" charset="-120"/>
+              </a:rPr>
+              <a:t>characterised by</a:t>
+            </a:r>
+            <a:endParaRPr lang="en-US" sz="850" dirty="0"/>
+          </a:p>
+        </p:txBody>
+      </p:sp>
+      <p:sp>
+        <p:nvSpPr>
+          <p:cNvPr id="25" name="Shape 23"/>
           <p:cNvSpPr/>
           <p:nvPr/>
         </p:nvSpPr>
@@ -25066,7 +25680,7 @@
       </p:sp>
       <p:sp>
         <p:nvSpPr>
-          <p:cNvPr id="23" name="Text 21"/>
+          <p:cNvPr id="26" name="Text 24"/>
           <p:cNvSpPr/>
           <p:nvPr/>
         </p:nvSpPr>
@@ -25105,7 +25719,7 @@
       </p:sp>
       <p:sp>
         <p:nvSpPr>
-          <p:cNvPr id="24" name="Shape 22"/>
+          <p:cNvPr id="27" name="Shape 25"/>
           <p:cNvSpPr/>
           <p:nvPr/>
         </p:nvSpPr>
@@ -25132,13 +25746,13 @@
       </p:sp>
       <p:sp>
         <p:nvSpPr>
-          <p:cNvPr id="25" name="Shape 23"/>
-          <p:cNvSpPr/>
-          <p:nvPr/>
-        </p:nvSpPr>
-        <p:spPr>
-          <a:xfrm>
-            <a:off x="2999232" y="3364992"/>
+          <p:cNvPr id="28" name="Shape 26"/>
+          <p:cNvSpPr/>
+          <p:nvPr/>
+        </p:nvSpPr>
+        <p:spPr>
+          <a:xfrm>
+            <a:off x="2313432" y="3364992"/>
             <a:ext cx="1645920" cy="475488"/>
           </a:xfrm>
           <a:prstGeom prst="rect">
@@ -25159,13 +25773,13 @@
       </p:sp>
       <p:sp>
         <p:nvSpPr>
-          <p:cNvPr id="26" name="Text 24"/>
-          <p:cNvSpPr/>
-          <p:nvPr/>
-        </p:nvSpPr>
-        <p:spPr>
-          <a:xfrm>
-            <a:off x="2999232" y="3364992"/>
+          <p:cNvPr id="29" name="Text 27"/>
+          <p:cNvSpPr/>
+          <p:nvPr/>
+        </p:nvSpPr>
+        <p:spPr>
+          <a:xfrm>
+            <a:off x="2313432" y="3364992"/>
             <a:ext cx="1645920" cy="475488"/>
           </a:xfrm>
           <a:prstGeom prst="rect">
@@ -25198,14 +25812,14 @@
       </p:sp>
       <p:sp>
         <p:nvSpPr>
-          <p:cNvPr id="27" name="Text 25"/>
-          <p:cNvSpPr/>
-          <p:nvPr/>
-        </p:nvSpPr>
-        <p:spPr>
-          <a:xfrm>
-            <a:off x="4645152" y="3364992"/>
-            <a:ext cx="1097280" cy="475488"/>
+          <p:cNvPr id="30" name="Text 28"/>
+          <p:cNvSpPr/>
+          <p:nvPr/>
+        </p:nvSpPr>
+        <p:spPr>
+          <a:xfrm>
+            <a:off x="3959352" y="3364992"/>
+            <a:ext cx="411480" cy="475488"/>
           </a:xfrm>
           <a:prstGeom prst="rect">
             <a:avLst/>
@@ -25237,13 +25851,13 @@
       </p:sp>
       <p:sp>
         <p:nvSpPr>
-          <p:cNvPr id="28" name="Shape 26"/>
-          <p:cNvSpPr/>
-          <p:nvPr/>
-        </p:nvSpPr>
-        <p:spPr>
-          <a:xfrm>
-            <a:off x="5742432" y="3364992"/>
+          <p:cNvPr id="31" name="Shape 29"/>
+          <p:cNvSpPr/>
+          <p:nvPr/>
+        </p:nvSpPr>
+        <p:spPr>
+          <a:xfrm>
+            <a:off x="4370832" y="3364992"/>
             <a:ext cx="1645920" cy="475488"/>
           </a:xfrm>
           <a:prstGeom prst="rect">
@@ -25264,13 +25878,13 @@
       </p:sp>
       <p:sp>
         <p:nvSpPr>
-          <p:cNvPr id="29" name="Text 27"/>
-          <p:cNvSpPr/>
-          <p:nvPr/>
-        </p:nvSpPr>
-        <p:spPr>
-          <a:xfrm>
-            <a:off x="5742432" y="3364992"/>
+          <p:cNvPr id="32" name="Text 30"/>
+          <p:cNvSpPr/>
+          <p:nvPr/>
+        </p:nvSpPr>
+        <p:spPr>
+          <a:xfrm>
+            <a:off x="4370832" y="3364992"/>
             <a:ext cx="1645920" cy="475488"/>
           </a:xfrm>
           <a:prstGeom prst="rect">
@@ -25295,7 +25909,7 @@
                 <a:ea typeface="Trebuchet MS" pitchFamily="34" charset="-122"/>
                 <a:cs typeface="Trebuchet MS" pitchFamily="34" charset="-120"/>
               </a:rPr>
-              <a:t>like</a:t>
+              <a:t>ran</a:t>
             </a:r>
             <a:endParaRPr lang="en-US" sz="1400" dirty="0"/>
           </a:p>
@@ -25303,7 +25917,112 @@
       </p:sp>
       <p:sp>
         <p:nvSpPr>
-          <p:cNvPr id="30" name="Shape 28"/>
+          <p:cNvPr id="33" name="Text 31"/>
+          <p:cNvSpPr/>
+          <p:nvPr/>
+        </p:nvSpPr>
+        <p:spPr>
+          <a:xfrm>
+            <a:off x="6016752" y="3364992"/>
+            <a:ext cx="411480" cy="475488"/>
+          </a:xfrm>
+          <a:prstGeom prst="rect">
+            <a:avLst/>
+          </a:prstGeom>
+          <a:noFill/>
+          <a:ln/>
+        </p:spPr>
+        <p:txBody>
+          <a:bodyPr wrap="square" lIns="0" tIns="0" rIns="0" bIns="0" rtlCol="0" anchor="ctr"/>
+          <a:lstStyle/>
+          <a:p>
+            <a:pPr algn="ctr" indent="0" marL="0">
+              <a:buNone/>
+            </a:pPr>
+            <a:r>
+              <a:rPr lang="en-US" sz="1600" b="1" dirty="0">
+                <a:solidFill>
+                  <a:srgbClr val="0D9488"/>
+                </a:solidFill>
+                <a:latin typeface="Trebuchet MS" pitchFamily="34" charset="0"/>
+                <a:ea typeface="Trebuchet MS" pitchFamily="34" charset="-122"/>
+                <a:cs typeface="Trebuchet MS" pitchFamily="34" charset="-120"/>
+              </a:rPr>
+              <a:t>·</a:t>
+            </a:r>
+            <a:endParaRPr lang="en-US" sz="1600" dirty="0"/>
+          </a:p>
+        </p:txBody>
+      </p:sp>
+      <p:sp>
+        <p:nvSpPr>
+          <p:cNvPr id="34" name="Shape 32"/>
+          <p:cNvSpPr/>
+          <p:nvPr/>
+        </p:nvSpPr>
+        <p:spPr>
+          <a:xfrm>
+            <a:off x="6428232" y="3364992"/>
+            <a:ext cx="1645920" cy="475488"/>
+          </a:xfrm>
+          <a:prstGeom prst="rect">
+            <a:avLst>
+              <a:gd name="adj" fmla="val 9615"/>
+            </a:avLst>
+          </a:prstGeom>
+          <a:solidFill>
+            <a:srgbClr val="FFFFFF"/>
+          </a:solidFill>
+          <a:ln w="12700">
+            <a:solidFill>
+              <a:srgbClr val="0D9488"/>
+            </a:solidFill>
+            <a:prstDash val="solid"/>
+          </a:ln>
+        </p:spPr>
+      </p:sp>
+      <p:sp>
+        <p:nvSpPr>
+          <p:cNvPr id="35" name="Text 33"/>
+          <p:cNvSpPr/>
+          <p:nvPr/>
+        </p:nvSpPr>
+        <p:spPr>
+          <a:xfrm>
+            <a:off x="6428232" y="3364992"/>
+            <a:ext cx="1645920" cy="475488"/>
+          </a:xfrm>
+          <a:prstGeom prst="rect">
+            <a:avLst/>
+          </a:prstGeom>
+          <a:noFill/>
+          <a:ln/>
+        </p:spPr>
+        <p:txBody>
+          <a:bodyPr wrap="square" lIns="0" tIns="0" rIns="0" bIns="0" rtlCol="0" anchor="ctr"/>
+          <a:lstStyle/>
+          <a:p>
+            <a:pPr algn="ctr" indent="0" marL="0">
+              <a:buNone/>
+            </a:pPr>
+            <a:r>
+              <a:rPr lang="en-US" sz="1400" b="1" dirty="0">
+                <a:solidFill>
+                  <a:srgbClr val="0D9488"/>
+                </a:solidFill>
+                <a:latin typeface="Trebuchet MS" pitchFamily="34" charset="0"/>
+                <a:ea typeface="Trebuchet MS" pitchFamily="34" charset="-122"/>
+                <a:cs typeface="Trebuchet MS" pitchFamily="34" charset="-120"/>
+              </a:rPr>
+              <a:t>ty</a:t>
+            </a:r>
+            <a:endParaRPr lang="en-US" sz="1400" dirty="0"/>
+          </a:p>
+        </p:txBody>
+      </p:sp>
+      <p:sp>
+        <p:nvSpPr>
+          <p:cNvPr id="36" name="Shape 34"/>
           <p:cNvSpPr/>
           <p:nvPr/>
         </p:nvSpPr>
@@ -25330,7 +26049,7 @@
       </p:sp>
       <p:sp>
         <p:nvSpPr>
-          <p:cNvPr id="31" name="Text 29"/>
+          <p:cNvPr id="37" name="Text 35"/>
           <p:cNvSpPr/>
           <p:nvPr/>
         </p:nvSpPr>
@@ -25369,7 +26088,7 @@
       </p:sp>
       <p:sp>
         <p:nvSpPr>
-          <p:cNvPr id="32" name="Shape 30"/>
+          <p:cNvPr id="38" name="Shape 36"/>
           <p:cNvSpPr/>
           <p:nvPr/>
         </p:nvSpPr>
@@ -25396,7 +26115,7 @@
       </p:sp>
       <p:sp>
         <p:nvSpPr>
-          <p:cNvPr id="33" name="Text 31"/>
+          <p:cNvPr id="39" name="Text 37"/>
           <p:cNvSpPr/>
           <p:nvPr/>
         </p:nvSpPr>
@@ -25719,7 +26438,7 @@
                 <a:ea typeface="Calibri" pitchFamily="34" charset="-122"/>
                 <a:cs typeface="Calibri" pitchFamily="34" charset="-120"/>
               </a:rPr>
-              <a:t>Word Labs  •  wordlabs.app  •  Root: 'war' = conflict, fighting, armed struggle</a:t>
+              <a:t>Word Labs  •  wordlabs.app  •  Root: 'war' = armed conflict between groups</a:t>
             </a:r>
             <a:endParaRPr lang="en-US" sz="800" dirty="0"/>
           </a:p>
@@ -25858,7 +26577,7 @@
                 <a:ea typeface="Trebuchet MS" pitchFamily="34" charset="-122"/>
                 <a:cs typeface="Trebuchet MS" pitchFamily="34" charset="-120"/>
               </a:rPr>
-              <a:t>warlike</a:t>
+              <a:t>warranty</a:t>
             </a:r>
             <a:endParaRPr lang="en-US" sz="2800" dirty="0"/>
           </a:p>
@@ -25938,7 +26657,7 @@
         </p:nvSpPr>
         <p:spPr>
           <a:xfrm>
-            <a:off x="2938272" y="2258568"/>
+            <a:off x="2221992" y="2258568"/>
             <a:ext cx="1828800" cy="292608"/>
           </a:xfrm>
           <a:prstGeom prst="rect">
@@ -25972,7 +26691,7 @@
         </p:nvSpPr>
         <p:spPr>
           <a:xfrm>
-            <a:off x="2938272" y="2258568"/>
+            <a:off x="2221992" y="2258568"/>
             <a:ext cx="1828800" cy="292608"/>
           </a:xfrm>
           <a:prstGeom prst="rect">
@@ -26011,7 +26730,7 @@
         </p:nvSpPr>
         <p:spPr>
           <a:xfrm>
-            <a:off x="2938272" y="2569464"/>
+            <a:off x="2221992" y="2569464"/>
             <a:ext cx="1828800" cy="201168"/>
           </a:xfrm>
           <a:prstGeom prst="rect">
@@ -26036,7 +26755,7 @@
                 <a:ea typeface="Calibri" pitchFamily="34" charset="-122"/>
                 <a:cs typeface="Calibri" pitchFamily="34" charset="-120"/>
               </a:rPr>
-              <a:t>conflict, fighting</a:t>
+              <a:t>armed conflict between groups</a:t>
             </a:r>
             <a:endParaRPr lang="en-US" sz="850" dirty="0"/>
           </a:p>
@@ -26050,7 +26769,7 @@
         </p:nvSpPr>
         <p:spPr>
           <a:xfrm>
-            <a:off x="5803392" y="2258568"/>
+            <a:off x="4370832" y="2258568"/>
             <a:ext cx="1828800" cy="292608"/>
           </a:xfrm>
           <a:prstGeom prst="rect">
@@ -26084,7 +26803,7 @@
         </p:nvSpPr>
         <p:spPr>
           <a:xfrm>
-            <a:off x="5803392" y="2258568"/>
+            <a:off x="4370832" y="2258568"/>
             <a:ext cx="1828800" cy="292608"/>
           </a:xfrm>
           <a:prstGeom prst="rect">
@@ -26109,7 +26828,7 @@
                 <a:ea typeface="Trebuchet MS" pitchFamily="34" charset="-122"/>
                 <a:cs typeface="Trebuchet MS" pitchFamily="34" charset="-120"/>
               </a:rPr>
-              <a:t>like</a:t>
+              <a:t>ant</a:t>
             </a:r>
             <a:endParaRPr lang="en-US" sz="1300" dirty="0"/>
           </a:p>
@@ -26123,7 +26842,7 @@
         </p:nvSpPr>
         <p:spPr>
           <a:xfrm>
-            <a:off x="5803392" y="2569464"/>
+            <a:off x="4370832" y="2569464"/>
             <a:ext cx="1828800" cy="201168"/>
           </a:xfrm>
           <a:prstGeom prst="rect">
@@ -26148,7 +26867,7 @@
                 <a:ea typeface="Calibri" pitchFamily="34" charset="-122"/>
                 <a:cs typeface="Calibri" pitchFamily="34" charset="-120"/>
               </a:rPr>
-              <a:t>resembling, having qualities of</a:t>
+              <a:t>person or thing that</a:t>
             </a:r>
             <a:endParaRPr lang="en-US" sz="850" dirty="0"/>
           </a:p>
@@ -26157,6 +26876,118 @@
       <p:sp>
         <p:nvSpPr>
           <p:cNvPr id="22" name="Shape 20"/>
+          <p:cNvSpPr/>
+          <p:nvPr/>
+        </p:nvSpPr>
+        <p:spPr>
+          <a:xfrm>
+            <a:off x="6519672" y="2258568"/>
+            <a:ext cx="1828800" cy="292608"/>
+          </a:xfrm>
+          <a:prstGeom prst="rect">
+            <a:avLst>
+              <a:gd name="adj" fmla="val 25000"/>
+            </a:avLst>
+          </a:prstGeom>
+          <a:solidFill>
+            <a:srgbClr val="FCE7F3"/>
+          </a:solidFill>
+          <a:ln w="19050">
+            <a:solidFill>
+              <a:srgbClr val="DB2777"/>
+            </a:solidFill>
+            <a:prstDash val="solid"/>
+          </a:ln>
+          <a:effectLst>
+            <a:outerShdw sx="100000" sy="100000" kx="0" ky="0" algn="bl" rotWithShape="0" blurRad="101600" dist="38100" dir="8100000">
+              <a:srgbClr val="000000">
+                <a:alpha val="12000"/>
+              </a:srgbClr>
+            </a:outerShdw>
+          </a:effectLst>
+        </p:spPr>
+      </p:sp>
+      <p:sp>
+        <p:nvSpPr>
+          <p:cNvPr id="23" name="Text 21"/>
+          <p:cNvSpPr/>
+          <p:nvPr/>
+        </p:nvSpPr>
+        <p:spPr>
+          <a:xfrm>
+            <a:off x="6519672" y="2258568"/>
+            <a:ext cx="1828800" cy="292608"/>
+          </a:xfrm>
+          <a:prstGeom prst="rect">
+            <a:avLst/>
+          </a:prstGeom>
+          <a:noFill/>
+          <a:ln/>
+        </p:spPr>
+        <p:txBody>
+          <a:bodyPr wrap="square" lIns="0" tIns="0" rIns="0" bIns="0" rtlCol="0" anchor="ctr"/>
+          <a:lstStyle/>
+          <a:p>
+            <a:pPr algn="ctr" indent="0" marL="0">
+              <a:buNone/>
+            </a:pPr>
+            <a:r>
+              <a:rPr lang="en-US" sz="1300" b="1" dirty="0">
+                <a:solidFill>
+                  <a:srgbClr val="9D174D"/>
+                </a:solidFill>
+                <a:latin typeface="Trebuchet MS" pitchFamily="34" charset="0"/>
+                <a:ea typeface="Trebuchet MS" pitchFamily="34" charset="-122"/>
+                <a:cs typeface="Trebuchet MS" pitchFamily="34" charset="-120"/>
+              </a:rPr>
+              <a:t>y</a:t>
+            </a:r>
+            <a:endParaRPr lang="en-US" sz="1300" dirty="0"/>
+          </a:p>
+        </p:txBody>
+      </p:sp>
+      <p:sp>
+        <p:nvSpPr>
+          <p:cNvPr id="24" name="Text 22"/>
+          <p:cNvSpPr/>
+          <p:nvPr/>
+        </p:nvSpPr>
+        <p:spPr>
+          <a:xfrm>
+            <a:off x="6519672" y="2569464"/>
+            <a:ext cx="1828800" cy="201168"/>
+          </a:xfrm>
+          <a:prstGeom prst="rect">
+            <a:avLst/>
+          </a:prstGeom>
+          <a:noFill/>
+          <a:ln/>
+        </p:spPr>
+        <p:txBody>
+          <a:bodyPr wrap="square" lIns="0" tIns="0" rIns="0" bIns="0" rtlCol="0" anchor="t"/>
+          <a:lstStyle/>
+          <a:p>
+            <a:pPr algn="ctr" indent="0" marL="0">
+              <a:buNone/>
+            </a:pPr>
+            <a:r>
+              <a:rPr lang="en-US" sz="850" dirty="0">
+                <a:solidFill>
+                  <a:srgbClr val="475569"/>
+                </a:solidFill>
+                <a:latin typeface="Calibri" pitchFamily="34" charset="0"/>
+                <a:ea typeface="Calibri" pitchFamily="34" charset="-122"/>
+                <a:cs typeface="Calibri" pitchFamily="34" charset="-120"/>
+              </a:rPr>
+              <a:t>characterised by</a:t>
+            </a:r>
+            <a:endParaRPr lang="en-US" sz="850" dirty="0"/>
+          </a:p>
+        </p:txBody>
+      </p:sp>
+      <p:sp>
+        <p:nvSpPr>
+          <p:cNvPr id="25" name="Shape 23"/>
           <p:cNvSpPr/>
           <p:nvPr/>
         </p:nvSpPr>
@@ -26183,7 +27014,7 @@
       </p:sp>
       <p:sp>
         <p:nvSpPr>
-          <p:cNvPr id="23" name="Text 21"/>
+          <p:cNvPr id="26" name="Text 24"/>
           <p:cNvSpPr/>
           <p:nvPr/>
         </p:nvSpPr>
@@ -26222,7 +27053,7 @@
       </p:sp>
       <p:sp>
         <p:nvSpPr>
-          <p:cNvPr id="24" name="Shape 22"/>
+          <p:cNvPr id="27" name="Shape 25"/>
           <p:cNvSpPr/>
           <p:nvPr/>
         </p:nvSpPr>
@@ -26249,13 +27080,13 @@
       </p:sp>
       <p:sp>
         <p:nvSpPr>
-          <p:cNvPr id="25" name="Shape 23"/>
-          <p:cNvSpPr/>
-          <p:nvPr/>
-        </p:nvSpPr>
-        <p:spPr>
-          <a:xfrm>
-            <a:off x="2999232" y="3364992"/>
+          <p:cNvPr id="28" name="Shape 26"/>
+          <p:cNvSpPr/>
+          <p:nvPr/>
+        </p:nvSpPr>
+        <p:spPr>
+          <a:xfrm>
+            <a:off x="2313432" y="3364992"/>
             <a:ext cx="1645920" cy="475488"/>
           </a:xfrm>
           <a:prstGeom prst="rect">
@@ -26276,13 +27107,13 @@
       </p:sp>
       <p:sp>
         <p:nvSpPr>
-          <p:cNvPr id="26" name="Text 24"/>
-          <p:cNvSpPr/>
-          <p:nvPr/>
-        </p:nvSpPr>
-        <p:spPr>
-          <a:xfrm>
-            <a:off x="2999232" y="3364992"/>
+          <p:cNvPr id="29" name="Text 27"/>
+          <p:cNvSpPr/>
+          <p:nvPr/>
+        </p:nvSpPr>
+        <p:spPr>
+          <a:xfrm>
+            <a:off x="2313432" y="3364992"/>
             <a:ext cx="1645920" cy="475488"/>
           </a:xfrm>
           <a:prstGeom prst="rect">
@@ -26315,14 +27146,14 @@
       </p:sp>
       <p:sp>
         <p:nvSpPr>
-          <p:cNvPr id="27" name="Text 25"/>
-          <p:cNvSpPr/>
-          <p:nvPr/>
-        </p:nvSpPr>
-        <p:spPr>
-          <a:xfrm>
-            <a:off x="4645152" y="3364992"/>
-            <a:ext cx="1097280" cy="475488"/>
+          <p:cNvPr id="30" name="Text 28"/>
+          <p:cNvSpPr/>
+          <p:nvPr/>
+        </p:nvSpPr>
+        <p:spPr>
+          <a:xfrm>
+            <a:off x="3959352" y="3364992"/>
+            <a:ext cx="411480" cy="475488"/>
           </a:xfrm>
           <a:prstGeom prst="rect">
             <a:avLst/>
@@ -26354,13 +27185,13 @@
       </p:sp>
       <p:sp>
         <p:nvSpPr>
-          <p:cNvPr id="28" name="Shape 26"/>
-          <p:cNvSpPr/>
-          <p:nvPr/>
-        </p:nvSpPr>
-        <p:spPr>
-          <a:xfrm>
-            <a:off x="5742432" y="3364992"/>
+          <p:cNvPr id="31" name="Shape 29"/>
+          <p:cNvSpPr/>
+          <p:nvPr/>
+        </p:nvSpPr>
+        <p:spPr>
+          <a:xfrm>
+            <a:off x="4370832" y="3364992"/>
             <a:ext cx="1645920" cy="475488"/>
           </a:xfrm>
           <a:prstGeom prst="rect">
@@ -26381,13 +27212,13 @@
       </p:sp>
       <p:sp>
         <p:nvSpPr>
-          <p:cNvPr id="29" name="Text 27"/>
-          <p:cNvSpPr/>
-          <p:nvPr/>
-        </p:nvSpPr>
-        <p:spPr>
-          <a:xfrm>
-            <a:off x="5742432" y="3364992"/>
+          <p:cNvPr id="32" name="Text 30"/>
+          <p:cNvSpPr/>
+          <p:nvPr/>
+        </p:nvSpPr>
+        <p:spPr>
+          <a:xfrm>
+            <a:off x="4370832" y="3364992"/>
             <a:ext cx="1645920" cy="475488"/>
           </a:xfrm>
           <a:prstGeom prst="rect">
@@ -26412,7 +27243,7 @@
                 <a:ea typeface="Trebuchet MS" pitchFamily="34" charset="-122"/>
                 <a:cs typeface="Trebuchet MS" pitchFamily="34" charset="-120"/>
               </a:rPr>
-              <a:t>like</a:t>
+              <a:t>ran</a:t>
             </a:r>
             <a:endParaRPr lang="en-US" sz="1400" dirty="0"/>
           </a:p>
@@ -26420,7 +27251,112 @@
       </p:sp>
       <p:sp>
         <p:nvSpPr>
-          <p:cNvPr id="30" name="Shape 28"/>
+          <p:cNvPr id="33" name="Text 31"/>
+          <p:cNvSpPr/>
+          <p:nvPr/>
+        </p:nvSpPr>
+        <p:spPr>
+          <a:xfrm>
+            <a:off x="6016752" y="3364992"/>
+            <a:ext cx="411480" cy="475488"/>
+          </a:xfrm>
+          <a:prstGeom prst="rect">
+            <a:avLst/>
+          </a:prstGeom>
+          <a:noFill/>
+          <a:ln/>
+        </p:spPr>
+        <p:txBody>
+          <a:bodyPr wrap="square" lIns="0" tIns="0" rIns="0" bIns="0" rtlCol="0" anchor="ctr"/>
+          <a:lstStyle/>
+          <a:p>
+            <a:pPr algn="ctr" indent="0" marL="0">
+              <a:buNone/>
+            </a:pPr>
+            <a:r>
+              <a:rPr lang="en-US" sz="1600" b="1" dirty="0">
+                <a:solidFill>
+                  <a:srgbClr val="0D9488"/>
+                </a:solidFill>
+                <a:latin typeface="Trebuchet MS" pitchFamily="34" charset="0"/>
+                <a:ea typeface="Trebuchet MS" pitchFamily="34" charset="-122"/>
+                <a:cs typeface="Trebuchet MS" pitchFamily="34" charset="-120"/>
+              </a:rPr>
+              <a:t>·</a:t>
+            </a:r>
+            <a:endParaRPr lang="en-US" sz="1600" dirty="0"/>
+          </a:p>
+        </p:txBody>
+      </p:sp>
+      <p:sp>
+        <p:nvSpPr>
+          <p:cNvPr id="34" name="Shape 32"/>
+          <p:cNvSpPr/>
+          <p:nvPr/>
+        </p:nvSpPr>
+        <p:spPr>
+          <a:xfrm>
+            <a:off x="6428232" y="3364992"/>
+            <a:ext cx="1645920" cy="475488"/>
+          </a:xfrm>
+          <a:prstGeom prst="rect">
+            <a:avLst>
+              <a:gd name="adj" fmla="val 9615"/>
+            </a:avLst>
+          </a:prstGeom>
+          <a:solidFill>
+            <a:srgbClr val="FFFFFF"/>
+          </a:solidFill>
+          <a:ln w="12700">
+            <a:solidFill>
+              <a:srgbClr val="0D9488"/>
+            </a:solidFill>
+            <a:prstDash val="solid"/>
+          </a:ln>
+        </p:spPr>
+      </p:sp>
+      <p:sp>
+        <p:nvSpPr>
+          <p:cNvPr id="35" name="Text 33"/>
+          <p:cNvSpPr/>
+          <p:nvPr/>
+        </p:nvSpPr>
+        <p:spPr>
+          <a:xfrm>
+            <a:off x="6428232" y="3364992"/>
+            <a:ext cx="1645920" cy="475488"/>
+          </a:xfrm>
+          <a:prstGeom prst="rect">
+            <a:avLst/>
+          </a:prstGeom>
+          <a:noFill/>
+          <a:ln/>
+        </p:spPr>
+        <p:txBody>
+          <a:bodyPr wrap="square" lIns="0" tIns="0" rIns="0" bIns="0" rtlCol="0" anchor="ctr"/>
+          <a:lstStyle/>
+          <a:p>
+            <a:pPr algn="ctr" indent="0" marL="0">
+              <a:buNone/>
+            </a:pPr>
+            <a:r>
+              <a:rPr lang="en-US" sz="1400" b="1" dirty="0">
+                <a:solidFill>
+                  <a:srgbClr val="0D9488"/>
+                </a:solidFill>
+                <a:latin typeface="Trebuchet MS" pitchFamily="34" charset="0"/>
+                <a:ea typeface="Trebuchet MS" pitchFamily="34" charset="-122"/>
+                <a:cs typeface="Trebuchet MS" pitchFamily="34" charset="-120"/>
+              </a:rPr>
+              <a:t>ty</a:t>
+            </a:r>
+            <a:endParaRPr lang="en-US" sz="1400" dirty="0"/>
+          </a:p>
+        </p:txBody>
+      </p:sp>
+      <p:sp>
+        <p:nvSpPr>
+          <p:cNvPr id="36" name="Shape 34"/>
           <p:cNvSpPr/>
           <p:nvPr/>
         </p:nvSpPr>
@@ -26447,7 +27383,7 @@
       </p:sp>
       <p:sp>
         <p:nvSpPr>
-          <p:cNvPr id="31" name="Text 29"/>
+          <p:cNvPr id="37" name="Text 35"/>
           <p:cNvSpPr/>
           <p:nvPr/>
         </p:nvSpPr>
@@ -26486,18 +27422,18 @@
       </p:sp>
       <p:sp>
         <p:nvSpPr>
-          <p:cNvPr id="32" name="Shape 30"/>
+          <p:cNvPr id="38" name="Shape 36"/>
           <p:cNvSpPr/>
           <p:nvPr/>
         </p:nvSpPr>
         <p:spPr>
           <a:xfrm>
             <a:off x="1874520" y="4096512"/>
-            <a:ext cx="6903720" cy="804672"/>
+            <a:ext cx="6903720" cy="658368"/>
           </a:xfrm>
           <a:prstGeom prst="rect">
             <a:avLst>
-              <a:gd name="adj" fmla="val 6818"/>
+              <a:gd name="adj" fmla="val 8333"/>
             </a:avLst>
           </a:prstGeom>
           <a:solidFill>
@@ -26513,18 +27449,18 @@
       </p:sp>
       <p:sp>
         <p:nvSpPr>
-          <p:cNvPr id="33" name="Shape 31"/>
-          <p:cNvSpPr/>
-          <p:nvPr/>
-        </p:nvSpPr>
-        <p:spPr>
-          <a:xfrm>
-            <a:off x="2427732" y="4169664"/>
-            <a:ext cx="685800" cy="384048"/>
+          <p:cNvPr id="39" name="Shape 37"/>
+          <p:cNvSpPr/>
+          <p:nvPr/>
+        </p:nvSpPr>
+        <p:spPr>
+          <a:xfrm>
+            <a:off x="2124837" y="4169664"/>
+            <a:ext cx="685800" cy="475488"/>
           </a:xfrm>
           <a:prstGeom prst="rect">
             <a:avLst>
-              <a:gd name="adj" fmla="val 9524"/>
+              <a:gd name="adj" fmla="val 7692"/>
             </a:avLst>
           </a:prstGeom>
           <a:solidFill>
@@ -26540,14 +27476,14 @@
       </p:sp>
       <p:sp>
         <p:nvSpPr>
-          <p:cNvPr id="34" name="Text 32"/>
-          <p:cNvSpPr/>
-          <p:nvPr/>
-        </p:nvSpPr>
-        <p:spPr>
-          <a:xfrm>
-            <a:off x="2427732" y="4169664"/>
-            <a:ext cx="685800" cy="384048"/>
+          <p:cNvPr id="40" name="Text 38"/>
+          <p:cNvSpPr/>
+          <p:nvPr/>
+        </p:nvSpPr>
+        <p:spPr>
+          <a:xfrm>
+            <a:off x="2124837" y="4169664"/>
+            <a:ext cx="685800" cy="475488"/>
           </a:xfrm>
           <a:prstGeom prst="rect">
             <a:avLst/>
@@ -26579,18 +27515,18 @@
       </p:sp>
       <p:sp>
         <p:nvSpPr>
-          <p:cNvPr id="35" name="Shape 33"/>
-          <p:cNvSpPr/>
-          <p:nvPr/>
-        </p:nvSpPr>
-        <p:spPr>
-          <a:xfrm>
-            <a:off x="3639312" y="4169664"/>
-            <a:ext cx="685800" cy="384048"/>
+          <p:cNvPr id="41" name="Shape 39"/>
+          <p:cNvSpPr/>
+          <p:nvPr/>
+        </p:nvSpPr>
+        <p:spPr>
+          <a:xfrm>
+            <a:off x="3033522" y="4169664"/>
+            <a:ext cx="685800" cy="475488"/>
           </a:xfrm>
           <a:prstGeom prst="rect">
             <a:avLst>
-              <a:gd name="adj" fmla="val 9524"/>
+              <a:gd name="adj" fmla="val 7692"/>
             </a:avLst>
           </a:prstGeom>
           <a:solidFill>
@@ -26606,14 +27542,14 @@
       </p:sp>
       <p:sp>
         <p:nvSpPr>
-          <p:cNvPr id="36" name="Text 34"/>
-          <p:cNvSpPr/>
-          <p:nvPr/>
-        </p:nvSpPr>
-        <p:spPr>
-          <a:xfrm>
-            <a:off x="3639312" y="4169664"/>
-            <a:ext cx="685800" cy="384048"/>
+          <p:cNvPr id="42" name="Text 40"/>
+          <p:cNvSpPr/>
+          <p:nvPr/>
+        </p:nvSpPr>
+        <p:spPr>
+          <a:xfrm>
+            <a:off x="3033522" y="4169664"/>
+            <a:ext cx="685800" cy="475488"/>
           </a:xfrm>
           <a:prstGeom prst="rect">
             <a:avLst/>
@@ -26637,7 +27573,7 @@
                 <a:ea typeface="Trebuchet MS" pitchFamily="34" charset="-122"/>
                 <a:cs typeface="Trebuchet MS" pitchFamily="34" charset="-120"/>
               </a:rPr>
-              <a:t>ar</a:t>
+              <a:t>a</a:t>
             </a:r>
             <a:endParaRPr lang="en-US" sz="900" dirty="0"/>
           </a:p>
@@ -26645,18 +27581,18 @@
       </p:sp>
       <p:sp>
         <p:nvSpPr>
-          <p:cNvPr id="37" name="Shape 35"/>
-          <p:cNvSpPr/>
-          <p:nvPr/>
-        </p:nvSpPr>
-        <p:spPr>
-          <a:xfrm>
-            <a:off x="4850892" y="4169664"/>
-            <a:ext cx="685800" cy="384048"/>
+          <p:cNvPr id="43" name="Shape 41"/>
+          <p:cNvSpPr/>
+          <p:nvPr/>
+        </p:nvSpPr>
+        <p:spPr>
+          <a:xfrm>
+            <a:off x="3942207" y="4169664"/>
+            <a:ext cx="685800" cy="475488"/>
           </a:xfrm>
           <a:prstGeom prst="rect">
             <a:avLst>
-              <a:gd name="adj" fmla="val 9524"/>
+              <a:gd name="adj" fmla="val 7692"/>
             </a:avLst>
           </a:prstGeom>
           <a:solidFill>
@@ -26672,14 +27608,14 @@
       </p:sp>
       <p:sp>
         <p:nvSpPr>
-          <p:cNvPr id="38" name="Text 36"/>
-          <p:cNvSpPr/>
-          <p:nvPr/>
-        </p:nvSpPr>
-        <p:spPr>
-          <a:xfrm>
-            <a:off x="4850892" y="4169664"/>
-            <a:ext cx="685800" cy="384048"/>
+          <p:cNvPr id="44" name="Text 42"/>
+          <p:cNvSpPr/>
+          <p:nvPr/>
+        </p:nvSpPr>
+        <p:spPr>
+          <a:xfrm>
+            <a:off x="3942207" y="4169664"/>
+            <a:ext cx="685800" cy="475488"/>
           </a:xfrm>
           <a:prstGeom prst="rect">
             <a:avLst/>
@@ -26703,7 +27639,7 @@
                 <a:ea typeface="Trebuchet MS" pitchFamily="34" charset="-122"/>
                 <a:cs typeface="Trebuchet MS" pitchFamily="34" charset="-120"/>
               </a:rPr>
-              <a:t>l</a:t>
+              <a:t>rr</a:t>
             </a:r>
             <a:endParaRPr lang="en-US" sz="900" dirty="0"/>
           </a:p>
@@ -26711,18 +27647,18 @@
       </p:sp>
       <p:sp>
         <p:nvSpPr>
-          <p:cNvPr id="39" name="Shape 37"/>
-          <p:cNvSpPr/>
-          <p:nvPr/>
-        </p:nvSpPr>
-        <p:spPr>
-          <a:xfrm>
-            <a:off x="6062472" y="4169664"/>
-            <a:ext cx="685800" cy="384048"/>
+          <p:cNvPr id="45" name="Shape 43"/>
+          <p:cNvSpPr/>
+          <p:nvPr/>
+        </p:nvSpPr>
+        <p:spPr>
+          <a:xfrm>
+            <a:off x="4850892" y="4169664"/>
+            <a:ext cx="685800" cy="475488"/>
           </a:xfrm>
           <a:prstGeom prst="rect">
             <a:avLst>
-              <a:gd name="adj" fmla="val 9524"/>
+              <a:gd name="adj" fmla="val 7692"/>
             </a:avLst>
           </a:prstGeom>
           <a:solidFill>
@@ -26738,14 +27674,14 @@
       </p:sp>
       <p:sp>
         <p:nvSpPr>
-          <p:cNvPr id="40" name="Text 38"/>
-          <p:cNvSpPr/>
-          <p:nvPr/>
-        </p:nvSpPr>
-        <p:spPr>
-          <a:xfrm>
-            <a:off x="6062472" y="4169664"/>
-            <a:ext cx="685800" cy="384048"/>
+          <p:cNvPr id="46" name="Text 44"/>
+          <p:cNvSpPr/>
+          <p:nvPr/>
+        </p:nvSpPr>
+        <p:spPr>
+          <a:xfrm>
+            <a:off x="4850892" y="4169664"/>
+            <a:ext cx="685800" cy="475488"/>
           </a:xfrm>
           <a:prstGeom prst="rect">
             <a:avLst/>
@@ -26769,7 +27705,7 @@
                 <a:ea typeface="Trebuchet MS" pitchFamily="34" charset="-122"/>
                 <a:cs typeface="Trebuchet MS" pitchFamily="34" charset="-120"/>
               </a:rPr>
-              <a:t>i</a:t>
+              <a:t>a</a:t>
             </a:r>
             <a:endParaRPr lang="en-US" sz="900" dirty="0"/>
           </a:p>
@@ -26777,18 +27713,18 @@
       </p:sp>
       <p:sp>
         <p:nvSpPr>
-          <p:cNvPr id="41" name="Shape 39"/>
-          <p:cNvSpPr/>
-          <p:nvPr/>
-        </p:nvSpPr>
-        <p:spPr>
-          <a:xfrm>
-            <a:off x="7274052" y="4169664"/>
-            <a:ext cx="685800" cy="384048"/>
+          <p:cNvPr id="47" name="Shape 45"/>
+          <p:cNvSpPr/>
+          <p:nvPr/>
+        </p:nvSpPr>
+        <p:spPr>
+          <a:xfrm>
+            <a:off x="5759577" y="4169664"/>
+            <a:ext cx="685800" cy="475488"/>
           </a:xfrm>
           <a:prstGeom prst="rect">
             <a:avLst>
-              <a:gd name="adj" fmla="val 9524"/>
+              <a:gd name="adj" fmla="val 7692"/>
             </a:avLst>
           </a:prstGeom>
           <a:solidFill>
@@ -26804,14 +27740,14 @@
       </p:sp>
       <p:sp>
         <p:nvSpPr>
-          <p:cNvPr id="42" name="Text 40"/>
-          <p:cNvSpPr/>
-          <p:nvPr/>
-        </p:nvSpPr>
-        <p:spPr>
-          <a:xfrm>
-            <a:off x="7274052" y="4169664"/>
-            <a:ext cx="685800" cy="384048"/>
+          <p:cNvPr id="48" name="Text 46"/>
+          <p:cNvSpPr/>
+          <p:nvPr/>
+        </p:nvSpPr>
+        <p:spPr>
+          <a:xfrm>
+            <a:off x="5759577" y="4169664"/>
+            <a:ext cx="685800" cy="475488"/>
           </a:xfrm>
           <a:prstGeom prst="rect">
             <a:avLst/>
@@ -26835,7 +27771,7 @@
                 <a:ea typeface="Trebuchet MS" pitchFamily="34" charset="-122"/>
                 <a:cs typeface="Trebuchet MS" pitchFamily="34" charset="-120"/>
               </a:rPr>
-              <a:t>ke</a:t>
+              <a:t>n</a:t>
             </a:r>
             <a:endParaRPr lang="en-US" sz="900" dirty="0"/>
           </a:p>
@@ -26843,40 +27779,133 @@
       </p:sp>
       <p:sp>
         <p:nvSpPr>
-          <p:cNvPr id="43" name="Text 41"/>
-          <p:cNvSpPr/>
-          <p:nvPr/>
-        </p:nvSpPr>
-        <p:spPr>
-          <a:xfrm>
-            <a:off x="7274052" y="4572000"/>
-            <a:ext cx="685800" cy="219456"/>
-          </a:xfrm>
-          <a:prstGeom prst="rect">
-            <a:avLst/>
-          </a:prstGeom>
-          <a:noFill/>
-          <a:ln/>
-        </p:spPr>
-        <p:txBody>
-          <a:bodyPr wrap="square" lIns="0" tIns="0" rIns="0" bIns="0" rtlCol="0" anchor="t"/>
-          <a:lstStyle/>
-          <a:p>
-            <a:pPr algn="ctr" indent="0" marL="0">
-              <a:buNone/>
-            </a:pPr>
-            <a:r>
-              <a:rPr lang="en-US" sz="750" i="1" dirty="0">
-                <a:solidFill>
-                  <a:srgbClr val="94A3B8"/>
-                </a:solidFill>
-                <a:latin typeface="Calibri" pitchFamily="34" charset="0"/>
-                <a:ea typeface="Calibri" pitchFamily="34" charset="-122"/>
-                <a:cs typeface="Calibri" pitchFamily="34" charset="-120"/>
-              </a:rPr>
-              <a:t>/k/</a:t>
-            </a:r>
-            <a:endParaRPr lang="en-US" sz="750" dirty="0"/>
+          <p:cNvPr id="49" name="Shape 47"/>
+          <p:cNvSpPr/>
+          <p:nvPr/>
+        </p:nvSpPr>
+        <p:spPr>
+          <a:xfrm>
+            <a:off x="6668262" y="4169664"/>
+            <a:ext cx="685800" cy="475488"/>
+          </a:xfrm>
+          <a:prstGeom prst="rect">
+            <a:avLst>
+              <a:gd name="adj" fmla="val 7692"/>
+            </a:avLst>
+          </a:prstGeom>
+          <a:solidFill>
+            <a:srgbClr val="FFFFFF"/>
+          </a:solidFill>
+          <a:ln w="12700">
+            <a:solidFill>
+              <a:srgbClr val="DB2777"/>
+            </a:solidFill>
+            <a:prstDash val="solid"/>
+          </a:ln>
+        </p:spPr>
+      </p:sp>
+      <p:sp>
+        <p:nvSpPr>
+          <p:cNvPr id="50" name="Text 48"/>
+          <p:cNvSpPr/>
+          <p:nvPr/>
+        </p:nvSpPr>
+        <p:spPr>
+          <a:xfrm>
+            <a:off x="6668262" y="4169664"/>
+            <a:ext cx="685800" cy="475488"/>
+          </a:xfrm>
+          <a:prstGeom prst="rect">
+            <a:avLst/>
+          </a:prstGeom>
+          <a:noFill/>
+          <a:ln/>
+        </p:spPr>
+        <p:txBody>
+          <a:bodyPr wrap="square" lIns="0" tIns="0" rIns="0" bIns="0" rtlCol="0" anchor="ctr"/>
+          <a:lstStyle/>
+          <a:p>
+            <a:pPr algn="ctr" indent="0" marL="0">
+              <a:buNone/>
+            </a:pPr>
+            <a:r>
+              <a:rPr lang="en-US" sz="900" b="1" dirty="0">
+                <a:solidFill>
+                  <a:srgbClr val="9D174D"/>
+                </a:solidFill>
+                <a:latin typeface="Trebuchet MS" pitchFamily="34" charset="0"/>
+                <a:ea typeface="Trebuchet MS" pitchFamily="34" charset="-122"/>
+                <a:cs typeface="Trebuchet MS" pitchFamily="34" charset="-120"/>
+              </a:rPr>
+              <a:t>t</a:t>
+            </a:r>
+            <a:endParaRPr lang="en-US" sz="900" dirty="0"/>
+          </a:p>
+        </p:txBody>
+      </p:sp>
+      <p:sp>
+        <p:nvSpPr>
+          <p:cNvPr id="51" name="Shape 49"/>
+          <p:cNvSpPr/>
+          <p:nvPr/>
+        </p:nvSpPr>
+        <p:spPr>
+          <a:xfrm>
+            <a:off x="7576947" y="4169664"/>
+            <a:ext cx="685800" cy="475488"/>
+          </a:xfrm>
+          <a:prstGeom prst="rect">
+            <a:avLst>
+              <a:gd name="adj" fmla="val 7692"/>
+            </a:avLst>
+          </a:prstGeom>
+          <a:solidFill>
+            <a:srgbClr val="FFFFFF"/>
+          </a:solidFill>
+          <a:ln w="12700">
+            <a:solidFill>
+              <a:srgbClr val="DB2777"/>
+            </a:solidFill>
+            <a:prstDash val="solid"/>
+          </a:ln>
+        </p:spPr>
+      </p:sp>
+      <p:sp>
+        <p:nvSpPr>
+          <p:cNvPr id="52" name="Text 50"/>
+          <p:cNvSpPr/>
+          <p:nvPr/>
+        </p:nvSpPr>
+        <p:spPr>
+          <a:xfrm>
+            <a:off x="7576947" y="4169664"/>
+            <a:ext cx="685800" cy="475488"/>
+          </a:xfrm>
+          <a:prstGeom prst="rect">
+            <a:avLst/>
+          </a:prstGeom>
+          <a:noFill/>
+          <a:ln/>
+        </p:spPr>
+        <p:txBody>
+          <a:bodyPr wrap="square" lIns="0" tIns="0" rIns="0" bIns="0" rtlCol="0" anchor="ctr"/>
+          <a:lstStyle/>
+          <a:p>
+            <a:pPr algn="ctr" indent="0" marL="0">
+              <a:buNone/>
+            </a:pPr>
+            <a:r>
+              <a:rPr lang="en-US" sz="900" b="1" dirty="0">
+                <a:solidFill>
+                  <a:srgbClr val="9D174D"/>
+                </a:solidFill>
+                <a:latin typeface="Trebuchet MS" pitchFamily="34" charset="0"/>
+                <a:ea typeface="Trebuchet MS" pitchFamily="34" charset="-122"/>
+                <a:cs typeface="Trebuchet MS" pitchFamily="34" charset="-120"/>
+              </a:rPr>
+              <a:t>y</a:t>
+            </a:r>
+            <a:endParaRPr lang="en-US" sz="900" dirty="0"/>
           </a:p>
         </p:txBody>
       </p:sp>
@@ -27166,7 +28195,7 @@
                 <a:ea typeface="Calibri" pitchFamily="34" charset="-122"/>
                 <a:cs typeface="Calibri" pitchFamily="34" charset="-120"/>
               </a:rPr>
-              <a:t>Word Labs  •  wordlabs.app  •  Root: 'war' = conflict, fighting, armed struggle</a:t>
+              <a:t>Word Labs  •  wordlabs.app  •  Root: 'war' = armed conflict between groups</a:t>
             </a:r>
             <a:endParaRPr lang="en-US" sz="800" dirty="0"/>
           </a:p>
@@ -27305,7 +28334,7 @@
                 <a:ea typeface="Trebuchet MS" pitchFamily="34" charset="-122"/>
                 <a:cs typeface="Trebuchet MS" pitchFamily="34" charset="-120"/>
               </a:rPr>
-              <a:t>warfare</a:t>
+              <a:t>warranted</a:t>
             </a:r>
             <a:endParaRPr lang="en-US" sz="2800" dirty="0"/>
           </a:p>
@@ -27993,7 +29022,7 @@
                 <a:ea typeface="Calibri" pitchFamily="34" charset="-122"/>
                 <a:cs typeface="Calibri" pitchFamily="34" charset="-120"/>
               </a:rPr>
-              <a:t>Word Labs  •  wordlabs.app  •  Root: 'war' = conflict, fighting, armed struggle</a:t>
+              <a:t>Word Labs  •  wordlabs.app  •  Root: 'war' = armed conflict between groups</a:t>
             </a:r>
             <a:endParaRPr lang="en-US" sz="800" dirty="0"/>
           </a:p>
@@ -28132,7 +29161,7 @@
                 <a:ea typeface="Trebuchet MS" pitchFamily="34" charset="-122"/>
                 <a:cs typeface="Trebuchet MS" pitchFamily="34" charset="-120"/>
               </a:rPr>
-              <a:t>warfare</a:t>
+              <a:t>warranted</a:t>
             </a:r>
             <a:endParaRPr lang="en-US" sz="2800" dirty="0"/>
           </a:p>
@@ -28212,7 +29241,7 @@
         </p:nvSpPr>
         <p:spPr>
           <a:xfrm>
-            <a:off x="2938272" y="2258568"/>
+            <a:off x="2221992" y="2258568"/>
             <a:ext cx="1828800" cy="292608"/>
           </a:xfrm>
           <a:prstGeom prst="rect">
@@ -28246,7 +29275,7 @@
         </p:nvSpPr>
         <p:spPr>
           <a:xfrm>
-            <a:off x="2938272" y="2258568"/>
+            <a:off x="2221992" y="2258568"/>
             <a:ext cx="1828800" cy="292608"/>
           </a:xfrm>
           <a:prstGeom prst="rect">
@@ -28285,7 +29314,7 @@
         </p:nvSpPr>
         <p:spPr>
           <a:xfrm>
-            <a:off x="2938272" y="2569464"/>
+            <a:off x="2221992" y="2569464"/>
             <a:ext cx="1828800" cy="201168"/>
           </a:xfrm>
           <a:prstGeom prst="rect">
@@ -28310,7 +29339,7 @@
                 <a:ea typeface="Calibri" pitchFamily="34" charset="-122"/>
                 <a:cs typeface="Calibri" pitchFamily="34" charset="-120"/>
               </a:rPr>
-              <a:t>conflict, fighting</a:t>
+              <a:t>armed conflict between groups</a:t>
             </a:r>
             <a:endParaRPr lang="en-US" sz="850" dirty="0"/>
           </a:p>
@@ -28324,7 +29353,7 @@
         </p:nvSpPr>
         <p:spPr>
           <a:xfrm>
-            <a:off x="5803392" y="2258568"/>
+            <a:off x="4370832" y="2258568"/>
             <a:ext cx="1828800" cy="292608"/>
           </a:xfrm>
           <a:prstGeom prst="rect">
@@ -28358,7 +29387,7 @@
         </p:nvSpPr>
         <p:spPr>
           <a:xfrm>
-            <a:off x="5803392" y="2258568"/>
+            <a:off x="4370832" y="2258568"/>
             <a:ext cx="1828800" cy="292608"/>
           </a:xfrm>
           <a:prstGeom prst="rect">
@@ -28383,7 +29412,7 @@
                 <a:ea typeface="Trebuchet MS" pitchFamily="34" charset="-122"/>
                 <a:cs typeface="Trebuchet MS" pitchFamily="34" charset="-120"/>
               </a:rPr>
-              <a:t>fare</a:t>
+              <a:t>ant</a:t>
             </a:r>
             <a:endParaRPr lang="en-US" sz="1300" dirty="0"/>
           </a:p>
@@ -28397,7 +29426,7 @@
         </p:nvSpPr>
         <p:spPr>
           <a:xfrm>
-            <a:off x="5803392" y="2569464"/>
+            <a:off x="4370832" y="2569464"/>
             <a:ext cx="1828800" cy="201168"/>
           </a:xfrm>
           <a:prstGeom prst="rect">
@@ -28422,7 +29451,7 @@
                 <a:ea typeface="Calibri" pitchFamily="34" charset="-122"/>
                 <a:cs typeface="Calibri" pitchFamily="34" charset="-120"/>
               </a:rPr>
-              <a:t>manner of going or proceeding</a:t>
+              <a:t>person or thing that</a:t>
             </a:r>
             <a:endParaRPr lang="en-US" sz="850" dirty="0"/>
           </a:p>
@@ -28431,6 +29460,118 @@
       <p:sp>
         <p:nvSpPr>
           <p:cNvPr id="22" name="Shape 20"/>
+          <p:cNvSpPr/>
+          <p:nvPr/>
+        </p:nvSpPr>
+        <p:spPr>
+          <a:xfrm>
+            <a:off x="6519672" y="2258568"/>
+            <a:ext cx="1828800" cy="292608"/>
+          </a:xfrm>
+          <a:prstGeom prst="rect">
+            <a:avLst>
+              <a:gd name="adj" fmla="val 25000"/>
+            </a:avLst>
+          </a:prstGeom>
+          <a:solidFill>
+            <a:srgbClr val="FCE7F3"/>
+          </a:solidFill>
+          <a:ln w="19050">
+            <a:solidFill>
+              <a:srgbClr val="DB2777"/>
+            </a:solidFill>
+            <a:prstDash val="solid"/>
+          </a:ln>
+          <a:effectLst>
+            <a:outerShdw sx="100000" sy="100000" kx="0" ky="0" algn="bl" rotWithShape="0" blurRad="101600" dist="38100" dir="8100000">
+              <a:srgbClr val="000000">
+                <a:alpha val="12000"/>
+              </a:srgbClr>
+            </a:outerShdw>
+          </a:effectLst>
+        </p:spPr>
+      </p:sp>
+      <p:sp>
+        <p:nvSpPr>
+          <p:cNvPr id="23" name="Text 21"/>
+          <p:cNvSpPr/>
+          <p:nvPr/>
+        </p:nvSpPr>
+        <p:spPr>
+          <a:xfrm>
+            <a:off x="6519672" y="2258568"/>
+            <a:ext cx="1828800" cy="292608"/>
+          </a:xfrm>
+          <a:prstGeom prst="rect">
+            <a:avLst/>
+          </a:prstGeom>
+          <a:noFill/>
+          <a:ln/>
+        </p:spPr>
+        <p:txBody>
+          <a:bodyPr wrap="square" lIns="0" tIns="0" rIns="0" bIns="0" rtlCol="0" anchor="ctr"/>
+          <a:lstStyle/>
+          <a:p>
+            <a:pPr algn="ctr" indent="0" marL="0">
+              <a:buNone/>
+            </a:pPr>
+            <a:r>
+              <a:rPr lang="en-US" sz="1300" b="1" dirty="0">
+                <a:solidFill>
+                  <a:srgbClr val="9D174D"/>
+                </a:solidFill>
+                <a:latin typeface="Trebuchet MS" pitchFamily="34" charset="0"/>
+                <a:ea typeface="Trebuchet MS" pitchFamily="34" charset="-122"/>
+                <a:cs typeface="Trebuchet MS" pitchFamily="34" charset="-120"/>
+              </a:rPr>
+              <a:t>ed</a:t>
+            </a:r>
+            <a:endParaRPr lang="en-US" sz="1300" dirty="0"/>
+          </a:p>
+        </p:txBody>
+      </p:sp>
+      <p:sp>
+        <p:nvSpPr>
+          <p:cNvPr id="24" name="Text 22"/>
+          <p:cNvSpPr/>
+          <p:nvPr/>
+        </p:nvSpPr>
+        <p:spPr>
+          <a:xfrm>
+            <a:off x="6519672" y="2569464"/>
+            <a:ext cx="1828800" cy="201168"/>
+          </a:xfrm>
+          <a:prstGeom prst="rect">
+            <a:avLst/>
+          </a:prstGeom>
+          <a:noFill/>
+          <a:ln/>
+        </p:spPr>
+        <p:txBody>
+          <a:bodyPr wrap="square" lIns="0" tIns="0" rIns="0" bIns="0" rtlCol="0" anchor="t"/>
+          <a:lstStyle/>
+          <a:p>
+            <a:pPr algn="ctr" indent="0" marL="0">
+              <a:buNone/>
+            </a:pPr>
+            <a:r>
+              <a:rPr lang="en-US" sz="850" dirty="0">
+                <a:solidFill>
+                  <a:srgbClr val="475569"/>
+                </a:solidFill>
+                <a:latin typeface="Calibri" pitchFamily="34" charset="0"/>
+                <a:ea typeface="Calibri" pitchFamily="34" charset="-122"/>
+                <a:cs typeface="Calibri" pitchFamily="34" charset="-120"/>
+              </a:rPr>
+              <a:t>past tense</a:t>
+            </a:r>
+            <a:endParaRPr lang="en-US" sz="850" dirty="0"/>
+          </a:p>
+        </p:txBody>
+      </p:sp>
+      <p:sp>
+        <p:nvSpPr>
+          <p:cNvPr id="25" name="Shape 23"/>
           <p:cNvSpPr/>
           <p:nvPr/>
         </p:nvSpPr>
@@ -28457,7 +29598,7 @@
       </p:sp>
       <p:sp>
         <p:nvSpPr>
-          <p:cNvPr id="23" name="Text 21"/>
+          <p:cNvPr id="26" name="Text 24"/>
           <p:cNvSpPr/>
           <p:nvPr/>
         </p:nvSpPr>
@@ -28496,7 +29637,7 @@
       </p:sp>
       <p:sp>
         <p:nvSpPr>
-          <p:cNvPr id="24" name="Shape 22"/>
+          <p:cNvPr id="27" name="Shape 25"/>
           <p:cNvSpPr/>
           <p:nvPr/>
         </p:nvSpPr>
@@ -28523,7 +29664,7 @@
       </p:sp>
       <p:sp>
         <p:nvSpPr>
-          <p:cNvPr id="25" name="Text 23"/>
+          <p:cNvPr id="28" name="Text 26"/>
           <p:cNvSpPr/>
           <p:nvPr/>
         </p:nvSpPr>
@@ -28562,7 +29703,7 @@
       </p:sp>
       <p:sp>
         <p:nvSpPr>
-          <p:cNvPr id="26" name="Shape 24"/>
+          <p:cNvPr id="29" name="Shape 27"/>
           <p:cNvSpPr/>
           <p:nvPr/>
         </p:nvSpPr>
@@ -28589,7 +29730,7 @@
       </p:sp>
       <p:sp>
         <p:nvSpPr>
-          <p:cNvPr id="27" name="Text 25"/>
+          <p:cNvPr id="30" name="Text 28"/>
           <p:cNvSpPr/>
           <p:nvPr/>
         </p:nvSpPr>
@@ -28628,7 +29769,7 @@
       </p:sp>
       <p:sp>
         <p:nvSpPr>
-          <p:cNvPr id="28" name="Shape 26"/>
+          <p:cNvPr id="31" name="Shape 29"/>
           <p:cNvSpPr/>
           <p:nvPr/>
         </p:nvSpPr>
@@ -28655,7 +29796,7 @@
       </p:sp>
       <p:sp>
         <p:nvSpPr>
-          <p:cNvPr id="29" name="Text 27"/>
+          <p:cNvPr id="32" name="Text 30"/>
           <p:cNvSpPr/>
           <p:nvPr/>
         </p:nvSpPr>
@@ -28978,7 +30119,7 @@
                 <a:ea typeface="Calibri" pitchFamily="34" charset="-122"/>
                 <a:cs typeface="Calibri" pitchFamily="34" charset="-120"/>
               </a:rPr>
-              <a:t>Word Labs  •  wordlabs.app  •  Root: 'war' = conflict, fighting, armed struggle</a:t>
+              <a:t>Word Labs  •  wordlabs.app  •  Root: 'war' = armed conflict between groups</a:t>
             </a:r>
             <a:endParaRPr lang="en-US" sz="800" dirty="0"/>
           </a:p>
@@ -29117,7 +30258,7 @@
                 <a:ea typeface="Trebuchet MS" pitchFamily="34" charset="-122"/>
                 <a:cs typeface="Trebuchet MS" pitchFamily="34" charset="-120"/>
               </a:rPr>
-              <a:t>warfare</a:t>
+              <a:t>warranted</a:t>
             </a:r>
             <a:endParaRPr lang="en-US" sz="2800" dirty="0"/>
           </a:p>
@@ -29197,7 +30338,7 @@
         </p:nvSpPr>
         <p:spPr>
           <a:xfrm>
-            <a:off x="2938272" y="2258568"/>
+            <a:off x="2221992" y="2258568"/>
             <a:ext cx="1828800" cy="292608"/>
           </a:xfrm>
           <a:prstGeom prst="rect">
@@ -29231,7 +30372,7 @@
         </p:nvSpPr>
         <p:spPr>
           <a:xfrm>
-            <a:off x="2938272" y="2258568"/>
+            <a:off x="2221992" y="2258568"/>
             <a:ext cx="1828800" cy="292608"/>
           </a:xfrm>
           <a:prstGeom prst="rect">
@@ -29270,7 +30411,7 @@
         </p:nvSpPr>
         <p:spPr>
           <a:xfrm>
-            <a:off x="2938272" y="2569464"/>
+            <a:off x="2221992" y="2569464"/>
             <a:ext cx="1828800" cy="201168"/>
           </a:xfrm>
           <a:prstGeom prst="rect">
@@ -29295,7 +30436,7 @@
                 <a:ea typeface="Calibri" pitchFamily="34" charset="-122"/>
                 <a:cs typeface="Calibri" pitchFamily="34" charset="-120"/>
               </a:rPr>
-              <a:t>conflict, fighting</a:t>
+              <a:t>armed conflict between groups</a:t>
             </a:r>
             <a:endParaRPr lang="en-US" sz="850" dirty="0"/>
           </a:p>
@@ -29309,7 +30450,7 @@
         </p:nvSpPr>
         <p:spPr>
           <a:xfrm>
-            <a:off x="5803392" y="2258568"/>
+            <a:off x="4370832" y="2258568"/>
             <a:ext cx="1828800" cy="292608"/>
           </a:xfrm>
           <a:prstGeom prst="rect">
@@ -29343,7 +30484,7 @@
         </p:nvSpPr>
         <p:spPr>
           <a:xfrm>
-            <a:off x="5803392" y="2258568"/>
+            <a:off x="4370832" y="2258568"/>
             <a:ext cx="1828800" cy="292608"/>
           </a:xfrm>
           <a:prstGeom prst="rect">
@@ -29368,7 +30509,7 @@
                 <a:ea typeface="Trebuchet MS" pitchFamily="34" charset="-122"/>
                 <a:cs typeface="Trebuchet MS" pitchFamily="34" charset="-120"/>
               </a:rPr>
-              <a:t>fare</a:t>
+              <a:t>ant</a:t>
             </a:r>
             <a:endParaRPr lang="en-US" sz="1300" dirty="0"/>
           </a:p>
@@ -29382,7 +30523,7 @@
         </p:nvSpPr>
         <p:spPr>
           <a:xfrm>
-            <a:off x="5803392" y="2569464"/>
+            <a:off x="4370832" y="2569464"/>
             <a:ext cx="1828800" cy="201168"/>
           </a:xfrm>
           <a:prstGeom prst="rect">
@@ -29407,7 +30548,7 @@
                 <a:ea typeface="Calibri" pitchFamily="34" charset="-122"/>
                 <a:cs typeface="Calibri" pitchFamily="34" charset="-120"/>
               </a:rPr>
-              <a:t>manner of going or proceeding</a:t>
+              <a:t>person or thing that</a:t>
             </a:r>
             <a:endParaRPr lang="en-US" sz="850" dirty="0"/>
           </a:p>
@@ -29416,6 +30557,118 @@
       <p:sp>
         <p:nvSpPr>
           <p:cNvPr id="22" name="Shape 20"/>
+          <p:cNvSpPr/>
+          <p:nvPr/>
+        </p:nvSpPr>
+        <p:spPr>
+          <a:xfrm>
+            <a:off x="6519672" y="2258568"/>
+            <a:ext cx="1828800" cy="292608"/>
+          </a:xfrm>
+          <a:prstGeom prst="rect">
+            <a:avLst>
+              <a:gd name="adj" fmla="val 25000"/>
+            </a:avLst>
+          </a:prstGeom>
+          <a:solidFill>
+            <a:srgbClr val="FCE7F3"/>
+          </a:solidFill>
+          <a:ln w="19050">
+            <a:solidFill>
+              <a:srgbClr val="DB2777"/>
+            </a:solidFill>
+            <a:prstDash val="solid"/>
+          </a:ln>
+          <a:effectLst>
+            <a:outerShdw sx="100000" sy="100000" kx="0" ky="0" algn="bl" rotWithShape="0" blurRad="101600" dist="38100" dir="8100000">
+              <a:srgbClr val="000000">
+                <a:alpha val="12000"/>
+              </a:srgbClr>
+            </a:outerShdw>
+          </a:effectLst>
+        </p:spPr>
+      </p:sp>
+      <p:sp>
+        <p:nvSpPr>
+          <p:cNvPr id="23" name="Text 21"/>
+          <p:cNvSpPr/>
+          <p:nvPr/>
+        </p:nvSpPr>
+        <p:spPr>
+          <a:xfrm>
+            <a:off x="6519672" y="2258568"/>
+            <a:ext cx="1828800" cy="292608"/>
+          </a:xfrm>
+          <a:prstGeom prst="rect">
+            <a:avLst/>
+          </a:prstGeom>
+          <a:noFill/>
+          <a:ln/>
+        </p:spPr>
+        <p:txBody>
+          <a:bodyPr wrap="square" lIns="0" tIns="0" rIns="0" bIns="0" rtlCol="0" anchor="ctr"/>
+          <a:lstStyle/>
+          <a:p>
+            <a:pPr algn="ctr" indent="0" marL="0">
+              <a:buNone/>
+            </a:pPr>
+            <a:r>
+              <a:rPr lang="en-US" sz="1300" b="1" dirty="0">
+                <a:solidFill>
+                  <a:srgbClr val="9D174D"/>
+                </a:solidFill>
+                <a:latin typeface="Trebuchet MS" pitchFamily="34" charset="0"/>
+                <a:ea typeface="Trebuchet MS" pitchFamily="34" charset="-122"/>
+                <a:cs typeface="Trebuchet MS" pitchFamily="34" charset="-120"/>
+              </a:rPr>
+              <a:t>ed</a:t>
+            </a:r>
+            <a:endParaRPr lang="en-US" sz="1300" dirty="0"/>
+          </a:p>
+        </p:txBody>
+      </p:sp>
+      <p:sp>
+        <p:nvSpPr>
+          <p:cNvPr id="24" name="Text 22"/>
+          <p:cNvSpPr/>
+          <p:nvPr/>
+        </p:nvSpPr>
+        <p:spPr>
+          <a:xfrm>
+            <a:off x="6519672" y="2569464"/>
+            <a:ext cx="1828800" cy="201168"/>
+          </a:xfrm>
+          <a:prstGeom prst="rect">
+            <a:avLst/>
+          </a:prstGeom>
+          <a:noFill/>
+          <a:ln/>
+        </p:spPr>
+        <p:txBody>
+          <a:bodyPr wrap="square" lIns="0" tIns="0" rIns="0" bIns="0" rtlCol="0" anchor="t"/>
+          <a:lstStyle/>
+          <a:p>
+            <a:pPr algn="ctr" indent="0" marL="0">
+              <a:buNone/>
+            </a:pPr>
+            <a:r>
+              <a:rPr lang="en-US" sz="850" dirty="0">
+                <a:solidFill>
+                  <a:srgbClr val="475569"/>
+                </a:solidFill>
+                <a:latin typeface="Calibri" pitchFamily="34" charset="0"/>
+                <a:ea typeface="Calibri" pitchFamily="34" charset="-122"/>
+                <a:cs typeface="Calibri" pitchFamily="34" charset="-120"/>
+              </a:rPr>
+              <a:t>past tense</a:t>
+            </a:r>
+            <a:endParaRPr lang="en-US" sz="850" dirty="0"/>
+          </a:p>
+        </p:txBody>
+      </p:sp>
+      <p:sp>
+        <p:nvSpPr>
+          <p:cNvPr id="25" name="Shape 23"/>
           <p:cNvSpPr/>
           <p:nvPr/>
         </p:nvSpPr>
@@ -29442,7 +30695,7 @@
       </p:sp>
       <p:sp>
         <p:nvSpPr>
-          <p:cNvPr id="23" name="Text 21"/>
+          <p:cNvPr id="26" name="Text 24"/>
           <p:cNvSpPr/>
           <p:nvPr/>
         </p:nvSpPr>
@@ -29481,7 +30734,7 @@
       </p:sp>
       <p:sp>
         <p:nvSpPr>
-          <p:cNvPr id="24" name="Shape 22"/>
+          <p:cNvPr id="27" name="Shape 25"/>
           <p:cNvSpPr/>
           <p:nvPr/>
         </p:nvSpPr>
@@ -29508,7 +30761,7 @@
       </p:sp>
       <p:sp>
         <p:nvSpPr>
-          <p:cNvPr id="25" name="Shape 23"/>
+          <p:cNvPr id="28" name="Shape 26"/>
           <p:cNvSpPr/>
           <p:nvPr/>
         </p:nvSpPr>
@@ -29535,7 +30788,7 @@
       </p:sp>
       <p:sp>
         <p:nvSpPr>
-          <p:cNvPr id="26" name="Text 24"/>
+          <p:cNvPr id="29" name="Text 27"/>
           <p:cNvSpPr/>
           <p:nvPr/>
         </p:nvSpPr>
@@ -29574,7 +30827,7 @@
       </p:sp>
       <p:sp>
         <p:nvSpPr>
-          <p:cNvPr id="27" name="Text 25"/>
+          <p:cNvPr id="30" name="Text 28"/>
           <p:cNvSpPr/>
           <p:nvPr/>
         </p:nvSpPr>
@@ -29613,7 +30866,7 @@
       </p:sp>
       <p:sp>
         <p:nvSpPr>
-          <p:cNvPr id="28" name="Shape 26"/>
+          <p:cNvPr id="31" name="Shape 29"/>
           <p:cNvSpPr/>
           <p:nvPr/>
         </p:nvSpPr>
@@ -29640,7 +30893,7 @@
       </p:sp>
       <p:sp>
         <p:nvSpPr>
-          <p:cNvPr id="29" name="Text 27"/>
+          <p:cNvPr id="32" name="Text 30"/>
           <p:cNvSpPr/>
           <p:nvPr/>
         </p:nvSpPr>
@@ -29671,7 +30924,7 @@
                 <a:ea typeface="Trebuchet MS" pitchFamily="34" charset="-122"/>
                 <a:cs typeface="Trebuchet MS" pitchFamily="34" charset="-120"/>
               </a:rPr>
-              <a:t>fare</a:t>
+              <a:t>ranted</a:t>
             </a:r>
             <a:endParaRPr lang="en-US" sz="1400" dirty="0"/>
           </a:p>
@@ -29679,7 +30932,7 @@
       </p:sp>
       <p:sp>
         <p:nvSpPr>
-          <p:cNvPr id="30" name="Shape 28"/>
+          <p:cNvPr id="33" name="Shape 31"/>
           <p:cNvSpPr/>
           <p:nvPr/>
         </p:nvSpPr>
@@ -29706,7 +30959,7 @@
       </p:sp>
       <p:sp>
         <p:nvSpPr>
-          <p:cNvPr id="31" name="Text 29"/>
+          <p:cNvPr id="34" name="Text 32"/>
           <p:cNvSpPr/>
           <p:nvPr/>
         </p:nvSpPr>
@@ -29745,7 +30998,7 @@
       </p:sp>
       <p:sp>
         <p:nvSpPr>
-          <p:cNvPr id="32" name="Shape 30"/>
+          <p:cNvPr id="35" name="Shape 33"/>
           <p:cNvSpPr/>
           <p:nvPr/>
         </p:nvSpPr>
@@ -29772,7 +31025,7 @@
       </p:sp>
       <p:sp>
         <p:nvSpPr>
-          <p:cNvPr id="33" name="Text 31"/>
+          <p:cNvPr id="36" name="Text 34"/>
           <p:cNvSpPr/>
           <p:nvPr/>
         </p:nvSpPr>
@@ -30095,7 +31348,7 @@
                 <a:ea typeface="Calibri" pitchFamily="34" charset="-122"/>
                 <a:cs typeface="Calibri" pitchFamily="34" charset="-120"/>
               </a:rPr>
-              <a:t>Word Labs  •  wordlabs.app  •  Root: 'war' = conflict, fighting, armed struggle</a:t>
+              <a:t>Word Labs  •  wordlabs.app  •  Root: 'war' = armed conflict between groups</a:t>
             </a:r>
             <a:endParaRPr lang="en-US" sz="800" dirty="0"/>
           </a:p>
@@ -30234,7 +31487,7 @@
                 <a:ea typeface="Trebuchet MS" pitchFamily="34" charset="-122"/>
                 <a:cs typeface="Trebuchet MS" pitchFamily="34" charset="-120"/>
               </a:rPr>
-              <a:t>warfare</a:t>
+              <a:t>warranted</a:t>
             </a:r>
             <a:endParaRPr lang="en-US" sz="2800" dirty="0"/>
           </a:p>
@@ -30314,7 +31567,7 @@
         </p:nvSpPr>
         <p:spPr>
           <a:xfrm>
-            <a:off x="2938272" y="2258568"/>
+            <a:off x="2221992" y="2258568"/>
             <a:ext cx="1828800" cy="292608"/>
           </a:xfrm>
           <a:prstGeom prst="rect">
@@ -30348,7 +31601,7 @@
         </p:nvSpPr>
         <p:spPr>
           <a:xfrm>
-            <a:off x="2938272" y="2258568"/>
+            <a:off x="2221992" y="2258568"/>
             <a:ext cx="1828800" cy="292608"/>
           </a:xfrm>
           <a:prstGeom prst="rect">
@@ -30387,7 +31640,7 @@
         </p:nvSpPr>
         <p:spPr>
           <a:xfrm>
-            <a:off x="2938272" y="2569464"/>
+            <a:off x="2221992" y="2569464"/>
             <a:ext cx="1828800" cy="201168"/>
           </a:xfrm>
           <a:prstGeom prst="rect">
@@ -30412,7 +31665,7 @@
                 <a:ea typeface="Calibri" pitchFamily="34" charset="-122"/>
                 <a:cs typeface="Calibri" pitchFamily="34" charset="-120"/>
               </a:rPr>
-              <a:t>conflict, fighting</a:t>
+              <a:t>armed conflict between groups</a:t>
             </a:r>
             <a:endParaRPr lang="en-US" sz="850" dirty="0"/>
           </a:p>
@@ -30426,7 +31679,7 @@
         </p:nvSpPr>
         <p:spPr>
           <a:xfrm>
-            <a:off x="5803392" y="2258568"/>
+            <a:off x="4370832" y="2258568"/>
             <a:ext cx="1828800" cy="292608"/>
           </a:xfrm>
           <a:prstGeom prst="rect">
@@ -30460,7 +31713,7 @@
         </p:nvSpPr>
         <p:spPr>
           <a:xfrm>
-            <a:off x="5803392" y="2258568"/>
+            <a:off x="4370832" y="2258568"/>
             <a:ext cx="1828800" cy="292608"/>
           </a:xfrm>
           <a:prstGeom prst="rect">
@@ -30485,7 +31738,7 @@
                 <a:ea typeface="Trebuchet MS" pitchFamily="34" charset="-122"/>
                 <a:cs typeface="Trebuchet MS" pitchFamily="34" charset="-120"/>
               </a:rPr>
-              <a:t>fare</a:t>
+              <a:t>ant</a:t>
             </a:r>
             <a:endParaRPr lang="en-US" sz="1300" dirty="0"/>
           </a:p>
@@ -30499,7 +31752,7 @@
         </p:nvSpPr>
         <p:spPr>
           <a:xfrm>
-            <a:off x="5803392" y="2569464"/>
+            <a:off x="4370832" y="2569464"/>
             <a:ext cx="1828800" cy="201168"/>
           </a:xfrm>
           <a:prstGeom prst="rect">
@@ -30524,7 +31777,7 @@
                 <a:ea typeface="Calibri" pitchFamily="34" charset="-122"/>
                 <a:cs typeface="Calibri" pitchFamily="34" charset="-120"/>
               </a:rPr>
-              <a:t>manner of going or proceeding</a:t>
+              <a:t>person or thing that</a:t>
             </a:r>
             <a:endParaRPr lang="en-US" sz="850" dirty="0"/>
           </a:p>
@@ -30533,6 +31786,118 @@
       <p:sp>
         <p:nvSpPr>
           <p:cNvPr id="22" name="Shape 20"/>
+          <p:cNvSpPr/>
+          <p:nvPr/>
+        </p:nvSpPr>
+        <p:spPr>
+          <a:xfrm>
+            <a:off x="6519672" y="2258568"/>
+            <a:ext cx="1828800" cy="292608"/>
+          </a:xfrm>
+          <a:prstGeom prst="rect">
+            <a:avLst>
+              <a:gd name="adj" fmla="val 25000"/>
+            </a:avLst>
+          </a:prstGeom>
+          <a:solidFill>
+            <a:srgbClr val="FCE7F3"/>
+          </a:solidFill>
+          <a:ln w="19050">
+            <a:solidFill>
+              <a:srgbClr val="DB2777"/>
+            </a:solidFill>
+            <a:prstDash val="solid"/>
+          </a:ln>
+          <a:effectLst>
+            <a:outerShdw sx="100000" sy="100000" kx="0" ky="0" algn="bl" rotWithShape="0" blurRad="101600" dist="38100" dir="8100000">
+              <a:srgbClr val="000000">
+                <a:alpha val="12000"/>
+              </a:srgbClr>
+            </a:outerShdw>
+          </a:effectLst>
+        </p:spPr>
+      </p:sp>
+      <p:sp>
+        <p:nvSpPr>
+          <p:cNvPr id="23" name="Text 21"/>
+          <p:cNvSpPr/>
+          <p:nvPr/>
+        </p:nvSpPr>
+        <p:spPr>
+          <a:xfrm>
+            <a:off x="6519672" y="2258568"/>
+            <a:ext cx="1828800" cy="292608"/>
+          </a:xfrm>
+          <a:prstGeom prst="rect">
+            <a:avLst/>
+          </a:prstGeom>
+          <a:noFill/>
+          <a:ln/>
+        </p:spPr>
+        <p:txBody>
+          <a:bodyPr wrap="square" lIns="0" tIns="0" rIns="0" bIns="0" rtlCol="0" anchor="ctr"/>
+          <a:lstStyle/>
+          <a:p>
+            <a:pPr algn="ctr" indent="0" marL="0">
+              <a:buNone/>
+            </a:pPr>
+            <a:r>
+              <a:rPr lang="en-US" sz="1300" b="1" dirty="0">
+                <a:solidFill>
+                  <a:srgbClr val="9D174D"/>
+                </a:solidFill>
+                <a:latin typeface="Trebuchet MS" pitchFamily="34" charset="0"/>
+                <a:ea typeface="Trebuchet MS" pitchFamily="34" charset="-122"/>
+                <a:cs typeface="Trebuchet MS" pitchFamily="34" charset="-120"/>
+              </a:rPr>
+              <a:t>ed</a:t>
+            </a:r>
+            <a:endParaRPr lang="en-US" sz="1300" dirty="0"/>
+          </a:p>
+        </p:txBody>
+      </p:sp>
+      <p:sp>
+        <p:nvSpPr>
+          <p:cNvPr id="24" name="Text 22"/>
+          <p:cNvSpPr/>
+          <p:nvPr/>
+        </p:nvSpPr>
+        <p:spPr>
+          <a:xfrm>
+            <a:off x="6519672" y="2569464"/>
+            <a:ext cx="1828800" cy="201168"/>
+          </a:xfrm>
+          <a:prstGeom prst="rect">
+            <a:avLst/>
+          </a:prstGeom>
+          <a:noFill/>
+          <a:ln/>
+        </p:spPr>
+        <p:txBody>
+          <a:bodyPr wrap="square" lIns="0" tIns="0" rIns="0" bIns="0" rtlCol="0" anchor="t"/>
+          <a:lstStyle/>
+          <a:p>
+            <a:pPr algn="ctr" indent="0" marL="0">
+              <a:buNone/>
+            </a:pPr>
+            <a:r>
+              <a:rPr lang="en-US" sz="850" dirty="0">
+                <a:solidFill>
+                  <a:srgbClr val="475569"/>
+                </a:solidFill>
+                <a:latin typeface="Calibri" pitchFamily="34" charset="0"/>
+                <a:ea typeface="Calibri" pitchFamily="34" charset="-122"/>
+                <a:cs typeface="Calibri" pitchFamily="34" charset="-120"/>
+              </a:rPr>
+              <a:t>past tense</a:t>
+            </a:r>
+            <a:endParaRPr lang="en-US" sz="850" dirty="0"/>
+          </a:p>
+        </p:txBody>
+      </p:sp>
+      <p:sp>
+        <p:nvSpPr>
+          <p:cNvPr id="25" name="Shape 23"/>
           <p:cNvSpPr/>
           <p:nvPr/>
         </p:nvSpPr>
@@ -30559,7 +31924,7 @@
       </p:sp>
       <p:sp>
         <p:nvSpPr>
-          <p:cNvPr id="23" name="Text 21"/>
+          <p:cNvPr id="26" name="Text 24"/>
           <p:cNvSpPr/>
           <p:nvPr/>
         </p:nvSpPr>
@@ -30598,7 +31963,7 @@
       </p:sp>
       <p:sp>
         <p:nvSpPr>
-          <p:cNvPr id="24" name="Shape 22"/>
+          <p:cNvPr id="27" name="Shape 25"/>
           <p:cNvSpPr/>
           <p:nvPr/>
         </p:nvSpPr>
@@ -30625,7 +31990,7 @@
       </p:sp>
       <p:sp>
         <p:nvSpPr>
-          <p:cNvPr id="25" name="Shape 23"/>
+          <p:cNvPr id="28" name="Shape 26"/>
           <p:cNvSpPr/>
           <p:nvPr/>
         </p:nvSpPr>
@@ -30652,7 +32017,7 @@
       </p:sp>
       <p:sp>
         <p:nvSpPr>
-          <p:cNvPr id="26" name="Text 24"/>
+          <p:cNvPr id="29" name="Text 27"/>
           <p:cNvSpPr/>
           <p:nvPr/>
         </p:nvSpPr>
@@ -30691,7 +32056,7 @@
       </p:sp>
       <p:sp>
         <p:nvSpPr>
-          <p:cNvPr id="27" name="Text 25"/>
+          <p:cNvPr id="30" name="Text 28"/>
           <p:cNvSpPr/>
           <p:nvPr/>
         </p:nvSpPr>
@@ -30730,7 +32095,7 @@
       </p:sp>
       <p:sp>
         <p:nvSpPr>
-          <p:cNvPr id="28" name="Shape 26"/>
+          <p:cNvPr id="31" name="Shape 29"/>
           <p:cNvSpPr/>
           <p:nvPr/>
         </p:nvSpPr>
@@ -30757,7 +32122,7 @@
       </p:sp>
       <p:sp>
         <p:nvSpPr>
-          <p:cNvPr id="29" name="Text 27"/>
+          <p:cNvPr id="32" name="Text 30"/>
           <p:cNvSpPr/>
           <p:nvPr/>
         </p:nvSpPr>
@@ -30788,7 +32153,7 @@
                 <a:ea typeface="Trebuchet MS" pitchFamily="34" charset="-122"/>
                 <a:cs typeface="Trebuchet MS" pitchFamily="34" charset="-120"/>
               </a:rPr>
-              <a:t>fare</a:t>
+              <a:t>ranted</a:t>
             </a:r>
             <a:endParaRPr lang="en-US" sz="1400" dirty="0"/>
           </a:p>
@@ -30796,7 +32161,7 @@
       </p:sp>
       <p:sp>
         <p:nvSpPr>
-          <p:cNvPr id="30" name="Shape 28"/>
+          <p:cNvPr id="33" name="Shape 31"/>
           <p:cNvSpPr/>
           <p:nvPr/>
         </p:nvSpPr>
@@ -30823,7 +32188,7 @@
       </p:sp>
       <p:sp>
         <p:nvSpPr>
-          <p:cNvPr id="31" name="Text 29"/>
+          <p:cNvPr id="34" name="Text 32"/>
           <p:cNvSpPr/>
           <p:nvPr/>
         </p:nvSpPr>
@@ -30862,7 +32227,7 @@
       </p:sp>
       <p:sp>
         <p:nvSpPr>
-          <p:cNvPr id="32" name="Shape 30"/>
+          <p:cNvPr id="35" name="Shape 33"/>
           <p:cNvSpPr/>
           <p:nvPr/>
         </p:nvSpPr>
@@ -30889,13 +32254,13 @@
       </p:sp>
       <p:sp>
         <p:nvSpPr>
-          <p:cNvPr id="33" name="Shape 31"/>
-          <p:cNvSpPr/>
-          <p:nvPr/>
-        </p:nvSpPr>
-        <p:spPr>
-          <a:xfrm>
-            <a:off x="2427732" y="4169664"/>
+          <p:cNvPr id="36" name="Shape 34"/>
+          <p:cNvSpPr/>
+          <p:nvPr/>
+        </p:nvSpPr>
+        <p:spPr>
+          <a:xfrm>
+            <a:off x="2023872" y="4169664"/>
             <a:ext cx="685800" cy="475488"/>
           </a:xfrm>
           <a:prstGeom prst="rect">
@@ -30916,13 +32281,13 @@
       </p:sp>
       <p:sp>
         <p:nvSpPr>
-          <p:cNvPr id="34" name="Text 32"/>
-          <p:cNvSpPr/>
-          <p:nvPr/>
-        </p:nvSpPr>
-        <p:spPr>
-          <a:xfrm>
-            <a:off x="2427732" y="4169664"/>
+          <p:cNvPr id="37" name="Text 35"/>
+          <p:cNvSpPr/>
+          <p:nvPr/>
+        </p:nvSpPr>
+        <p:spPr>
+          <a:xfrm>
+            <a:off x="2023872" y="4169664"/>
             <a:ext cx="685800" cy="475488"/>
           </a:xfrm>
           <a:prstGeom prst="rect">
@@ -30955,13 +32320,13 @@
       </p:sp>
       <p:sp>
         <p:nvSpPr>
-          <p:cNvPr id="35" name="Shape 33"/>
-          <p:cNvSpPr/>
-          <p:nvPr/>
-        </p:nvSpPr>
-        <p:spPr>
-          <a:xfrm>
-            <a:off x="3639312" y="4169664"/>
+          <p:cNvPr id="38" name="Shape 36"/>
+          <p:cNvSpPr/>
+          <p:nvPr/>
+        </p:nvSpPr>
+        <p:spPr>
+          <a:xfrm>
+            <a:off x="2831592" y="4169664"/>
             <a:ext cx="685800" cy="475488"/>
           </a:xfrm>
           <a:prstGeom prst="rect">
@@ -30982,13 +32347,13 @@
       </p:sp>
       <p:sp>
         <p:nvSpPr>
-          <p:cNvPr id="36" name="Text 34"/>
-          <p:cNvSpPr/>
-          <p:nvPr/>
-        </p:nvSpPr>
-        <p:spPr>
-          <a:xfrm>
-            <a:off x="3639312" y="4169664"/>
+          <p:cNvPr id="39" name="Text 37"/>
+          <p:cNvSpPr/>
+          <p:nvPr/>
+        </p:nvSpPr>
+        <p:spPr>
+          <a:xfrm>
+            <a:off x="2831592" y="4169664"/>
             <a:ext cx="685800" cy="475488"/>
           </a:xfrm>
           <a:prstGeom prst="rect">
@@ -31013,7 +32378,7 @@
                 <a:ea typeface="Trebuchet MS" pitchFamily="34" charset="-122"/>
                 <a:cs typeface="Trebuchet MS" pitchFamily="34" charset="-120"/>
               </a:rPr>
-              <a:t>ar</a:t>
+              <a:t>a</a:t>
             </a:r>
             <a:endParaRPr lang="en-US" sz="900" dirty="0"/>
           </a:p>
@@ -31021,13 +32386,13 @@
       </p:sp>
       <p:sp>
         <p:nvSpPr>
-          <p:cNvPr id="37" name="Shape 35"/>
-          <p:cNvSpPr/>
-          <p:nvPr/>
-        </p:nvSpPr>
-        <p:spPr>
-          <a:xfrm>
-            <a:off x="4850892" y="4169664"/>
+          <p:cNvPr id="40" name="Shape 38"/>
+          <p:cNvSpPr/>
+          <p:nvPr/>
+        </p:nvSpPr>
+        <p:spPr>
+          <a:xfrm>
+            <a:off x="3639312" y="4169664"/>
             <a:ext cx="685800" cy="475488"/>
           </a:xfrm>
           <a:prstGeom prst="rect">
@@ -31048,13 +32413,13 @@
       </p:sp>
       <p:sp>
         <p:nvSpPr>
-          <p:cNvPr id="38" name="Text 36"/>
-          <p:cNvSpPr/>
-          <p:nvPr/>
-        </p:nvSpPr>
-        <p:spPr>
-          <a:xfrm>
-            <a:off x="4850892" y="4169664"/>
+          <p:cNvPr id="41" name="Text 39"/>
+          <p:cNvSpPr/>
+          <p:nvPr/>
+        </p:nvSpPr>
+        <p:spPr>
+          <a:xfrm>
+            <a:off x="3639312" y="4169664"/>
             <a:ext cx="685800" cy="475488"/>
           </a:xfrm>
           <a:prstGeom prst="rect">
@@ -31079,7 +32444,7 @@
                 <a:ea typeface="Trebuchet MS" pitchFamily="34" charset="-122"/>
                 <a:cs typeface="Trebuchet MS" pitchFamily="34" charset="-120"/>
               </a:rPr>
-              <a:t>f</a:t>
+              <a:t>rr</a:t>
             </a:r>
             <a:endParaRPr lang="en-US" sz="900" dirty="0"/>
           </a:p>
@@ -31087,13 +32452,13 @@
       </p:sp>
       <p:sp>
         <p:nvSpPr>
-          <p:cNvPr id="39" name="Shape 37"/>
-          <p:cNvSpPr/>
-          <p:nvPr/>
-        </p:nvSpPr>
-        <p:spPr>
-          <a:xfrm>
-            <a:off x="6062472" y="4169664"/>
+          <p:cNvPr id="42" name="Shape 40"/>
+          <p:cNvSpPr/>
+          <p:nvPr/>
+        </p:nvSpPr>
+        <p:spPr>
+          <a:xfrm>
+            <a:off x="4447032" y="4169664"/>
             <a:ext cx="685800" cy="475488"/>
           </a:xfrm>
           <a:prstGeom prst="rect">
@@ -31114,13 +32479,13 @@
       </p:sp>
       <p:sp>
         <p:nvSpPr>
-          <p:cNvPr id="40" name="Text 38"/>
-          <p:cNvSpPr/>
-          <p:nvPr/>
-        </p:nvSpPr>
-        <p:spPr>
-          <a:xfrm>
-            <a:off x="6062472" y="4169664"/>
+          <p:cNvPr id="43" name="Text 41"/>
+          <p:cNvSpPr/>
+          <p:nvPr/>
+        </p:nvSpPr>
+        <p:spPr>
+          <a:xfrm>
+            <a:off x="4447032" y="4169664"/>
             <a:ext cx="685800" cy="475488"/>
           </a:xfrm>
           <a:prstGeom prst="rect">
@@ -31145,7 +32510,7 @@
                 <a:ea typeface="Trebuchet MS" pitchFamily="34" charset="-122"/>
                 <a:cs typeface="Trebuchet MS" pitchFamily="34" charset="-120"/>
               </a:rPr>
-              <a:t>ar</a:t>
+              <a:t>a</a:t>
             </a:r>
             <a:endParaRPr lang="en-US" sz="900" dirty="0"/>
           </a:p>
@@ -31153,13 +32518,13 @@
       </p:sp>
       <p:sp>
         <p:nvSpPr>
-          <p:cNvPr id="41" name="Shape 39"/>
-          <p:cNvSpPr/>
-          <p:nvPr/>
-        </p:nvSpPr>
-        <p:spPr>
-          <a:xfrm>
-            <a:off x="7274052" y="4169664"/>
+          <p:cNvPr id="44" name="Shape 42"/>
+          <p:cNvSpPr/>
+          <p:nvPr/>
+        </p:nvSpPr>
+        <p:spPr>
+          <a:xfrm>
+            <a:off x="5254752" y="4169664"/>
             <a:ext cx="685800" cy="475488"/>
           </a:xfrm>
           <a:prstGeom prst="rect">
@@ -31180,13 +32545,13 @@
       </p:sp>
       <p:sp>
         <p:nvSpPr>
-          <p:cNvPr id="42" name="Text 40"/>
-          <p:cNvSpPr/>
-          <p:nvPr/>
-        </p:nvSpPr>
-        <p:spPr>
-          <a:xfrm>
-            <a:off x="7274052" y="4169664"/>
+          <p:cNvPr id="45" name="Text 43"/>
+          <p:cNvSpPr/>
+          <p:nvPr/>
+        </p:nvSpPr>
+        <p:spPr>
+          <a:xfrm>
+            <a:off x="5254752" y="4169664"/>
             <a:ext cx="685800" cy="475488"/>
           </a:xfrm>
           <a:prstGeom prst="rect">
@@ -31211,7 +32576,205 @@
                 <a:ea typeface="Trebuchet MS" pitchFamily="34" charset="-122"/>
                 <a:cs typeface="Trebuchet MS" pitchFamily="34" charset="-120"/>
               </a:rPr>
+              <a:t>n</a:t>
+            </a:r>
+            <a:endParaRPr lang="en-US" sz="900" dirty="0"/>
+          </a:p>
+        </p:txBody>
+      </p:sp>
+      <p:sp>
+        <p:nvSpPr>
+          <p:cNvPr id="46" name="Shape 44"/>
+          <p:cNvSpPr/>
+          <p:nvPr/>
+        </p:nvSpPr>
+        <p:spPr>
+          <a:xfrm>
+            <a:off x="6062472" y="4169664"/>
+            <a:ext cx="685800" cy="475488"/>
+          </a:xfrm>
+          <a:prstGeom prst="rect">
+            <a:avLst>
+              <a:gd name="adj" fmla="val 7692"/>
+            </a:avLst>
+          </a:prstGeom>
+          <a:solidFill>
+            <a:srgbClr val="FFFFFF"/>
+          </a:solidFill>
+          <a:ln w="12700">
+            <a:solidFill>
+              <a:srgbClr val="DB2777"/>
+            </a:solidFill>
+            <a:prstDash val="solid"/>
+          </a:ln>
+        </p:spPr>
+      </p:sp>
+      <p:sp>
+        <p:nvSpPr>
+          <p:cNvPr id="47" name="Text 45"/>
+          <p:cNvSpPr/>
+          <p:nvPr/>
+        </p:nvSpPr>
+        <p:spPr>
+          <a:xfrm>
+            <a:off x="6062472" y="4169664"/>
+            <a:ext cx="685800" cy="475488"/>
+          </a:xfrm>
+          <a:prstGeom prst="rect">
+            <a:avLst/>
+          </a:prstGeom>
+          <a:noFill/>
+          <a:ln/>
+        </p:spPr>
+        <p:txBody>
+          <a:bodyPr wrap="square" lIns="0" tIns="0" rIns="0" bIns="0" rtlCol="0" anchor="ctr"/>
+          <a:lstStyle/>
+          <a:p>
+            <a:pPr algn="ctr" indent="0" marL="0">
+              <a:buNone/>
+            </a:pPr>
+            <a:r>
+              <a:rPr lang="en-US" sz="900" b="1" dirty="0">
+                <a:solidFill>
+                  <a:srgbClr val="9D174D"/>
+                </a:solidFill>
+                <a:latin typeface="Trebuchet MS" pitchFamily="34" charset="0"/>
+                <a:ea typeface="Trebuchet MS" pitchFamily="34" charset="-122"/>
+                <a:cs typeface="Trebuchet MS" pitchFamily="34" charset="-120"/>
+              </a:rPr>
+              <a:t>t</a:t>
+            </a:r>
+            <a:endParaRPr lang="en-US" sz="900" dirty="0"/>
+          </a:p>
+        </p:txBody>
+      </p:sp>
+      <p:sp>
+        <p:nvSpPr>
+          <p:cNvPr id="48" name="Shape 46"/>
+          <p:cNvSpPr/>
+          <p:nvPr/>
+        </p:nvSpPr>
+        <p:spPr>
+          <a:xfrm>
+            <a:off x="6870192" y="4169664"/>
+            <a:ext cx="685800" cy="475488"/>
+          </a:xfrm>
+          <a:prstGeom prst="rect">
+            <a:avLst>
+              <a:gd name="adj" fmla="val 7692"/>
+            </a:avLst>
+          </a:prstGeom>
+          <a:solidFill>
+            <a:srgbClr val="FFFFFF"/>
+          </a:solidFill>
+          <a:ln w="12700">
+            <a:solidFill>
+              <a:srgbClr val="DB2777"/>
+            </a:solidFill>
+            <a:prstDash val="solid"/>
+          </a:ln>
+        </p:spPr>
+      </p:sp>
+      <p:sp>
+        <p:nvSpPr>
+          <p:cNvPr id="49" name="Text 47"/>
+          <p:cNvSpPr/>
+          <p:nvPr/>
+        </p:nvSpPr>
+        <p:spPr>
+          <a:xfrm>
+            <a:off x="6870192" y="4169664"/>
+            <a:ext cx="685800" cy="475488"/>
+          </a:xfrm>
+          <a:prstGeom prst="rect">
+            <a:avLst/>
+          </a:prstGeom>
+          <a:noFill/>
+          <a:ln/>
+        </p:spPr>
+        <p:txBody>
+          <a:bodyPr wrap="square" lIns="0" tIns="0" rIns="0" bIns="0" rtlCol="0" anchor="ctr"/>
+          <a:lstStyle/>
+          <a:p>
+            <a:pPr algn="ctr" indent="0" marL="0">
+              <a:buNone/>
+            </a:pPr>
+            <a:r>
+              <a:rPr lang="en-US" sz="900" b="1" dirty="0">
+                <a:solidFill>
+                  <a:srgbClr val="9D174D"/>
+                </a:solidFill>
+                <a:latin typeface="Trebuchet MS" pitchFamily="34" charset="0"/>
+                <a:ea typeface="Trebuchet MS" pitchFamily="34" charset="-122"/>
+                <a:cs typeface="Trebuchet MS" pitchFamily="34" charset="-120"/>
+              </a:rPr>
               <a:t>e</a:t>
+            </a:r>
+            <a:endParaRPr lang="en-US" sz="900" dirty="0"/>
+          </a:p>
+        </p:txBody>
+      </p:sp>
+      <p:sp>
+        <p:nvSpPr>
+          <p:cNvPr id="50" name="Shape 48"/>
+          <p:cNvSpPr/>
+          <p:nvPr/>
+        </p:nvSpPr>
+        <p:spPr>
+          <a:xfrm>
+            <a:off x="7677912" y="4169664"/>
+            <a:ext cx="685800" cy="475488"/>
+          </a:xfrm>
+          <a:prstGeom prst="rect">
+            <a:avLst>
+              <a:gd name="adj" fmla="val 7692"/>
+            </a:avLst>
+          </a:prstGeom>
+          <a:solidFill>
+            <a:srgbClr val="FFFFFF"/>
+          </a:solidFill>
+          <a:ln w="12700">
+            <a:solidFill>
+              <a:srgbClr val="DB2777"/>
+            </a:solidFill>
+            <a:prstDash val="solid"/>
+          </a:ln>
+        </p:spPr>
+      </p:sp>
+      <p:sp>
+        <p:nvSpPr>
+          <p:cNvPr id="51" name="Text 49"/>
+          <p:cNvSpPr/>
+          <p:nvPr/>
+        </p:nvSpPr>
+        <p:spPr>
+          <a:xfrm>
+            <a:off x="7677912" y="4169664"/>
+            <a:ext cx="685800" cy="475488"/>
+          </a:xfrm>
+          <a:prstGeom prst="rect">
+            <a:avLst/>
+          </a:prstGeom>
+          <a:noFill/>
+          <a:ln/>
+        </p:spPr>
+        <p:txBody>
+          <a:bodyPr wrap="square" lIns="0" tIns="0" rIns="0" bIns="0" rtlCol="0" anchor="ctr"/>
+          <a:lstStyle/>
+          <a:p>
+            <a:pPr algn="ctr" indent="0" marL="0">
+              <a:buNone/>
+            </a:pPr>
+            <a:r>
+              <a:rPr lang="en-US" sz="900" b="1" dirty="0">
+                <a:solidFill>
+                  <a:srgbClr val="9D174D"/>
+                </a:solidFill>
+                <a:latin typeface="Trebuchet MS" pitchFamily="34" charset="0"/>
+                <a:ea typeface="Trebuchet MS" pitchFamily="34" charset="-122"/>
+                <a:cs typeface="Trebuchet MS" pitchFamily="34" charset="-120"/>
+              </a:rPr>
+              <a:t>d</a:t>
             </a:r>
             <a:endParaRPr lang="en-US" sz="900" dirty="0"/>
           </a:p>
@@ -31503,7 +33066,7 @@
                 <a:ea typeface="Calibri" pitchFamily="34" charset="-122"/>
                 <a:cs typeface="Calibri" pitchFamily="34" charset="-120"/>
               </a:rPr>
-              <a:t>Word Labs  •  wordlabs.app  •  Root: 'war' = conflict, fighting, armed struggle</a:t>
+              <a:t>Word Labs  •  wordlabs.app  •  Root: 'war' = armed conflict between groups</a:t>
             </a:r>
             <a:endParaRPr lang="en-US" sz="800" dirty="0"/>
           </a:p>
@@ -32672,7 +34235,7 @@
                 <a:ea typeface="Calibri" pitchFamily="34" charset="-122"/>
                 <a:cs typeface="Calibri" pitchFamily="34" charset="-120"/>
               </a:rPr>
-              <a:t>Word Labs  •  wordlabs.app  •  Root: 'war' = conflict, fighting, armed struggle</a:t>
+              <a:t>Word Labs  •  wordlabs.app  •  Root: 'war' = armed conflict between groups</a:t>
             </a:r>
             <a:endParaRPr lang="en-US" sz="800" dirty="0"/>
           </a:p>
@@ -32973,7 +34536,7 @@
                 <a:ea typeface="Trebuchet MS" pitchFamily="34" charset="-122"/>
                 <a:cs typeface="Trebuchet MS" pitchFamily="34" charset="-120"/>
               </a:rPr>
-              <a:t>pre-</a:t>
+              <a:t>post-</a:t>
             </a:r>
             <a:endParaRPr lang="en-US" sz="1300" dirty="0"/>
           </a:p>
@@ -33101,7 +34664,7 @@
                 <a:ea typeface="Trebuchet MS" pitchFamily="34" charset="-122"/>
                 <a:cs typeface="Trebuchet MS" pitchFamily="34" charset="-120"/>
               </a:rPr>
-              <a:t>-fare</a:t>
+              <a:t>-ant</a:t>
             </a:r>
             <a:endParaRPr lang="en-US" sz="1300" dirty="0"/>
           </a:p>
@@ -33122,7 +34685,7 @@
             <a:avLst/>
           </a:prstGeom>
           <a:solidFill>
-            <a:srgbClr val="DDD6FE"/>
+            <a:srgbClr val="F1F5F9"/>
           </a:solidFill>
           <a:ln w="12700">
             <a:solidFill>
@@ -33134,14 +34697,64 @@
       </p:sp>
       <p:sp>
         <p:nvSpPr>
-          <p:cNvPr id="24" name="Text 22"/>
-          <p:cNvSpPr/>
-          <p:nvPr/>
-        </p:nvSpPr>
-        <p:spPr>
-          <a:xfrm>
-            <a:off x="365760" y="1984248"/>
-            <a:ext cx="2468880" cy="402336"/>
+          <p:cNvPr id="24" name="Shape 22"/>
+          <p:cNvSpPr/>
+          <p:nvPr/>
+        </p:nvSpPr>
+        <p:spPr>
+          <a:xfrm>
+            <a:off x="2971800" y="1984248"/>
+            <a:ext cx="2834640" cy="402336"/>
+          </a:xfrm>
+          <a:prstGeom prst="rect">
+            <a:avLst/>
+          </a:prstGeom>
+          <a:solidFill>
+            <a:srgbClr val="F1F5F9"/>
+          </a:solidFill>
+          <a:ln w="12700">
+            <a:solidFill>
+              <a:srgbClr val="E2E8F0"/>
+            </a:solidFill>
+            <a:prstDash val="solid"/>
+          </a:ln>
+        </p:spPr>
+      </p:sp>
+      <p:sp>
+        <p:nvSpPr>
+          <p:cNvPr id="25" name="Shape 23"/>
+          <p:cNvSpPr/>
+          <p:nvPr/>
+        </p:nvSpPr>
+        <p:spPr>
+          <a:xfrm>
+            <a:off x="5943600" y="1984248"/>
+            <a:ext cx="2834640" cy="402336"/>
+          </a:xfrm>
+          <a:prstGeom prst="rect">
+            <a:avLst/>
+          </a:prstGeom>
+          <a:solidFill>
+            <a:srgbClr val="FCE7F3"/>
+          </a:solidFill>
+          <a:ln w="12700">
+            <a:solidFill>
+              <a:srgbClr val="E2E8F0"/>
+            </a:solidFill>
+            <a:prstDash val="solid"/>
+          </a:ln>
+        </p:spPr>
+      </p:sp>
+      <p:sp>
+        <p:nvSpPr>
+          <p:cNvPr id="26" name="Text 24"/>
+          <p:cNvSpPr/>
+          <p:nvPr/>
+        </p:nvSpPr>
+        <p:spPr>
+          <a:xfrm>
+            <a:off x="5943600" y="1984248"/>
+            <a:ext cx="2834640" cy="402336"/>
           </a:xfrm>
           <a:prstGeom prst="rect">
             <a:avLst/>
@@ -33159,13 +34772,13 @@
             <a:r>
               <a:rPr lang="en-US" sz="1300" b="1" dirty="0">
                 <a:solidFill>
-                  <a:srgbClr val="4C1D95"/>
+                  <a:srgbClr val="9D174D"/>
                 </a:solidFill>
                 <a:latin typeface="Trebuchet MS" pitchFamily="34" charset="0"/>
                 <a:ea typeface="Trebuchet MS" pitchFamily="34" charset="-122"/>
                 <a:cs typeface="Trebuchet MS" pitchFamily="34" charset="-120"/>
               </a:rPr>
-              <a:t>out-</a:t>
+              <a:t>-en</a:t>
             </a:r>
             <a:endParaRPr lang="en-US" sz="1300" dirty="0"/>
           </a:p>
@@ -33173,20 +34786,45 @@
       </p:sp>
       <p:sp>
         <p:nvSpPr>
-          <p:cNvPr id="25" name="Shape 23"/>
-          <p:cNvSpPr/>
-          <p:nvPr/>
-        </p:nvSpPr>
-        <p:spPr>
-          <a:xfrm>
-            <a:off x="2971800" y="1984248"/>
+          <p:cNvPr id="27" name="Shape 25"/>
+          <p:cNvSpPr/>
+          <p:nvPr/>
+        </p:nvSpPr>
+        <p:spPr>
+          <a:xfrm>
+            <a:off x="365760" y="2404872"/>
+            <a:ext cx="2468880" cy="402336"/>
+          </a:xfrm>
+          <a:prstGeom prst="rect">
+            <a:avLst/>
+          </a:prstGeom>
+          <a:solidFill>
+            <a:srgbClr val="F8FAFC"/>
+          </a:solidFill>
+          <a:ln w="12700">
+            <a:solidFill>
+              <a:srgbClr val="E2E8F0"/>
+            </a:solidFill>
+            <a:prstDash val="solid"/>
+          </a:ln>
+        </p:spPr>
+      </p:sp>
+      <p:sp>
+        <p:nvSpPr>
+          <p:cNvPr id="28" name="Shape 26"/>
+          <p:cNvSpPr/>
+          <p:nvPr/>
+        </p:nvSpPr>
+        <p:spPr>
+          <a:xfrm>
+            <a:off x="2971800" y="2404872"/>
             <a:ext cx="2834640" cy="402336"/>
           </a:xfrm>
           <a:prstGeom prst="rect">
             <a:avLst/>
           </a:prstGeom>
           <a:solidFill>
-            <a:srgbClr val="F1F5F9"/>
+            <a:srgbClr val="F8FAFC"/>
           </a:solidFill>
           <a:ln w="12700">
             <a:solidFill>
@@ -33198,13 +34836,13 @@
       </p:sp>
       <p:sp>
         <p:nvSpPr>
-          <p:cNvPr id="26" name="Shape 24"/>
-          <p:cNvSpPr/>
-          <p:nvPr/>
-        </p:nvSpPr>
-        <p:spPr>
-          <a:xfrm>
-            <a:off x="5943600" y="1984248"/>
+          <p:cNvPr id="29" name="Shape 27"/>
+          <p:cNvSpPr/>
+          <p:nvPr/>
+        </p:nvSpPr>
+        <p:spPr>
+          <a:xfrm>
+            <a:off x="5943600" y="2404872"/>
             <a:ext cx="2834640" cy="402336"/>
           </a:xfrm>
           <a:prstGeom prst="rect">
@@ -33223,13 +34861,13 @@
       </p:sp>
       <p:sp>
         <p:nvSpPr>
-          <p:cNvPr id="27" name="Text 25"/>
-          <p:cNvSpPr/>
-          <p:nvPr/>
-        </p:nvSpPr>
-        <p:spPr>
-          <a:xfrm>
-            <a:off x="5943600" y="1984248"/>
+          <p:cNvPr id="30" name="Text 28"/>
+          <p:cNvSpPr/>
+          <p:nvPr/>
+        </p:nvSpPr>
+        <p:spPr>
+          <a:xfrm>
+            <a:off x="5943600" y="2404872"/>
             <a:ext cx="2834640" cy="402336"/>
           </a:xfrm>
           <a:prstGeom prst="rect">
@@ -33254,7 +34892,7 @@
                 <a:ea typeface="Trebuchet MS" pitchFamily="34" charset="-122"/>
                 <a:cs typeface="Trebuchet MS" pitchFamily="34" charset="-120"/>
               </a:rPr>
-              <a:t>-ship</a:t>
+              <a:t>-s</a:t>
             </a:r>
             <a:endParaRPr lang="en-US" sz="1300" dirty="0"/>
           </a:p>
@@ -33262,39 +34900,14 @@
       </p:sp>
       <p:sp>
         <p:nvSpPr>
-          <p:cNvPr id="28" name="Shape 26"/>
-          <p:cNvSpPr/>
-          <p:nvPr/>
-        </p:nvSpPr>
-        <p:spPr>
-          <a:xfrm>
-            <a:off x="365760" y="2404872"/>
-            <a:ext cx="2468880" cy="402336"/>
-          </a:xfrm>
-          <a:prstGeom prst="rect">
-            <a:avLst/>
-          </a:prstGeom>
-          <a:solidFill>
-            <a:srgbClr val="DDD6FE"/>
-          </a:solidFill>
-          <a:ln w="12700">
-            <a:solidFill>
-              <a:srgbClr val="E2E8F0"/>
-            </a:solidFill>
-            <a:prstDash val="solid"/>
-          </a:ln>
-        </p:spPr>
-      </p:sp>
-      <p:sp>
-        <p:nvSpPr>
-          <p:cNvPr id="29" name="Text 27"/>
-          <p:cNvSpPr/>
-          <p:nvPr/>
-        </p:nvSpPr>
-        <p:spPr>
-          <a:xfrm>
-            <a:off x="365760" y="2404872"/>
-            <a:ext cx="2468880" cy="402336"/>
+          <p:cNvPr id="31" name="Text 29"/>
+          <p:cNvSpPr/>
+          <p:nvPr/>
+        </p:nvSpPr>
+        <p:spPr>
+          <a:xfrm>
+            <a:off x="365760" y="3611880"/>
+            <a:ext cx="1828800" cy="347472"/>
           </a:xfrm>
           <a:prstGeom prst="rect">
             <a:avLst/>
@@ -33306,84 +34919,61 @@
           <a:bodyPr wrap="square" lIns="0" tIns="0" rIns="0" bIns="0" rtlCol="0" anchor="ctr"/>
           <a:lstStyle/>
           <a:p>
-            <a:pPr algn="ctr" indent="0" marL="0">
-              <a:buNone/>
-            </a:pPr>
-            <a:r>
-              <a:rPr lang="en-US" sz="1300" b="1" dirty="0">
-                <a:solidFill>
-                  <a:srgbClr val="4C1D95"/>
+            <a:pPr algn="l" indent="0" marL="0">
+              <a:buNone/>
+            </a:pPr>
+            <a:r>
+              <a:rPr lang="en-US" sz="1200" b="1" dirty="0">
+                <a:solidFill>
+                  <a:srgbClr val="0F172A"/>
                 </a:solidFill>
                 <a:latin typeface="Trebuchet MS" pitchFamily="34" charset="0"/>
                 <a:ea typeface="Trebuchet MS" pitchFamily="34" charset="-122"/>
                 <a:cs typeface="Trebuchet MS" pitchFamily="34" charset="-120"/>
               </a:rPr>
-              <a:t>post-</a:t>
-            </a:r>
-            <a:endParaRPr lang="en-US" sz="1300" dirty="0"/>
-          </a:p>
-        </p:txBody>
-      </p:sp>
-      <p:sp>
-        <p:nvSpPr>
-          <p:cNvPr id="30" name="Shape 28"/>
-          <p:cNvSpPr/>
-          <p:nvPr/>
-        </p:nvSpPr>
-        <p:spPr>
-          <a:xfrm>
-            <a:off x="2971800" y="2404872"/>
-            <a:ext cx="2834640" cy="402336"/>
-          </a:xfrm>
-          <a:prstGeom prst="rect">
-            <a:avLst/>
-          </a:prstGeom>
-          <a:solidFill>
-            <a:srgbClr val="F8FAFC"/>
-          </a:solidFill>
-          <a:ln w="12700">
-            <a:solidFill>
-              <a:srgbClr val="E2E8F0"/>
-            </a:solidFill>
-            <a:prstDash val="solid"/>
-          </a:ln>
-        </p:spPr>
-      </p:sp>
-      <p:sp>
-        <p:nvSpPr>
-          <p:cNvPr id="31" name="Shape 29"/>
-          <p:cNvSpPr/>
-          <p:nvPr/>
-        </p:nvSpPr>
-        <p:spPr>
-          <a:xfrm>
-            <a:off x="5943600" y="2404872"/>
-            <a:ext cx="2834640" cy="402336"/>
-          </a:xfrm>
-          <a:prstGeom prst="rect">
-            <a:avLst/>
-          </a:prstGeom>
-          <a:solidFill>
-            <a:srgbClr val="FCE7F3"/>
-          </a:solidFill>
-          <a:ln w="12700">
-            <a:solidFill>
-              <a:srgbClr val="E2E8F0"/>
-            </a:solidFill>
-            <a:prstDash val="solid"/>
-          </a:ln>
-        </p:spPr>
-      </p:sp>
-      <p:sp>
-        <p:nvSpPr>
-          <p:cNvPr id="32" name="Text 30"/>
-          <p:cNvSpPr/>
-          <p:nvPr/>
-        </p:nvSpPr>
-        <p:spPr>
-          <a:xfrm>
-            <a:off x="5943600" y="2404872"/>
-            <a:ext cx="2834640" cy="402336"/>
+              <a:t>Sample words:</a:t>
+            </a:r>
+            <a:endParaRPr lang="en-US" sz="1200" dirty="0"/>
+          </a:p>
+        </p:txBody>
+      </p:sp>
+      <p:sp>
+        <p:nvSpPr>
+          <p:cNvPr id="32" name="Shape 30"/>
+          <p:cNvSpPr/>
+          <p:nvPr/>
+        </p:nvSpPr>
+        <p:spPr>
+          <a:xfrm>
+            <a:off x="365760" y="4023360"/>
+            <a:ext cx="2011680" cy="402336"/>
+          </a:xfrm>
+          <a:prstGeom prst="rect">
+            <a:avLst>
+              <a:gd name="adj" fmla="val 13636"/>
+            </a:avLst>
+          </a:prstGeom>
+          <a:solidFill>
+            <a:srgbClr val="EEF2FF"/>
+          </a:solidFill>
+          <a:ln w="12700">
+            <a:solidFill>
+              <a:srgbClr val="6366F1"/>
+            </a:solidFill>
+            <a:prstDash val="solid"/>
+          </a:ln>
+        </p:spPr>
+      </p:sp>
+      <p:sp>
+        <p:nvSpPr>
+          <p:cNvPr id="33" name="Text 31"/>
+          <p:cNvSpPr/>
+          <p:nvPr/>
+        </p:nvSpPr>
+        <p:spPr>
+          <a:xfrm>
+            <a:off x="365760" y="4023360"/>
+            <a:ext cx="2011680" cy="402336"/>
           </a:xfrm>
           <a:prstGeom prst="rect">
             <a:avLst/>
@@ -33399,55 +34989,57 @@
               <a:buNone/>
             </a:pPr>
             <a:r>
-              <a:rPr lang="en-US" sz="1300" b="1" dirty="0">
-                <a:solidFill>
-                  <a:srgbClr val="9D174D"/>
+              <a:rPr lang="en-US" sz="1200" b="1" dirty="0">
+                <a:solidFill>
+                  <a:srgbClr val="4338CA"/>
                 </a:solidFill>
                 <a:latin typeface="Trebuchet MS" pitchFamily="34" charset="0"/>
                 <a:ea typeface="Trebuchet MS" pitchFamily="34" charset="-122"/>
                 <a:cs typeface="Trebuchet MS" pitchFamily="34" charset="-120"/>
               </a:rPr>
-              <a:t>-like</a:t>
-            </a:r>
-            <a:endParaRPr lang="en-US" sz="1300" dirty="0"/>
-          </a:p>
-        </p:txBody>
-      </p:sp>
-      <p:sp>
-        <p:nvSpPr>
-          <p:cNvPr id="33" name="Shape 31"/>
-          <p:cNvSpPr/>
-          <p:nvPr/>
-        </p:nvSpPr>
-        <p:spPr>
-          <a:xfrm>
-            <a:off x="365760" y="2825496"/>
-            <a:ext cx="2468880" cy="402336"/>
-          </a:xfrm>
-          <a:prstGeom prst="rect">
-            <a:avLst/>
-          </a:prstGeom>
-          <a:solidFill>
-            <a:srgbClr val="DDD6FE"/>
-          </a:solidFill>
-          <a:ln w="12700">
-            <a:solidFill>
-              <a:srgbClr val="E2E8F0"/>
-            </a:solidFill>
-            <a:prstDash val="solid"/>
-          </a:ln>
-        </p:spPr>
-      </p:sp>
-      <p:sp>
-        <p:nvSpPr>
-          <p:cNvPr id="34" name="Text 32"/>
-          <p:cNvSpPr/>
-          <p:nvPr/>
-        </p:nvSpPr>
-        <p:spPr>
-          <a:xfrm>
-            <a:off x="365760" y="2825496"/>
-            <a:ext cx="2468880" cy="402336"/>
+              <a:t>war</a:t>
+            </a:r>
+            <a:endParaRPr lang="en-US" sz="1200" dirty="0"/>
+          </a:p>
+        </p:txBody>
+      </p:sp>
+      <p:sp>
+        <p:nvSpPr>
+          <p:cNvPr id="34" name="Shape 32"/>
+          <p:cNvSpPr/>
+          <p:nvPr/>
+        </p:nvSpPr>
+        <p:spPr>
+          <a:xfrm>
+            <a:off x="2542032" y="4023360"/>
+            <a:ext cx="2011680" cy="402336"/>
+          </a:xfrm>
+          <a:prstGeom prst="rect">
+            <a:avLst>
+              <a:gd name="adj" fmla="val 13636"/>
+            </a:avLst>
+          </a:prstGeom>
+          <a:solidFill>
+            <a:srgbClr val="EEF2FF"/>
+          </a:solidFill>
+          <a:ln w="12700">
+            <a:solidFill>
+              <a:srgbClr val="6366F1"/>
+            </a:solidFill>
+            <a:prstDash val="solid"/>
+          </a:ln>
+        </p:spPr>
+      </p:sp>
+      <p:sp>
+        <p:nvSpPr>
+          <p:cNvPr id="35" name="Text 33"/>
+          <p:cNvSpPr/>
+          <p:nvPr/>
+        </p:nvSpPr>
+        <p:spPr>
+          <a:xfrm>
+            <a:off x="2542032" y="4023360"/>
+            <a:ext cx="2011680" cy="402336"/>
           </a:xfrm>
           <a:prstGeom prst="rect">
             <a:avLst/>
@@ -33463,44 +35055,19 @@
               <a:buNone/>
             </a:pPr>
             <a:r>
-              <a:rPr lang="en-US" sz="1300" b="1" dirty="0">
-                <a:solidFill>
-                  <a:srgbClr val="4C1D95"/>
+              <a:rPr lang="en-US" sz="1200" b="1" dirty="0">
+                <a:solidFill>
+                  <a:srgbClr val="4338CA"/>
                 </a:solidFill>
                 <a:latin typeface="Trebuchet MS" pitchFamily="34" charset="0"/>
                 <a:ea typeface="Trebuchet MS" pitchFamily="34" charset="-122"/>
                 <a:cs typeface="Trebuchet MS" pitchFamily="34" charset="-120"/>
               </a:rPr>
-              <a:t>un-</a:t>
-            </a:r>
-            <a:endParaRPr lang="en-US" sz="1300" dirty="0"/>
-          </a:p>
-        </p:txBody>
-      </p:sp>
-      <p:sp>
-        <p:nvSpPr>
-          <p:cNvPr id="35" name="Shape 33"/>
-          <p:cNvSpPr/>
-          <p:nvPr/>
-        </p:nvSpPr>
-        <p:spPr>
-          <a:xfrm>
-            <a:off x="2971800" y="2825496"/>
-            <a:ext cx="2834640" cy="402336"/>
-          </a:xfrm>
-          <a:prstGeom prst="rect">
-            <a:avLst/>
-          </a:prstGeom>
-          <a:solidFill>
-            <a:srgbClr val="F1F5F9"/>
-          </a:solidFill>
-          <a:ln w="12700">
-            <a:solidFill>
-              <a:srgbClr val="E2E8F0"/>
-            </a:solidFill>
-            <a:prstDash val="solid"/>
-          </a:ln>
-        </p:spPr>
+              <a:t>wars</a:t>
+            </a:r>
+            <a:endParaRPr lang="en-US" sz="1200" dirty="0"/>
+          </a:p>
+        </p:txBody>
       </p:sp>
       <p:sp>
         <p:nvSpPr>
@@ -33510,18 +35077,20 @@
         </p:nvSpPr>
         <p:spPr>
           <a:xfrm>
-            <a:off x="5943600" y="2825496"/>
-            <a:ext cx="2834640" cy="402336"/>
-          </a:xfrm>
-          <a:prstGeom prst="rect">
-            <a:avLst/>
-          </a:prstGeom>
-          <a:solidFill>
-            <a:srgbClr val="FCE7F3"/>
-          </a:solidFill>
-          <a:ln w="12700">
-            <a:solidFill>
-              <a:srgbClr val="E2E8F0"/>
+            <a:off x="4718304" y="4023360"/>
+            <a:ext cx="2011680" cy="402336"/>
+          </a:xfrm>
+          <a:prstGeom prst="rect">
+            <a:avLst>
+              <a:gd name="adj" fmla="val 13636"/>
+            </a:avLst>
+          </a:prstGeom>
+          <a:solidFill>
+            <a:srgbClr val="EEF2FF"/>
+          </a:solidFill>
+          <a:ln w="12700">
+            <a:solidFill>
+              <a:srgbClr val="6366F1"/>
             </a:solidFill>
             <a:prstDash val="solid"/>
           </a:ln>
@@ -33535,8 +35104,8 @@
         </p:nvSpPr>
         <p:spPr>
           <a:xfrm>
-            <a:off x="5943600" y="2825496"/>
-            <a:ext cx="2834640" cy="402336"/>
+            <a:off x="4718304" y="4023360"/>
+            <a:ext cx="2011680" cy="402336"/>
           </a:xfrm>
           <a:prstGeom prst="rect">
             <a:avLst/>
@@ -33552,735 +35121,15 @@
               <a:buNone/>
             </a:pPr>
             <a:r>
-              <a:rPr lang="en-US" sz="1300" b="1" dirty="0">
-                <a:solidFill>
-                  <a:srgbClr val="9D174D"/>
+              <a:rPr lang="en-US" sz="1200" b="1" dirty="0">
+                <a:solidFill>
+                  <a:srgbClr val="4338CA"/>
                 </a:solidFill>
                 <a:latin typeface="Trebuchet MS" pitchFamily="34" charset="0"/>
                 <a:ea typeface="Trebuchet MS" pitchFamily="34" charset="-122"/>
                 <a:cs typeface="Trebuchet MS" pitchFamily="34" charset="-120"/>
               </a:rPr>
-              <a:t>-ring</a:t>
-            </a:r>
-            <a:endParaRPr lang="en-US" sz="1300" dirty="0"/>
-          </a:p>
-        </p:txBody>
-      </p:sp>
-      <p:sp>
-        <p:nvSpPr>
-          <p:cNvPr id="38" name="Shape 36"/>
-          <p:cNvSpPr/>
-          <p:nvPr/>
-        </p:nvSpPr>
-        <p:spPr>
-          <a:xfrm>
-            <a:off x="365760" y="3246120"/>
-            <a:ext cx="2468880" cy="402336"/>
-          </a:xfrm>
-          <a:prstGeom prst="rect">
-            <a:avLst/>
-          </a:prstGeom>
-          <a:solidFill>
-            <a:srgbClr val="DDD6FE"/>
-          </a:solidFill>
-          <a:ln w="12700">
-            <a:solidFill>
-              <a:srgbClr val="E2E8F0"/>
-            </a:solidFill>
-            <a:prstDash val="solid"/>
-          </a:ln>
-        </p:spPr>
-      </p:sp>
-      <p:sp>
-        <p:nvSpPr>
-          <p:cNvPr id="39" name="Text 37"/>
-          <p:cNvSpPr/>
-          <p:nvPr/>
-        </p:nvSpPr>
-        <p:spPr>
-          <a:xfrm>
-            <a:off x="365760" y="3246120"/>
-            <a:ext cx="2468880" cy="402336"/>
-          </a:xfrm>
-          <a:prstGeom prst="rect">
-            <a:avLst/>
-          </a:prstGeom>
-          <a:noFill/>
-          <a:ln/>
-        </p:spPr>
-        <p:txBody>
-          <a:bodyPr wrap="square" lIns="0" tIns="0" rIns="0" bIns="0" rtlCol="0" anchor="ctr"/>
-          <a:lstStyle/>
-          <a:p>
-            <a:pPr algn="ctr" indent="0" marL="0">
-              <a:buNone/>
-            </a:pPr>
-            <a:r>
-              <a:rPr lang="en-US" sz="1300" b="1" dirty="0">
-                <a:solidFill>
-                  <a:srgbClr val="4C1D95"/>
-                </a:solidFill>
-                <a:latin typeface="Trebuchet MS" pitchFamily="34" charset="0"/>
-                <a:ea typeface="Trebuchet MS" pitchFamily="34" charset="-122"/>
-                <a:cs typeface="Trebuchet MS" pitchFamily="34" charset="-120"/>
-              </a:rPr>
-              <a:t>civil-</a:t>
-            </a:r>
-            <a:endParaRPr lang="en-US" sz="1300" dirty="0"/>
-          </a:p>
-        </p:txBody>
-      </p:sp>
-      <p:sp>
-        <p:nvSpPr>
-          <p:cNvPr id="40" name="Shape 38"/>
-          <p:cNvSpPr/>
-          <p:nvPr/>
-        </p:nvSpPr>
-        <p:spPr>
-          <a:xfrm>
-            <a:off x="2971800" y="3246120"/>
-            <a:ext cx="2834640" cy="402336"/>
-          </a:xfrm>
-          <a:prstGeom prst="rect">
-            <a:avLst/>
-          </a:prstGeom>
-          <a:solidFill>
-            <a:srgbClr val="F8FAFC"/>
-          </a:solidFill>
-          <a:ln w="12700">
-            <a:solidFill>
-              <a:srgbClr val="E2E8F0"/>
-            </a:solidFill>
-            <a:prstDash val="solid"/>
-          </a:ln>
-        </p:spPr>
-      </p:sp>
-      <p:sp>
-        <p:nvSpPr>
-          <p:cNvPr id="41" name="Shape 39"/>
-          <p:cNvSpPr/>
-          <p:nvPr/>
-        </p:nvSpPr>
-        <p:spPr>
-          <a:xfrm>
-            <a:off x="5943600" y="3246120"/>
-            <a:ext cx="2834640" cy="402336"/>
-          </a:xfrm>
-          <a:prstGeom prst="rect">
-            <a:avLst/>
-          </a:prstGeom>
-          <a:solidFill>
-            <a:srgbClr val="FCE7F3"/>
-          </a:solidFill>
-          <a:ln w="12700">
-            <a:solidFill>
-              <a:srgbClr val="E2E8F0"/>
-            </a:solidFill>
-            <a:prstDash val="solid"/>
-          </a:ln>
-        </p:spPr>
-      </p:sp>
-      <p:sp>
-        <p:nvSpPr>
-          <p:cNvPr id="42" name="Text 40"/>
-          <p:cNvSpPr/>
-          <p:nvPr/>
-        </p:nvSpPr>
-        <p:spPr>
-          <a:xfrm>
-            <a:off x="5943600" y="3246120"/>
-            <a:ext cx="2834640" cy="402336"/>
-          </a:xfrm>
-          <a:prstGeom prst="rect">
-            <a:avLst/>
-          </a:prstGeom>
-          <a:noFill/>
-          <a:ln/>
-        </p:spPr>
-        <p:txBody>
-          <a:bodyPr wrap="square" lIns="0" tIns="0" rIns="0" bIns="0" rtlCol="0" anchor="ctr"/>
-          <a:lstStyle/>
-          <a:p>
-            <a:pPr algn="ctr" indent="0" marL="0">
-              <a:buNone/>
-            </a:pPr>
-            <a:r>
-              <a:rPr lang="en-US" sz="1300" b="1" dirty="0">
-                <a:solidFill>
-                  <a:srgbClr val="9D174D"/>
-                </a:solidFill>
-                <a:latin typeface="Trebuchet MS" pitchFamily="34" charset="0"/>
-                <a:ea typeface="Trebuchet MS" pitchFamily="34" charset="-122"/>
-                <a:cs typeface="Trebuchet MS" pitchFamily="34" charset="-120"/>
-              </a:rPr>
-              <a:t>-den</a:t>
-            </a:r>
-            <a:endParaRPr lang="en-US" sz="1300" dirty="0"/>
-          </a:p>
-        </p:txBody>
-      </p:sp>
-      <p:sp>
-        <p:nvSpPr>
-          <p:cNvPr id="43" name="Text 41"/>
-          <p:cNvSpPr/>
-          <p:nvPr/>
-        </p:nvSpPr>
-        <p:spPr>
-          <a:xfrm>
-            <a:off x="365760" y="3611880"/>
-            <a:ext cx="1828800" cy="347472"/>
-          </a:xfrm>
-          <a:prstGeom prst="rect">
-            <a:avLst/>
-          </a:prstGeom>
-          <a:noFill/>
-          <a:ln/>
-        </p:spPr>
-        <p:txBody>
-          <a:bodyPr wrap="square" lIns="0" tIns="0" rIns="0" bIns="0" rtlCol="0" anchor="ctr"/>
-          <a:lstStyle/>
-          <a:p>
-            <a:pPr algn="l" indent="0" marL="0">
-              <a:buNone/>
-            </a:pPr>
-            <a:r>
-              <a:rPr lang="en-US" sz="1200" b="1" dirty="0">
-                <a:solidFill>
-                  <a:srgbClr val="0F172A"/>
-                </a:solidFill>
-                <a:latin typeface="Trebuchet MS" pitchFamily="34" charset="0"/>
-                <a:ea typeface="Trebuchet MS" pitchFamily="34" charset="-122"/>
-                <a:cs typeface="Trebuchet MS" pitchFamily="34" charset="-120"/>
-              </a:rPr>
-              <a:t>Sample words:</a:t>
-            </a:r>
-            <a:endParaRPr lang="en-US" sz="1200" dirty="0"/>
-          </a:p>
-        </p:txBody>
-      </p:sp>
-      <p:sp>
-        <p:nvSpPr>
-          <p:cNvPr id="44" name="Shape 42"/>
-          <p:cNvSpPr/>
-          <p:nvPr/>
-        </p:nvSpPr>
-        <p:spPr>
-          <a:xfrm>
-            <a:off x="365760" y="4023360"/>
-            <a:ext cx="2011680" cy="402336"/>
-          </a:xfrm>
-          <a:prstGeom prst="rect">
-            <a:avLst>
-              <a:gd name="adj" fmla="val 13636"/>
-            </a:avLst>
-          </a:prstGeom>
-          <a:solidFill>
-            <a:srgbClr val="EEF2FF"/>
-          </a:solidFill>
-          <a:ln w="12700">
-            <a:solidFill>
-              <a:srgbClr val="6366F1"/>
-            </a:solidFill>
-            <a:prstDash val="solid"/>
-          </a:ln>
-        </p:spPr>
-      </p:sp>
-      <p:sp>
-        <p:nvSpPr>
-          <p:cNvPr id="45" name="Text 43"/>
-          <p:cNvSpPr/>
-          <p:nvPr/>
-        </p:nvSpPr>
-        <p:spPr>
-          <a:xfrm>
-            <a:off x="365760" y="4023360"/>
-            <a:ext cx="2011680" cy="402336"/>
-          </a:xfrm>
-          <a:prstGeom prst="rect">
-            <a:avLst/>
-          </a:prstGeom>
-          <a:noFill/>
-          <a:ln/>
-        </p:spPr>
-        <p:txBody>
-          <a:bodyPr wrap="square" lIns="0" tIns="0" rIns="0" bIns="0" rtlCol="0" anchor="ctr"/>
-          <a:lstStyle/>
-          <a:p>
-            <a:pPr algn="ctr" indent="0" marL="0">
-              <a:buNone/>
-            </a:pPr>
-            <a:r>
-              <a:rPr lang="en-US" sz="1200" b="1" dirty="0">
-                <a:solidFill>
-                  <a:srgbClr val="4338CA"/>
-                </a:solidFill>
-                <a:latin typeface="Trebuchet MS" pitchFamily="34" charset="0"/>
-                <a:ea typeface="Trebuchet MS" pitchFamily="34" charset="-122"/>
-                <a:cs typeface="Trebuchet MS" pitchFamily="34" charset="-120"/>
-              </a:rPr>
-              <a:t>warfare</a:t>
-            </a:r>
-            <a:endParaRPr lang="en-US" sz="1200" dirty="0"/>
-          </a:p>
-        </p:txBody>
-      </p:sp>
-      <p:sp>
-        <p:nvSpPr>
-          <p:cNvPr id="46" name="Shape 44"/>
-          <p:cNvSpPr/>
-          <p:nvPr/>
-        </p:nvSpPr>
-        <p:spPr>
-          <a:xfrm>
-            <a:off x="2542032" y="4023360"/>
-            <a:ext cx="2011680" cy="402336"/>
-          </a:xfrm>
-          <a:prstGeom prst="rect">
-            <a:avLst>
-              <a:gd name="adj" fmla="val 13636"/>
-            </a:avLst>
-          </a:prstGeom>
-          <a:solidFill>
-            <a:srgbClr val="EEF2FF"/>
-          </a:solidFill>
-          <a:ln w="12700">
-            <a:solidFill>
-              <a:srgbClr val="6366F1"/>
-            </a:solidFill>
-            <a:prstDash val="solid"/>
-          </a:ln>
-        </p:spPr>
-      </p:sp>
-      <p:sp>
-        <p:nvSpPr>
-          <p:cNvPr id="47" name="Text 45"/>
-          <p:cNvSpPr/>
-          <p:nvPr/>
-        </p:nvSpPr>
-        <p:spPr>
-          <a:xfrm>
-            <a:off x="2542032" y="4023360"/>
-            <a:ext cx="2011680" cy="402336"/>
-          </a:xfrm>
-          <a:prstGeom prst="rect">
-            <a:avLst/>
-          </a:prstGeom>
-          <a:noFill/>
-          <a:ln/>
-        </p:spPr>
-        <p:txBody>
-          <a:bodyPr wrap="square" lIns="0" tIns="0" rIns="0" bIns="0" rtlCol="0" anchor="ctr"/>
-          <a:lstStyle/>
-          <a:p>
-            <a:pPr algn="ctr" indent="0" marL="0">
-              <a:buNone/>
-            </a:pPr>
-            <a:r>
-              <a:rPr lang="en-US" sz="1200" b="1" dirty="0">
-                <a:solidFill>
-                  <a:srgbClr val="4338CA"/>
-                </a:solidFill>
-                <a:latin typeface="Trebuchet MS" pitchFamily="34" charset="0"/>
-                <a:ea typeface="Trebuchet MS" pitchFamily="34" charset="-122"/>
-                <a:cs typeface="Trebuchet MS" pitchFamily="34" charset="-120"/>
-              </a:rPr>
-              <a:t>warrior</a:t>
-            </a:r>
-            <a:endParaRPr lang="en-US" sz="1200" dirty="0"/>
-          </a:p>
-        </p:txBody>
-      </p:sp>
-      <p:sp>
-        <p:nvSpPr>
-          <p:cNvPr id="48" name="Shape 46"/>
-          <p:cNvSpPr/>
-          <p:nvPr/>
-        </p:nvSpPr>
-        <p:spPr>
-          <a:xfrm>
-            <a:off x="4718304" y="4023360"/>
-            <a:ext cx="2011680" cy="402336"/>
-          </a:xfrm>
-          <a:prstGeom prst="rect">
-            <a:avLst>
-              <a:gd name="adj" fmla="val 13636"/>
-            </a:avLst>
-          </a:prstGeom>
-          <a:solidFill>
-            <a:srgbClr val="EEF2FF"/>
-          </a:solidFill>
-          <a:ln w="12700">
-            <a:solidFill>
-              <a:srgbClr val="6366F1"/>
-            </a:solidFill>
-            <a:prstDash val="solid"/>
-          </a:ln>
-        </p:spPr>
-      </p:sp>
-      <p:sp>
-        <p:nvSpPr>
-          <p:cNvPr id="49" name="Text 47"/>
-          <p:cNvSpPr/>
-          <p:nvPr/>
-        </p:nvSpPr>
-        <p:spPr>
-          <a:xfrm>
-            <a:off x="4718304" y="4023360"/>
-            <a:ext cx="2011680" cy="402336"/>
-          </a:xfrm>
-          <a:prstGeom prst="rect">
-            <a:avLst/>
-          </a:prstGeom>
-          <a:noFill/>
-          <a:ln/>
-        </p:spPr>
-        <p:txBody>
-          <a:bodyPr wrap="square" lIns="0" tIns="0" rIns="0" bIns="0" rtlCol="0" anchor="ctr"/>
-          <a:lstStyle/>
-          <a:p>
-            <a:pPr algn="ctr" indent="0" marL="0">
-              <a:buNone/>
-            </a:pPr>
-            <a:r>
-              <a:rPr lang="en-US" sz="1200" b="1" dirty="0">
-                <a:solidFill>
-                  <a:srgbClr val="4338CA"/>
-                </a:solidFill>
-                <a:latin typeface="Trebuchet MS" pitchFamily="34" charset="0"/>
-                <a:ea typeface="Trebuchet MS" pitchFamily="34" charset="-122"/>
-                <a:cs typeface="Trebuchet MS" pitchFamily="34" charset="-120"/>
-              </a:rPr>
-              <a:t>warship</a:t>
-            </a:r>
-            <a:endParaRPr lang="en-US" sz="1200" dirty="0"/>
-          </a:p>
-        </p:txBody>
-      </p:sp>
-      <p:sp>
-        <p:nvSpPr>
-          <p:cNvPr id="50" name="Shape 48"/>
-          <p:cNvSpPr/>
-          <p:nvPr/>
-        </p:nvSpPr>
-        <p:spPr>
-          <a:xfrm>
-            <a:off x="6894576" y="4023360"/>
-            <a:ext cx="2011680" cy="402336"/>
-          </a:xfrm>
-          <a:prstGeom prst="rect">
-            <a:avLst>
-              <a:gd name="adj" fmla="val 13636"/>
-            </a:avLst>
-          </a:prstGeom>
-          <a:solidFill>
-            <a:srgbClr val="EEF2FF"/>
-          </a:solidFill>
-          <a:ln w="12700">
-            <a:solidFill>
-              <a:srgbClr val="6366F1"/>
-            </a:solidFill>
-            <a:prstDash val="solid"/>
-          </a:ln>
-        </p:spPr>
-      </p:sp>
-      <p:sp>
-        <p:nvSpPr>
-          <p:cNvPr id="51" name="Text 49"/>
-          <p:cNvSpPr/>
-          <p:nvPr/>
-        </p:nvSpPr>
-        <p:spPr>
-          <a:xfrm>
-            <a:off x="6894576" y="4023360"/>
-            <a:ext cx="2011680" cy="402336"/>
-          </a:xfrm>
-          <a:prstGeom prst="rect">
-            <a:avLst/>
-          </a:prstGeom>
-          <a:noFill/>
-          <a:ln/>
-        </p:spPr>
-        <p:txBody>
-          <a:bodyPr wrap="square" lIns="0" tIns="0" rIns="0" bIns="0" rtlCol="0" anchor="ctr"/>
-          <a:lstStyle/>
-          <a:p>
-            <a:pPr algn="ctr" indent="0" marL="0">
-              <a:buNone/>
-            </a:pPr>
-            <a:r>
-              <a:rPr lang="en-US" sz="1200" b="1" dirty="0">
-                <a:solidFill>
-                  <a:srgbClr val="4338CA"/>
-                </a:solidFill>
-                <a:latin typeface="Trebuchet MS" pitchFamily="34" charset="0"/>
-                <a:ea typeface="Trebuchet MS" pitchFamily="34" charset="-122"/>
-                <a:cs typeface="Trebuchet MS" pitchFamily="34" charset="-120"/>
-              </a:rPr>
-              <a:t>warlike</a:t>
-            </a:r>
-            <a:endParaRPr lang="en-US" sz="1200" dirty="0"/>
-          </a:p>
-        </p:txBody>
-      </p:sp>
-      <p:sp>
-        <p:nvSpPr>
-          <p:cNvPr id="52" name="Shape 50"/>
-          <p:cNvSpPr/>
-          <p:nvPr/>
-        </p:nvSpPr>
-        <p:spPr>
-          <a:xfrm>
-            <a:off x="365760" y="4498848"/>
-            <a:ext cx="2011680" cy="402336"/>
-          </a:xfrm>
-          <a:prstGeom prst="rect">
-            <a:avLst>
-              <a:gd name="adj" fmla="val 13636"/>
-            </a:avLst>
-          </a:prstGeom>
-          <a:solidFill>
-            <a:srgbClr val="EEF2FF"/>
-          </a:solidFill>
-          <a:ln w="12700">
-            <a:solidFill>
-              <a:srgbClr val="6366F1"/>
-            </a:solidFill>
-            <a:prstDash val="solid"/>
-          </a:ln>
-        </p:spPr>
-      </p:sp>
-      <p:sp>
-        <p:nvSpPr>
-          <p:cNvPr id="53" name="Text 51"/>
-          <p:cNvSpPr/>
-          <p:nvPr/>
-        </p:nvSpPr>
-        <p:spPr>
-          <a:xfrm>
-            <a:off x="365760" y="4498848"/>
-            <a:ext cx="2011680" cy="402336"/>
-          </a:xfrm>
-          <a:prstGeom prst="rect">
-            <a:avLst/>
-          </a:prstGeom>
-          <a:noFill/>
-          <a:ln/>
-        </p:spPr>
-        <p:txBody>
-          <a:bodyPr wrap="square" lIns="0" tIns="0" rIns="0" bIns="0" rtlCol="0" anchor="ctr"/>
-          <a:lstStyle/>
-          <a:p>
-            <a:pPr algn="ctr" indent="0" marL="0">
-              <a:buNone/>
-            </a:pPr>
-            <a:r>
-              <a:rPr lang="en-US" sz="1200" b="1" dirty="0">
-                <a:solidFill>
-                  <a:srgbClr val="4338CA"/>
-                </a:solidFill>
-                <a:latin typeface="Trebuchet MS" pitchFamily="34" charset="0"/>
-                <a:ea typeface="Trebuchet MS" pitchFamily="34" charset="-122"/>
-                <a:cs typeface="Trebuchet MS" pitchFamily="34" charset="-120"/>
-              </a:rPr>
-              <a:t>warden</a:t>
-            </a:r>
-            <a:endParaRPr lang="en-US" sz="1200" dirty="0"/>
-          </a:p>
-        </p:txBody>
-      </p:sp>
-      <p:sp>
-        <p:nvSpPr>
-          <p:cNvPr id="54" name="Shape 52"/>
-          <p:cNvSpPr/>
-          <p:nvPr/>
-        </p:nvSpPr>
-        <p:spPr>
-          <a:xfrm>
-            <a:off x="2542032" y="4498848"/>
-            <a:ext cx="2011680" cy="402336"/>
-          </a:xfrm>
-          <a:prstGeom prst="rect">
-            <a:avLst>
-              <a:gd name="adj" fmla="val 13636"/>
-            </a:avLst>
-          </a:prstGeom>
-          <a:solidFill>
-            <a:srgbClr val="EEF2FF"/>
-          </a:solidFill>
-          <a:ln w="12700">
-            <a:solidFill>
-              <a:srgbClr val="6366F1"/>
-            </a:solidFill>
-            <a:prstDash val="solid"/>
-          </a:ln>
-        </p:spPr>
-      </p:sp>
-      <p:sp>
-        <p:nvSpPr>
-          <p:cNvPr id="55" name="Text 53"/>
-          <p:cNvSpPr/>
-          <p:nvPr/>
-        </p:nvSpPr>
-        <p:spPr>
-          <a:xfrm>
-            <a:off x="2542032" y="4498848"/>
-            <a:ext cx="2011680" cy="402336"/>
-          </a:xfrm>
-          <a:prstGeom prst="rect">
-            <a:avLst/>
-          </a:prstGeom>
-          <a:noFill/>
-          <a:ln/>
-        </p:spPr>
-        <p:txBody>
-          <a:bodyPr wrap="square" lIns="0" tIns="0" rIns="0" bIns="0" rtlCol="0" anchor="ctr"/>
-          <a:lstStyle/>
-          <a:p>
-            <a:pPr algn="ctr" indent="0" marL="0">
-              <a:buNone/>
-            </a:pPr>
-            <a:r>
-              <a:rPr lang="en-US" sz="1200" b="1" dirty="0">
-                <a:solidFill>
-                  <a:srgbClr val="4338CA"/>
-                </a:solidFill>
-                <a:latin typeface="Trebuchet MS" pitchFamily="34" charset="0"/>
-                <a:ea typeface="Trebuchet MS" pitchFamily="34" charset="-122"/>
-                <a:cs typeface="Trebuchet MS" pitchFamily="34" charset="-120"/>
-              </a:rPr>
-              <a:t>warring</a:t>
-            </a:r>
-            <a:endParaRPr lang="en-US" sz="1200" dirty="0"/>
-          </a:p>
-        </p:txBody>
-      </p:sp>
-      <p:sp>
-        <p:nvSpPr>
-          <p:cNvPr id="56" name="Shape 54"/>
-          <p:cNvSpPr/>
-          <p:nvPr/>
-        </p:nvSpPr>
-        <p:spPr>
-          <a:xfrm>
-            <a:off x="4718304" y="4498848"/>
-            <a:ext cx="2011680" cy="402336"/>
-          </a:xfrm>
-          <a:prstGeom prst="rect">
-            <a:avLst>
-              <a:gd name="adj" fmla="val 13636"/>
-            </a:avLst>
-          </a:prstGeom>
-          <a:solidFill>
-            <a:srgbClr val="EEF2FF"/>
-          </a:solidFill>
-          <a:ln w="12700">
-            <a:solidFill>
-              <a:srgbClr val="6366F1"/>
-            </a:solidFill>
-            <a:prstDash val="solid"/>
-          </a:ln>
-        </p:spPr>
-      </p:sp>
-      <p:sp>
-        <p:nvSpPr>
-          <p:cNvPr id="57" name="Text 55"/>
-          <p:cNvSpPr/>
-          <p:nvPr/>
-        </p:nvSpPr>
-        <p:spPr>
-          <a:xfrm>
-            <a:off x="4718304" y="4498848"/>
-            <a:ext cx="2011680" cy="402336"/>
-          </a:xfrm>
-          <a:prstGeom prst="rect">
-            <a:avLst/>
-          </a:prstGeom>
-          <a:noFill/>
-          <a:ln/>
-        </p:spPr>
-        <p:txBody>
-          <a:bodyPr wrap="square" lIns="0" tIns="0" rIns="0" bIns="0" rtlCol="0" anchor="ctr"/>
-          <a:lstStyle/>
-          <a:p>
-            <a:pPr algn="ctr" indent="0" marL="0">
-              <a:buNone/>
-            </a:pPr>
-            <a:r>
-              <a:rPr lang="en-US" sz="1200" b="1" dirty="0">
-                <a:solidFill>
-                  <a:srgbClr val="4338CA"/>
-                </a:solidFill>
-                <a:latin typeface="Trebuchet MS" pitchFamily="34" charset="0"/>
-                <a:ea typeface="Trebuchet MS" pitchFamily="34" charset="-122"/>
-                <a:cs typeface="Trebuchet MS" pitchFamily="34" charset="-120"/>
-              </a:rPr>
-              <a:t>prewar</a:t>
-            </a:r>
-            <a:endParaRPr lang="en-US" sz="1200" dirty="0"/>
-          </a:p>
-        </p:txBody>
-      </p:sp>
-      <p:sp>
-        <p:nvSpPr>
-          <p:cNvPr id="58" name="Shape 56"/>
-          <p:cNvSpPr/>
-          <p:nvPr/>
-        </p:nvSpPr>
-        <p:spPr>
-          <a:xfrm>
-            <a:off x="6894576" y="4498848"/>
-            <a:ext cx="2011680" cy="402336"/>
-          </a:xfrm>
-          <a:prstGeom prst="rect">
-            <a:avLst>
-              <a:gd name="adj" fmla="val 13636"/>
-            </a:avLst>
-          </a:prstGeom>
-          <a:solidFill>
-            <a:srgbClr val="EEF2FF"/>
-          </a:solidFill>
-          <a:ln w="12700">
-            <a:solidFill>
-              <a:srgbClr val="6366F1"/>
-            </a:solidFill>
-            <a:prstDash val="solid"/>
-          </a:ln>
-        </p:spPr>
-      </p:sp>
-      <p:sp>
-        <p:nvSpPr>
-          <p:cNvPr id="59" name="Text 57"/>
-          <p:cNvSpPr/>
-          <p:nvPr/>
-        </p:nvSpPr>
-        <p:spPr>
-          <a:xfrm>
-            <a:off x="6894576" y="4498848"/>
-            <a:ext cx="2011680" cy="402336"/>
-          </a:xfrm>
-          <a:prstGeom prst="rect">
-            <a:avLst/>
-          </a:prstGeom>
-          <a:noFill/>
-          <a:ln/>
-        </p:spPr>
-        <p:txBody>
-          <a:bodyPr wrap="square" lIns="0" tIns="0" rIns="0" bIns="0" rtlCol="0" anchor="ctr"/>
-          <a:lstStyle/>
-          <a:p>
-            <a:pPr algn="ctr" indent="0" marL="0">
-              <a:buNone/>
-            </a:pPr>
-            <a:r>
-              <a:rPr lang="en-US" sz="1200" b="1" dirty="0">
-                <a:solidFill>
-                  <a:srgbClr val="4338CA"/>
-                </a:solidFill>
-                <a:latin typeface="Trebuchet MS" pitchFamily="34" charset="0"/>
-                <a:ea typeface="Trebuchet MS" pitchFamily="34" charset="-122"/>
-                <a:cs typeface="Trebuchet MS" pitchFamily="34" charset="-120"/>
-              </a:rPr>
-              <a:t>postwar</a:t>
+              <a:t>warren</a:t>
             </a:r>
             <a:endParaRPr lang="en-US" sz="1200" dirty="0"/>
           </a:p>
@@ -34572,7 +35421,7 @@
                 <a:ea typeface="Calibri" pitchFamily="34" charset="-122"/>
                 <a:cs typeface="Calibri" pitchFamily="34" charset="-120"/>
               </a:rPr>
-              <a:t>Word Labs  •  wordlabs.app  •  Root: 'war' = conflict, fighting, armed struggle</a:t>
+              <a:t>Word Labs  •  wordlabs.app  •  Root: 'war' = armed conflict between groups</a:t>
             </a:r>
             <a:endParaRPr lang="en-US" sz="800" dirty="0"/>
           </a:p>
@@ -34736,7 +35585,7 @@
                 <a:ea typeface="Calibri" pitchFamily="34" charset="-122"/>
                 <a:cs typeface="Calibri" pitchFamily="34" charset="-120"/>
               </a:rPr>
-              <a:t>The core part of a word carrying its basic meaning. For example, 'war' means 'conflict, fighting, armed struggle'.</a:t>
+              <a:t>The core part of a word carrying its basic meaning. For example, 'war' means 'armed conflict between groups'.</a:t>
             </a:r>
             <a:endParaRPr lang="en-US" sz="1350" dirty="0"/>
           </a:p>
@@ -35356,7 +36205,7 @@
                 <a:ea typeface="Calibri" pitchFamily="34" charset="-122"/>
                 <a:cs typeface="Calibri" pitchFamily="34" charset="-120"/>
               </a:rPr>
-              <a:t>Word Labs  •  wordlabs.app  •  Root: 'war' = conflict, fighting, armed struggle</a:t>
+              <a:t>Word Labs  •  wordlabs.app  •  Root: 'war' = armed conflict between groups</a:t>
             </a:r>
             <a:endParaRPr lang="en-US" sz="800" dirty="0"/>
           </a:p>
@@ -35468,7 +36317,7 @@
                 <a:ea typeface="Calibri" pitchFamily="34" charset="-122"/>
                 <a:cs typeface="Calibri" pitchFamily="34" charset="-120"/>
               </a:rPr>
-              <a:t>1.  Warfare refers to the activities and fighting that happen during a war.</a:t>
+              <a:t>1.  'war' means 'armed conflict between groups'.</a:t>
             </a:r>
             <a:endParaRPr lang="en-US" sz="1300" dirty="0"/>
           </a:p>
@@ -35607,7 +36456,7 @@
                 <a:ea typeface="Calibri" pitchFamily="34" charset="-122"/>
                 <a:cs typeface="Calibri" pitchFamily="34" charset="-120"/>
               </a:rPr>
-              <a:t>2.  A warship is a type of military vessel used in battles at sea.</a:t>
+              <a:t>2.  'wars' means 'armed fighting between countries or groups, plural of war'.</a:t>
             </a:r>
             <a:endParaRPr lang="en-US" sz="1300" dirty="0"/>
           </a:p>
@@ -35746,7 +36595,7 @@
                 <a:ea typeface="Calibri" pitchFamily="34" charset="-122"/>
                 <a:cs typeface="Calibri" pitchFamily="34" charset="-120"/>
               </a:rPr>
-              <a:t>3.  Postwar describes things that happened before a war.</a:t>
+              <a:t>3.  'war' means 'a state of armed conflict between groups or countries'.</a:t>
             </a:r>
             <a:endParaRPr lang="en-US" sz="1300" dirty="0"/>
           </a:p>
@@ -35769,11 +36618,11 @@
             </a:avLst>
           </a:prstGeom>
           <a:solidFill>
-            <a:srgbClr val="FEE2E2"/>
-          </a:solidFill>
-          <a:ln w="12700">
-            <a:solidFill>
-              <a:srgbClr val="DC2626"/>
+            <a:srgbClr val="DCFCE7"/>
+          </a:solidFill>
+          <a:ln w="12700">
+            <a:solidFill>
+              <a:srgbClr val="16A34A"/>
             </a:solidFill>
             <a:prstDash val="solid"/>
           </a:ln>
@@ -35806,13 +36655,13 @@
             <a:r>
               <a:rPr lang="en-US" sz="1100" b="1" dirty="0">
                 <a:solidFill>
-                  <a:srgbClr val="DC2626"/>
+                  <a:srgbClr val="16A34A"/>
                 </a:solidFill>
                 <a:latin typeface="Trebuchet MS" pitchFamily="34" charset="0"/>
                 <a:ea typeface="Trebuchet MS" pitchFamily="34" charset="-122"/>
                 <a:cs typeface="Trebuchet MS" pitchFamily="34" charset="-120"/>
               </a:rPr>
-              <a:t>FALSE</a:t>
+              <a:t>TRUE</a:t>
             </a:r>
             <a:endParaRPr lang="en-US" sz="1100" dirty="0"/>
           </a:p>
@@ -35885,7 +36734,7 @@
                 <a:ea typeface="Calibri" pitchFamily="34" charset="-122"/>
                 <a:cs typeface="Calibri" pitchFamily="34" charset="-120"/>
               </a:rPr>
-              <a:t>4.  The root 'war' comes from the ancient Greek language.</a:t>
+              <a:t>4.  'war' means 'a peaceful agreement between two countries'.</a:t>
             </a:r>
             <a:endParaRPr lang="en-US" sz="1300" dirty="0"/>
           </a:p>
@@ -36024,7 +36873,7 @@
                 <a:ea typeface="Calibri" pitchFamily="34" charset="-122"/>
                 <a:cs typeface="Calibri" pitchFamily="34" charset="-120"/>
               </a:rPr>
-              <a:t>5.  A warrior is a person who fights in battles.</a:t>
+              <a:t>5.  'wars' means 'friendly competitions between schools'.</a:t>
             </a:r>
             <a:endParaRPr lang="en-US" sz="1300" dirty="0"/>
           </a:p>
@@ -36047,11 +36896,11 @@
             </a:avLst>
           </a:prstGeom>
           <a:solidFill>
-            <a:srgbClr val="DCFCE7"/>
-          </a:solidFill>
-          <a:ln w="12700">
-            <a:solidFill>
-              <a:srgbClr val="16A34A"/>
+            <a:srgbClr val="FEE2E2"/>
+          </a:solidFill>
+          <a:ln w="12700">
+            <a:solidFill>
+              <a:srgbClr val="DC2626"/>
             </a:solidFill>
             <a:prstDash val="solid"/>
           </a:ln>
@@ -36084,13 +36933,13 @@
             <a:r>
               <a:rPr lang="en-US" sz="1100" b="1" dirty="0">
                 <a:solidFill>
-                  <a:srgbClr val="16A34A"/>
+                  <a:srgbClr val="DC2626"/>
                 </a:solidFill>
                 <a:latin typeface="Trebuchet MS" pitchFamily="34" charset="0"/>
                 <a:ea typeface="Trebuchet MS" pitchFamily="34" charset="-122"/>
                 <a:cs typeface="Trebuchet MS" pitchFamily="34" charset="-120"/>
               </a:rPr>
-              <a:t>TRUE</a:t>
+              <a:t>FALSE</a:t>
             </a:r>
             <a:endParaRPr lang="en-US" sz="1100" dirty="0"/>
           </a:p>
@@ -36382,7 +37231,7 @@
                 <a:ea typeface="Calibri" pitchFamily="34" charset="-122"/>
                 <a:cs typeface="Calibri" pitchFamily="34" charset="-120"/>
               </a:rPr>
-              <a:t>Word Labs  •  wordlabs.app  •  Root: 'war' = conflict, fighting, armed struggle</a:t>
+              <a:t>Word Labs  •  wordlabs.app  •  Root: 'war' = armed conflict between groups</a:t>
             </a:r>
             <a:endParaRPr lang="en-US" sz="800" dirty="0"/>
           </a:p>
@@ -36519,7 +37368,7 @@
                 <a:ea typeface="Trebuchet MS" pitchFamily="34" charset="-122"/>
                 <a:cs typeface="Trebuchet MS" pitchFamily="34" charset="-120"/>
               </a:rPr>
-              <a:t>conflict, fighting, armed struggle</a:t>
+              <a:t>armed conflict between groups</a:t>
             </a:r>
             <a:endParaRPr lang="en-US" sz="2000" dirty="0"/>
           </a:p>
@@ -36558,7 +37407,7 @@
                 <a:ea typeface="Calibri" pitchFamily="34" charset="-122"/>
                 <a:cs typeface="Calibri" pitchFamily="34" charset="-120"/>
               </a:rPr>
-              <a:t>Origin: Old English: werre</a:t>
+              <a:t>Origin: Core English root</a:t>
             </a:r>
             <a:endParaRPr lang="en-US" sz="1100" dirty="0"/>
           </a:p>
@@ -36663,7 +37512,7 @@
                 <a:ea typeface="Trebuchet MS" pitchFamily="34" charset="-122"/>
                 <a:cs typeface="Trebuchet MS" pitchFamily="34" charset="-120"/>
               </a:rPr>
-              <a:t>warfare</a:t>
+              <a:t>war</a:t>
             </a:r>
             <a:endParaRPr lang="en-US" sz="1300" dirty="0"/>
           </a:p>
@@ -36729,7 +37578,7 @@
                 <a:ea typeface="Trebuchet MS" pitchFamily="34" charset="-122"/>
                 <a:cs typeface="Trebuchet MS" pitchFamily="34" charset="-120"/>
               </a:rPr>
-              <a:t>warrior</a:t>
+              <a:t>wars</a:t>
             </a:r>
             <a:endParaRPr lang="en-US" sz="1300" dirty="0"/>
           </a:p>
@@ -36795,271 +37644,7 @@
                 <a:ea typeface="Trebuchet MS" pitchFamily="34" charset="-122"/>
                 <a:cs typeface="Trebuchet MS" pitchFamily="34" charset="-120"/>
               </a:rPr>
-              <a:t>warship</a:t>
-            </a:r>
-            <a:endParaRPr lang="en-US" sz="1300" dirty="0"/>
-          </a:p>
-        </p:txBody>
-      </p:sp>
-      <p:sp>
-        <p:nvSpPr>
-          <p:cNvPr id="22" name="Shape 20"/>
-          <p:cNvSpPr/>
-          <p:nvPr/>
-        </p:nvSpPr>
-        <p:spPr>
-          <a:xfrm>
-            <a:off x="6812280" y="2743200"/>
-            <a:ext cx="2011680" cy="502920"/>
-          </a:xfrm>
-          <a:prstGeom prst="rect">
-            <a:avLst>
-              <a:gd name="adj" fmla="val 14545"/>
-            </a:avLst>
-          </a:prstGeom>
-          <a:solidFill>
-            <a:srgbClr val="EEF2FF"/>
-          </a:solidFill>
-          <a:ln w="12700">
-            <a:solidFill>
-              <a:srgbClr val="6366F1"/>
-            </a:solidFill>
-            <a:prstDash val="solid"/>
-          </a:ln>
-        </p:spPr>
-      </p:sp>
-      <p:sp>
-        <p:nvSpPr>
-          <p:cNvPr id="23" name="Text 21"/>
-          <p:cNvSpPr/>
-          <p:nvPr/>
-        </p:nvSpPr>
-        <p:spPr>
-          <a:xfrm>
-            <a:off x="6812280" y="2743200"/>
-            <a:ext cx="2011680" cy="502920"/>
-          </a:xfrm>
-          <a:prstGeom prst="rect">
-            <a:avLst/>
-          </a:prstGeom>
-          <a:noFill/>
-          <a:ln/>
-        </p:spPr>
-        <p:txBody>
-          <a:bodyPr wrap="square" lIns="0" tIns="0" rIns="0" bIns="0" rtlCol="0" anchor="ctr"/>
-          <a:lstStyle/>
-          <a:p>
-            <a:pPr algn="ctr" indent="0" marL="0">
-              <a:buNone/>
-            </a:pPr>
-            <a:r>
-              <a:rPr lang="en-US" sz="1300" b="1" dirty="0">
-                <a:solidFill>
-                  <a:srgbClr val="4338CA"/>
-                </a:solidFill>
-                <a:latin typeface="Trebuchet MS" pitchFamily="34" charset="0"/>
-                <a:ea typeface="Trebuchet MS" pitchFamily="34" charset="-122"/>
-                <a:cs typeface="Trebuchet MS" pitchFamily="34" charset="-120"/>
-              </a:rPr>
-              <a:t>warlike</a:t>
-            </a:r>
-            <a:endParaRPr lang="en-US" sz="1300" dirty="0"/>
-          </a:p>
-        </p:txBody>
-      </p:sp>
-      <p:sp>
-        <p:nvSpPr>
-          <p:cNvPr id="24" name="Shape 22"/>
-          <p:cNvSpPr/>
-          <p:nvPr/>
-        </p:nvSpPr>
-        <p:spPr>
-          <a:xfrm>
-            <a:off x="365760" y="3401568"/>
-            <a:ext cx="2011680" cy="502920"/>
-          </a:xfrm>
-          <a:prstGeom prst="rect">
-            <a:avLst>
-              <a:gd name="adj" fmla="val 14545"/>
-            </a:avLst>
-          </a:prstGeom>
-          <a:solidFill>
-            <a:srgbClr val="EEF2FF"/>
-          </a:solidFill>
-          <a:ln w="12700">
-            <a:solidFill>
-              <a:srgbClr val="6366F1"/>
-            </a:solidFill>
-            <a:prstDash val="solid"/>
-          </a:ln>
-        </p:spPr>
-      </p:sp>
-      <p:sp>
-        <p:nvSpPr>
-          <p:cNvPr id="25" name="Text 23"/>
-          <p:cNvSpPr/>
-          <p:nvPr/>
-        </p:nvSpPr>
-        <p:spPr>
-          <a:xfrm>
-            <a:off x="365760" y="3401568"/>
-            <a:ext cx="2011680" cy="502920"/>
-          </a:xfrm>
-          <a:prstGeom prst="rect">
-            <a:avLst/>
-          </a:prstGeom>
-          <a:noFill/>
-          <a:ln/>
-        </p:spPr>
-        <p:txBody>
-          <a:bodyPr wrap="square" lIns="0" tIns="0" rIns="0" bIns="0" rtlCol="0" anchor="ctr"/>
-          <a:lstStyle/>
-          <a:p>
-            <a:pPr algn="ctr" indent="0" marL="0">
-              <a:buNone/>
-            </a:pPr>
-            <a:r>
-              <a:rPr lang="en-US" sz="1300" b="1" dirty="0">
-                <a:solidFill>
-                  <a:srgbClr val="4338CA"/>
-                </a:solidFill>
-                <a:latin typeface="Trebuchet MS" pitchFamily="34" charset="0"/>
-                <a:ea typeface="Trebuchet MS" pitchFamily="34" charset="-122"/>
-                <a:cs typeface="Trebuchet MS" pitchFamily="34" charset="-120"/>
-              </a:rPr>
-              <a:t>warden</a:t>
-            </a:r>
-            <a:endParaRPr lang="en-US" sz="1300" dirty="0"/>
-          </a:p>
-        </p:txBody>
-      </p:sp>
-      <p:sp>
-        <p:nvSpPr>
-          <p:cNvPr id="26" name="Shape 24"/>
-          <p:cNvSpPr/>
-          <p:nvPr/>
-        </p:nvSpPr>
-        <p:spPr>
-          <a:xfrm>
-            <a:off x="2514600" y="3401568"/>
-            <a:ext cx="2011680" cy="502920"/>
-          </a:xfrm>
-          <a:prstGeom prst="rect">
-            <a:avLst>
-              <a:gd name="adj" fmla="val 14545"/>
-            </a:avLst>
-          </a:prstGeom>
-          <a:solidFill>
-            <a:srgbClr val="EEF2FF"/>
-          </a:solidFill>
-          <a:ln w="12700">
-            <a:solidFill>
-              <a:srgbClr val="6366F1"/>
-            </a:solidFill>
-            <a:prstDash val="solid"/>
-          </a:ln>
-        </p:spPr>
-      </p:sp>
-      <p:sp>
-        <p:nvSpPr>
-          <p:cNvPr id="27" name="Text 25"/>
-          <p:cNvSpPr/>
-          <p:nvPr/>
-        </p:nvSpPr>
-        <p:spPr>
-          <a:xfrm>
-            <a:off x="2514600" y="3401568"/>
-            <a:ext cx="2011680" cy="502920"/>
-          </a:xfrm>
-          <a:prstGeom prst="rect">
-            <a:avLst/>
-          </a:prstGeom>
-          <a:noFill/>
-          <a:ln/>
-        </p:spPr>
-        <p:txBody>
-          <a:bodyPr wrap="square" lIns="0" tIns="0" rIns="0" bIns="0" rtlCol="0" anchor="ctr"/>
-          <a:lstStyle/>
-          <a:p>
-            <a:pPr algn="ctr" indent="0" marL="0">
-              <a:buNone/>
-            </a:pPr>
-            <a:r>
-              <a:rPr lang="en-US" sz="1300" b="1" dirty="0">
-                <a:solidFill>
-                  <a:srgbClr val="4338CA"/>
-                </a:solidFill>
-                <a:latin typeface="Trebuchet MS" pitchFamily="34" charset="0"/>
-                <a:ea typeface="Trebuchet MS" pitchFamily="34" charset="-122"/>
-                <a:cs typeface="Trebuchet MS" pitchFamily="34" charset="-120"/>
-              </a:rPr>
-              <a:t>warring</a:t>
-            </a:r>
-            <a:endParaRPr lang="en-US" sz="1300" dirty="0"/>
-          </a:p>
-        </p:txBody>
-      </p:sp>
-      <p:sp>
-        <p:nvSpPr>
-          <p:cNvPr id="28" name="Shape 26"/>
-          <p:cNvSpPr/>
-          <p:nvPr/>
-        </p:nvSpPr>
-        <p:spPr>
-          <a:xfrm>
-            <a:off x="4663440" y="3401568"/>
-            <a:ext cx="2011680" cy="502920"/>
-          </a:xfrm>
-          <a:prstGeom prst="rect">
-            <a:avLst>
-              <a:gd name="adj" fmla="val 14545"/>
-            </a:avLst>
-          </a:prstGeom>
-          <a:solidFill>
-            <a:srgbClr val="EEF2FF"/>
-          </a:solidFill>
-          <a:ln w="12700">
-            <a:solidFill>
-              <a:srgbClr val="6366F1"/>
-            </a:solidFill>
-            <a:prstDash val="solid"/>
-          </a:ln>
-        </p:spPr>
-      </p:sp>
-      <p:sp>
-        <p:nvSpPr>
-          <p:cNvPr id="29" name="Text 27"/>
-          <p:cNvSpPr/>
-          <p:nvPr/>
-        </p:nvSpPr>
-        <p:spPr>
-          <a:xfrm>
-            <a:off x="4663440" y="3401568"/>
-            <a:ext cx="2011680" cy="502920"/>
-          </a:xfrm>
-          <a:prstGeom prst="rect">
-            <a:avLst/>
-          </a:prstGeom>
-          <a:noFill/>
-          <a:ln/>
-        </p:spPr>
-        <p:txBody>
-          <a:bodyPr wrap="square" lIns="0" tIns="0" rIns="0" bIns="0" rtlCol="0" anchor="ctr"/>
-          <a:lstStyle/>
-          <a:p>
-            <a:pPr algn="ctr" indent="0" marL="0">
-              <a:buNone/>
-            </a:pPr>
-            <a:r>
-              <a:rPr lang="en-US" sz="1300" b="1" dirty="0">
-                <a:solidFill>
-                  <a:srgbClr val="4338CA"/>
-                </a:solidFill>
-                <a:latin typeface="Trebuchet MS" pitchFamily="34" charset="0"/>
-                <a:ea typeface="Trebuchet MS" pitchFamily="34" charset="-122"/>
-                <a:cs typeface="Trebuchet MS" pitchFamily="34" charset="-120"/>
-              </a:rPr>
-              <a:t>prewar</a:t>
+              <a:t>warren</a:t>
             </a:r>
             <a:endParaRPr lang="en-US" sz="1300" dirty="0"/>
           </a:p>
@@ -37351,7 +37936,7 @@
                 <a:ea typeface="Calibri" pitchFamily="34" charset="-122"/>
                 <a:cs typeface="Calibri" pitchFamily="34" charset="-120"/>
               </a:rPr>
-              <a:t>Word Labs  •  wordlabs.app  •  Root: 'war' = conflict, fighting, armed struggle</a:t>
+              <a:t>Word Labs  •  wordlabs.app  •  Root: 'war' = armed conflict between groups</a:t>
             </a:r>
             <a:endParaRPr lang="en-US" sz="800" dirty="0"/>
           </a:p>
@@ -37652,7 +38237,7 @@
                 <a:ea typeface="Trebuchet MS" pitchFamily="34" charset="-122"/>
                 <a:cs typeface="Trebuchet MS" pitchFamily="34" charset="-120"/>
               </a:rPr>
-              <a:t>pre-</a:t>
+              <a:t>post-</a:t>
             </a:r>
             <a:endParaRPr lang="en-US" sz="1300" dirty="0"/>
           </a:p>
@@ -37780,7 +38365,7 @@
                 <a:ea typeface="Trebuchet MS" pitchFamily="34" charset="-122"/>
                 <a:cs typeface="Trebuchet MS" pitchFamily="34" charset="-120"/>
               </a:rPr>
-              <a:t>-fare</a:t>
+              <a:t>-ant</a:t>
             </a:r>
             <a:endParaRPr lang="en-US" sz="1300" dirty="0"/>
           </a:p>
@@ -37801,7 +38386,7 @@
             <a:avLst/>
           </a:prstGeom>
           <a:solidFill>
-            <a:srgbClr val="DDD6FE"/>
+            <a:srgbClr val="F1F5F9"/>
           </a:solidFill>
           <a:ln w="12700">
             <a:solidFill>
@@ -37813,18 +38398,68 @@
       </p:sp>
       <p:sp>
         <p:nvSpPr>
-          <p:cNvPr id="24" name="Text 22"/>
-          <p:cNvSpPr/>
-          <p:nvPr/>
-        </p:nvSpPr>
-        <p:spPr>
-          <a:xfrm>
-            <a:off x="640080" y="2212848"/>
+          <p:cNvPr id="24" name="Shape 22"/>
+          <p:cNvSpPr/>
+          <p:nvPr/>
+        </p:nvSpPr>
+        <p:spPr>
+          <a:xfrm>
+            <a:off x="3291840" y="2212848"/>
+            <a:ext cx="1645920" cy="420624"/>
+          </a:xfrm>
+          <a:prstGeom prst="rect">
+            <a:avLst/>
+          </a:prstGeom>
+          <a:solidFill>
+            <a:srgbClr val="F1F5F9"/>
+          </a:solidFill>
+          <a:ln w="12700">
+            <a:solidFill>
+              <a:srgbClr val="E5E7EB"/>
+            </a:solidFill>
+            <a:prstDash val="solid"/>
+          </a:ln>
+        </p:spPr>
+      </p:sp>
+      <p:sp>
+        <p:nvSpPr>
+          <p:cNvPr id="25" name="Shape 23"/>
+          <p:cNvSpPr/>
+          <p:nvPr/>
+        </p:nvSpPr>
+        <p:spPr>
+          <a:xfrm>
+            <a:off x="5943600" y="2212848"/>
             <a:ext cx="1463040" cy="420624"/>
           </a:xfrm>
           <a:prstGeom prst="rect">
             <a:avLst/>
           </a:prstGeom>
+          <a:solidFill>
+            <a:srgbClr val="FCE7F3"/>
+          </a:solidFill>
+          <a:ln w="12700">
+            <a:solidFill>
+              <a:srgbClr val="E5E7EB"/>
+            </a:solidFill>
+            <a:prstDash val="solid"/>
+          </a:ln>
+        </p:spPr>
+      </p:sp>
+      <p:sp>
+        <p:nvSpPr>
+          <p:cNvPr id="26" name="Text 24"/>
+          <p:cNvSpPr/>
+          <p:nvPr/>
+        </p:nvSpPr>
+        <p:spPr>
+          <a:xfrm>
+            <a:off x="5943600" y="2212848"/>
+            <a:ext cx="1463040" cy="420624"/>
+          </a:xfrm>
+          <a:prstGeom prst="rect">
+            <a:avLst/>
+          </a:prstGeom>
           <a:noFill/>
           <a:ln/>
         </p:spPr>
@@ -37838,13 +38473,13 @@
             <a:r>
               <a:rPr lang="en-US" sz="1300" b="1" dirty="0">
                 <a:solidFill>
-                  <a:srgbClr val="4C1D95"/>
+                  <a:srgbClr val="9D174D"/>
                 </a:solidFill>
                 <a:latin typeface="Trebuchet MS" pitchFamily="34" charset="0"/>
                 <a:ea typeface="Trebuchet MS" pitchFamily="34" charset="-122"/>
                 <a:cs typeface="Trebuchet MS" pitchFamily="34" charset="-120"/>
               </a:rPr>
-              <a:t>out-</a:t>
+              <a:t>-en</a:t>
             </a:r>
             <a:endParaRPr lang="en-US" sz="1300" dirty="0"/>
           </a:p>
@@ -37852,20 +38487,45 @@
       </p:sp>
       <p:sp>
         <p:nvSpPr>
-          <p:cNvPr id="25" name="Shape 23"/>
-          <p:cNvSpPr/>
-          <p:nvPr/>
-        </p:nvSpPr>
-        <p:spPr>
-          <a:xfrm>
-            <a:off x="3291840" y="2212848"/>
+          <p:cNvPr id="27" name="Shape 25"/>
+          <p:cNvSpPr/>
+          <p:nvPr/>
+        </p:nvSpPr>
+        <p:spPr>
+          <a:xfrm>
+            <a:off x="640080" y="2670048"/>
+            <a:ext cx="1463040" cy="420624"/>
+          </a:xfrm>
+          <a:prstGeom prst="rect">
+            <a:avLst/>
+          </a:prstGeom>
+          <a:solidFill>
+            <a:srgbClr val="F8FAFC"/>
+          </a:solidFill>
+          <a:ln w="12700">
+            <a:solidFill>
+              <a:srgbClr val="E5E7EB"/>
+            </a:solidFill>
+            <a:prstDash val="solid"/>
+          </a:ln>
+        </p:spPr>
+      </p:sp>
+      <p:sp>
+        <p:nvSpPr>
+          <p:cNvPr id="28" name="Shape 26"/>
+          <p:cNvSpPr/>
+          <p:nvPr/>
+        </p:nvSpPr>
+        <p:spPr>
+          <a:xfrm>
+            <a:off x="3291840" y="2670048"/>
             <a:ext cx="1645920" cy="420624"/>
           </a:xfrm>
           <a:prstGeom prst="rect">
             <a:avLst/>
           </a:prstGeom>
           <a:solidFill>
-            <a:srgbClr val="F1F5F9"/>
+            <a:srgbClr val="F8FAFC"/>
           </a:solidFill>
           <a:ln w="12700">
             <a:solidFill>
@@ -37877,13 +38537,13 @@
       </p:sp>
       <p:sp>
         <p:nvSpPr>
-          <p:cNvPr id="26" name="Shape 24"/>
-          <p:cNvSpPr/>
-          <p:nvPr/>
-        </p:nvSpPr>
-        <p:spPr>
-          <a:xfrm>
-            <a:off x="5943600" y="2212848"/>
+          <p:cNvPr id="29" name="Shape 27"/>
+          <p:cNvSpPr/>
+          <p:nvPr/>
+        </p:nvSpPr>
+        <p:spPr>
+          <a:xfrm>
+            <a:off x="5943600" y="2670048"/>
             <a:ext cx="1463040" cy="420624"/>
           </a:xfrm>
           <a:prstGeom prst="rect">
@@ -37902,13 +38562,13 @@
       </p:sp>
       <p:sp>
         <p:nvSpPr>
-          <p:cNvPr id="27" name="Text 25"/>
-          <p:cNvSpPr/>
-          <p:nvPr/>
-        </p:nvSpPr>
-        <p:spPr>
-          <a:xfrm>
-            <a:off x="5943600" y="2212848"/>
+          <p:cNvPr id="30" name="Text 28"/>
+          <p:cNvSpPr/>
+          <p:nvPr/>
+        </p:nvSpPr>
+        <p:spPr>
+          <a:xfrm>
+            <a:off x="5943600" y="2670048"/>
             <a:ext cx="1463040" cy="420624"/>
           </a:xfrm>
           <a:prstGeom prst="rect">
@@ -37933,7 +38593,7 @@
                 <a:ea typeface="Trebuchet MS" pitchFamily="34" charset="-122"/>
                 <a:cs typeface="Trebuchet MS" pitchFamily="34" charset="-120"/>
               </a:rPr>
-              <a:t>-ship</a:t>
+              <a:t>-s</a:t>
             </a:r>
             <a:endParaRPr lang="en-US" sz="1300" dirty="0"/>
           </a:p>
@@ -37941,472 +38601,13 @@
       </p:sp>
       <p:sp>
         <p:nvSpPr>
-          <p:cNvPr id="28" name="Shape 26"/>
-          <p:cNvSpPr/>
-          <p:nvPr/>
-        </p:nvSpPr>
-        <p:spPr>
-          <a:xfrm>
-            <a:off x="640080" y="2670048"/>
-            <a:ext cx="1463040" cy="420624"/>
-          </a:xfrm>
-          <a:prstGeom prst="rect">
-            <a:avLst/>
-          </a:prstGeom>
-          <a:solidFill>
-            <a:srgbClr val="DDD6FE"/>
-          </a:solidFill>
-          <a:ln w="12700">
-            <a:solidFill>
-              <a:srgbClr val="E5E7EB"/>
-            </a:solidFill>
-            <a:prstDash val="solid"/>
-          </a:ln>
-        </p:spPr>
-      </p:sp>
-      <p:sp>
-        <p:nvSpPr>
-          <p:cNvPr id="29" name="Text 27"/>
-          <p:cNvSpPr/>
-          <p:nvPr/>
-        </p:nvSpPr>
-        <p:spPr>
-          <a:xfrm>
-            <a:off x="640080" y="2670048"/>
-            <a:ext cx="1463040" cy="420624"/>
-          </a:xfrm>
-          <a:prstGeom prst="rect">
-            <a:avLst/>
-          </a:prstGeom>
-          <a:noFill/>
-          <a:ln/>
-        </p:spPr>
-        <p:txBody>
-          <a:bodyPr wrap="square" lIns="0" tIns="0" rIns="0" bIns="0" rtlCol="0" anchor="ctr"/>
-          <a:lstStyle/>
-          <a:p>
-            <a:pPr algn="ctr" indent="0" marL="0">
-              <a:buNone/>
-            </a:pPr>
-            <a:r>
-              <a:rPr lang="en-US" sz="1300" b="1" dirty="0">
-                <a:solidFill>
-                  <a:srgbClr val="4C1D95"/>
-                </a:solidFill>
-                <a:latin typeface="Trebuchet MS" pitchFamily="34" charset="0"/>
-                <a:ea typeface="Trebuchet MS" pitchFamily="34" charset="-122"/>
-                <a:cs typeface="Trebuchet MS" pitchFamily="34" charset="-120"/>
-              </a:rPr>
-              <a:t>post-</a:t>
-            </a:r>
-            <a:endParaRPr lang="en-US" sz="1300" dirty="0"/>
-          </a:p>
-        </p:txBody>
-      </p:sp>
-      <p:sp>
-        <p:nvSpPr>
-          <p:cNvPr id="30" name="Shape 28"/>
-          <p:cNvSpPr/>
-          <p:nvPr/>
-        </p:nvSpPr>
-        <p:spPr>
-          <a:xfrm>
-            <a:off x="3291840" y="2670048"/>
-            <a:ext cx="1645920" cy="420624"/>
-          </a:xfrm>
-          <a:prstGeom prst="rect">
-            <a:avLst/>
-          </a:prstGeom>
-          <a:solidFill>
-            <a:srgbClr val="F8FAFC"/>
-          </a:solidFill>
-          <a:ln w="12700">
-            <a:solidFill>
-              <a:srgbClr val="E5E7EB"/>
-            </a:solidFill>
-            <a:prstDash val="solid"/>
-          </a:ln>
-        </p:spPr>
-      </p:sp>
-      <p:sp>
-        <p:nvSpPr>
-          <p:cNvPr id="31" name="Shape 29"/>
-          <p:cNvSpPr/>
-          <p:nvPr/>
-        </p:nvSpPr>
-        <p:spPr>
-          <a:xfrm>
-            <a:off x="5943600" y="2670048"/>
-            <a:ext cx="1463040" cy="420624"/>
-          </a:xfrm>
-          <a:prstGeom prst="rect">
-            <a:avLst/>
-          </a:prstGeom>
-          <a:solidFill>
-            <a:srgbClr val="FCE7F3"/>
-          </a:solidFill>
-          <a:ln w="12700">
-            <a:solidFill>
-              <a:srgbClr val="E5E7EB"/>
-            </a:solidFill>
-            <a:prstDash val="solid"/>
-          </a:ln>
-        </p:spPr>
-      </p:sp>
-      <p:sp>
-        <p:nvSpPr>
-          <p:cNvPr id="32" name="Text 30"/>
-          <p:cNvSpPr/>
-          <p:nvPr/>
-        </p:nvSpPr>
-        <p:spPr>
-          <a:xfrm>
-            <a:off x="5943600" y="2670048"/>
-            <a:ext cx="1463040" cy="420624"/>
-          </a:xfrm>
-          <a:prstGeom prst="rect">
-            <a:avLst/>
-          </a:prstGeom>
-          <a:noFill/>
-          <a:ln/>
-        </p:spPr>
-        <p:txBody>
-          <a:bodyPr wrap="square" lIns="0" tIns="0" rIns="0" bIns="0" rtlCol="0" anchor="ctr"/>
-          <a:lstStyle/>
-          <a:p>
-            <a:pPr algn="ctr" indent="0" marL="0">
-              <a:buNone/>
-            </a:pPr>
-            <a:r>
-              <a:rPr lang="en-US" sz="1300" b="1" dirty="0">
-                <a:solidFill>
-                  <a:srgbClr val="9D174D"/>
-                </a:solidFill>
-                <a:latin typeface="Trebuchet MS" pitchFamily="34" charset="0"/>
-                <a:ea typeface="Trebuchet MS" pitchFamily="34" charset="-122"/>
-                <a:cs typeface="Trebuchet MS" pitchFamily="34" charset="-120"/>
-              </a:rPr>
-              <a:t>-like</a:t>
-            </a:r>
-            <a:endParaRPr lang="en-US" sz="1300" dirty="0"/>
-          </a:p>
-        </p:txBody>
-      </p:sp>
-      <p:sp>
-        <p:nvSpPr>
-          <p:cNvPr id="33" name="Shape 31"/>
-          <p:cNvSpPr/>
-          <p:nvPr/>
-        </p:nvSpPr>
-        <p:spPr>
-          <a:xfrm>
-            <a:off x="640080" y="3127248"/>
-            <a:ext cx="1463040" cy="420624"/>
-          </a:xfrm>
-          <a:prstGeom prst="rect">
-            <a:avLst/>
-          </a:prstGeom>
-          <a:solidFill>
-            <a:srgbClr val="DDD6FE"/>
-          </a:solidFill>
-          <a:ln w="12700">
-            <a:solidFill>
-              <a:srgbClr val="E5E7EB"/>
-            </a:solidFill>
-            <a:prstDash val="solid"/>
-          </a:ln>
-        </p:spPr>
-      </p:sp>
-      <p:sp>
-        <p:nvSpPr>
-          <p:cNvPr id="34" name="Text 32"/>
-          <p:cNvSpPr/>
-          <p:nvPr/>
-        </p:nvSpPr>
-        <p:spPr>
-          <a:xfrm>
-            <a:off x="640080" y="3127248"/>
-            <a:ext cx="1463040" cy="420624"/>
-          </a:xfrm>
-          <a:prstGeom prst="rect">
-            <a:avLst/>
-          </a:prstGeom>
-          <a:noFill/>
-          <a:ln/>
-        </p:spPr>
-        <p:txBody>
-          <a:bodyPr wrap="square" lIns="0" tIns="0" rIns="0" bIns="0" rtlCol="0" anchor="ctr"/>
-          <a:lstStyle/>
-          <a:p>
-            <a:pPr algn="ctr" indent="0" marL="0">
-              <a:buNone/>
-            </a:pPr>
-            <a:r>
-              <a:rPr lang="en-US" sz="1300" b="1" dirty="0">
-                <a:solidFill>
-                  <a:srgbClr val="4C1D95"/>
-                </a:solidFill>
-                <a:latin typeface="Trebuchet MS" pitchFamily="34" charset="0"/>
-                <a:ea typeface="Trebuchet MS" pitchFamily="34" charset="-122"/>
-                <a:cs typeface="Trebuchet MS" pitchFamily="34" charset="-120"/>
-              </a:rPr>
-              <a:t>un-</a:t>
-            </a:r>
-            <a:endParaRPr lang="en-US" sz="1300" dirty="0"/>
-          </a:p>
-        </p:txBody>
-      </p:sp>
-      <p:sp>
-        <p:nvSpPr>
-          <p:cNvPr id="35" name="Shape 33"/>
-          <p:cNvSpPr/>
-          <p:nvPr/>
-        </p:nvSpPr>
-        <p:spPr>
-          <a:xfrm>
-            <a:off x="3291840" y="3127248"/>
-            <a:ext cx="1645920" cy="420624"/>
-          </a:xfrm>
-          <a:prstGeom prst="rect">
-            <a:avLst/>
-          </a:prstGeom>
-          <a:solidFill>
-            <a:srgbClr val="F1F5F9"/>
-          </a:solidFill>
-          <a:ln w="12700">
-            <a:solidFill>
-              <a:srgbClr val="E5E7EB"/>
-            </a:solidFill>
-            <a:prstDash val="solid"/>
-          </a:ln>
-        </p:spPr>
-      </p:sp>
-      <p:sp>
-        <p:nvSpPr>
-          <p:cNvPr id="36" name="Shape 34"/>
-          <p:cNvSpPr/>
-          <p:nvPr/>
-        </p:nvSpPr>
-        <p:spPr>
-          <a:xfrm>
-            <a:off x="5943600" y="3127248"/>
-            <a:ext cx="1463040" cy="420624"/>
-          </a:xfrm>
-          <a:prstGeom prst="rect">
-            <a:avLst/>
-          </a:prstGeom>
-          <a:solidFill>
-            <a:srgbClr val="FCE7F3"/>
-          </a:solidFill>
-          <a:ln w="12700">
-            <a:solidFill>
-              <a:srgbClr val="E5E7EB"/>
-            </a:solidFill>
-            <a:prstDash val="solid"/>
-          </a:ln>
-        </p:spPr>
-      </p:sp>
-      <p:sp>
-        <p:nvSpPr>
-          <p:cNvPr id="37" name="Text 35"/>
-          <p:cNvSpPr/>
-          <p:nvPr/>
-        </p:nvSpPr>
-        <p:spPr>
-          <a:xfrm>
-            <a:off x="5943600" y="3127248"/>
-            <a:ext cx="1463040" cy="420624"/>
-          </a:xfrm>
-          <a:prstGeom prst="rect">
-            <a:avLst/>
-          </a:prstGeom>
-          <a:noFill/>
-          <a:ln/>
-        </p:spPr>
-        <p:txBody>
-          <a:bodyPr wrap="square" lIns="0" tIns="0" rIns="0" bIns="0" rtlCol="0" anchor="ctr"/>
-          <a:lstStyle/>
-          <a:p>
-            <a:pPr algn="ctr" indent="0" marL="0">
-              <a:buNone/>
-            </a:pPr>
-            <a:r>
-              <a:rPr lang="en-US" sz="1300" b="1" dirty="0">
-                <a:solidFill>
-                  <a:srgbClr val="9D174D"/>
-                </a:solidFill>
-                <a:latin typeface="Trebuchet MS" pitchFamily="34" charset="0"/>
-                <a:ea typeface="Trebuchet MS" pitchFamily="34" charset="-122"/>
-                <a:cs typeface="Trebuchet MS" pitchFamily="34" charset="-120"/>
-              </a:rPr>
-              <a:t>-ring</a:t>
-            </a:r>
-            <a:endParaRPr lang="en-US" sz="1300" dirty="0"/>
-          </a:p>
-        </p:txBody>
-      </p:sp>
-      <p:sp>
-        <p:nvSpPr>
-          <p:cNvPr id="38" name="Shape 36"/>
-          <p:cNvSpPr/>
-          <p:nvPr/>
-        </p:nvSpPr>
-        <p:spPr>
-          <a:xfrm>
-            <a:off x="640080" y="3584448"/>
-            <a:ext cx="1463040" cy="420624"/>
-          </a:xfrm>
-          <a:prstGeom prst="rect">
-            <a:avLst/>
-          </a:prstGeom>
-          <a:solidFill>
-            <a:srgbClr val="DDD6FE"/>
-          </a:solidFill>
-          <a:ln w="12700">
-            <a:solidFill>
-              <a:srgbClr val="E5E7EB"/>
-            </a:solidFill>
-            <a:prstDash val="solid"/>
-          </a:ln>
-        </p:spPr>
-      </p:sp>
-      <p:sp>
-        <p:nvSpPr>
-          <p:cNvPr id="39" name="Text 37"/>
-          <p:cNvSpPr/>
-          <p:nvPr/>
-        </p:nvSpPr>
-        <p:spPr>
-          <a:xfrm>
-            <a:off x="640080" y="3584448"/>
-            <a:ext cx="1463040" cy="420624"/>
-          </a:xfrm>
-          <a:prstGeom prst="rect">
-            <a:avLst/>
-          </a:prstGeom>
-          <a:noFill/>
-          <a:ln/>
-        </p:spPr>
-        <p:txBody>
-          <a:bodyPr wrap="square" lIns="0" tIns="0" rIns="0" bIns="0" rtlCol="0" anchor="ctr"/>
-          <a:lstStyle/>
-          <a:p>
-            <a:pPr algn="ctr" indent="0" marL="0">
-              <a:buNone/>
-            </a:pPr>
-            <a:r>
-              <a:rPr lang="en-US" sz="1300" b="1" dirty="0">
-                <a:solidFill>
-                  <a:srgbClr val="4C1D95"/>
-                </a:solidFill>
-                <a:latin typeface="Trebuchet MS" pitchFamily="34" charset="0"/>
-                <a:ea typeface="Trebuchet MS" pitchFamily="34" charset="-122"/>
-                <a:cs typeface="Trebuchet MS" pitchFamily="34" charset="-120"/>
-              </a:rPr>
-              <a:t>civil-</a:t>
-            </a:r>
-            <a:endParaRPr lang="en-US" sz="1300" dirty="0"/>
-          </a:p>
-        </p:txBody>
-      </p:sp>
-      <p:sp>
-        <p:nvSpPr>
-          <p:cNvPr id="40" name="Shape 38"/>
-          <p:cNvSpPr/>
-          <p:nvPr/>
-        </p:nvSpPr>
-        <p:spPr>
-          <a:xfrm>
-            <a:off x="3291840" y="3584448"/>
-            <a:ext cx="1645920" cy="420624"/>
-          </a:xfrm>
-          <a:prstGeom prst="rect">
-            <a:avLst/>
-          </a:prstGeom>
-          <a:solidFill>
-            <a:srgbClr val="F8FAFC"/>
-          </a:solidFill>
-          <a:ln w="12700">
-            <a:solidFill>
-              <a:srgbClr val="E5E7EB"/>
-            </a:solidFill>
-            <a:prstDash val="solid"/>
-          </a:ln>
-        </p:spPr>
-      </p:sp>
-      <p:sp>
-        <p:nvSpPr>
-          <p:cNvPr id="41" name="Shape 39"/>
-          <p:cNvSpPr/>
-          <p:nvPr/>
-        </p:nvSpPr>
-        <p:spPr>
-          <a:xfrm>
-            <a:off x="5943600" y="3584448"/>
-            <a:ext cx="1463040" cy="420624"/>
-          </a:xfrm>
-          <a:prstGeom prst="rect">
-            <a:avLst/>
-          </a:prstGeom>
-          <a:solidFill>
-            <a:srgbClr val="FCE7F3"/>
-          </a:solidFill>
-          <a:ln w="12700">
-            <a:solidFill>
-              <a:srgbClr val="E5E7EB"/>
-            </a:solidFill>
-            <a:prstDash val="solid"/>
-          </a:ln>
-        </p:spPr>
-      </p:sp>
-      <p:sp>
-        <p:nvSpPr>
-          <p:cNvPr id="42" name="Text 40"/>
-          <p:cNvSpPr/>
-          <p:nvPr/>
-        </p:nvSpPr>
-        <p:spPr>
-          <a:xfrm>
-            <a:off x="5943600" y="3584448"/>
-            <a:ext cx="1463040" cy="420624"/>
-          </a:xfrm>
-          <a:prstGeom prst="rect">
-            <a:avLst/>
-          </a:prstGeom>
-          <a:noFill/>
-          <a:ln/>
-        </p:spPr>
-        <p:txBody>
-          <a:bodyPr wrap="square" lIns="0" tIns="0" rIns="0" bIns="0" rtlCol="0" anchor="ctr"/>
-          <a:lstStyle/>
-          <a:p>
-            <a:pPr algn="ctr" indent="0" marL="0">
-              <a:buNone/>
-            </a:pPr>
-            <a:r>
-              <a:rPr lang="en-US" sz="1300" b="1" dirty="0">
-                <a:solidFill>
-                  <a:srgbClr val="9D174D"/>
-                </a:solidFill>
-                <a:latin typeface="Trebuchet MS" pitchFamily="34" charset="0"/>
-                <a:ea typeface="Trebuchet MS" pitchFamily="34" charset="-122"/>
-                <a:cs typeface="Trebuchet MS" pitchFamily="34" charset="-120"/>
-              </a:rPr>
-              <a:t>-den</a:t>
-            </a:r>
-            <a:endParaRPr lang="en-US" sz="1300" dirty="0"/>
-          </a:p>
-        </p:txBody>
-      </p:sp>
-      <p:sp>
-        <p:nvSpPr>
-          <p:cNvPr id="43" name="Text 41"/>
-          <p:cNvSpPr/>
-          <p:nvPr/>
-        </p:nvSpPr>
-        <p:spPr>
-          <a:xfrm>
-            <a:off x="365760" y="4178808"/>
+          <p:cNvPr id="31" name="Text 29"/>
+          <p:cNvSpPr/>
+          <p:nvPr/>
+        </p:nvSpPr>
+        <p:spPr>
+          <a:xfrm>
+            <a:off x="365760" y="3264408"/>
             <a:ext cx="1097280" cy="420624"/>
           </a:xfrm>
           <a:prstGeom prst="rect">
@@ -38439,14 +38640,14 @@
       </p:sp>
       <p:sp>
         <p:nvSpPr>
-          <p:cNvPr id="44" name="Shape 42"/>
-          <p:cNvSpPr/>
-          <p:nvPr/>
-        </p:nvSpPr>
-        <p:spPr>
-          <a:xfrm>
-            <a:off x="1508760" y="4178808"/>
-            <a:ext cx="950976" cy="420624"/>
+          <p:cNvPr id="32" name="Shape 30"/>
+          <p:cNvSpPr/>
+          <p:nvPr/>
+        </p:nvSpPr>
+        <p:spPr>
+          <a:xfrm>
+            <a:off x="1508760" y="3264408"/>
+            <a:ext cx="1097280" cy="420624"/>
           </a:xfrm>
           <a:prstGeom prst="rect">
             <a:avLst>
@@ -38473,14 +38674,14 @@
       </p:sp>
       <p:sp>
         <p:nvSpPr>
-          <p:cNvPr id="45" name="Text 43"/>
-          <p:cNvSpPr/>
-          <p:nvPr/>
-        </p:nvSpPr>
-        <p:spPr>
-          <a:xfrm>
-            <a:off x="1508760" y="4178808"/>
-            <a:ext cx="950976" cy="420624"/>
+          <p:cNvPr id="33" name="Text 31"/>
+          <p:cNvSpPr/>
+          <p:nvPr/>
+        </p:nvSpPr>
+        <p:spPr>
+          <a:xfrm>
+            <a:off x="1508760" y="3264408"/>
+            <a:ext cx="1097280" cy="420624"/>
           </a:xfrm>
           <a:prstGeom prst="rect">
             <a:avLst/>
@@ -38504,7 +38705,7 @@
                 <a:ea typeface="Trebuchet MS" pitchFamily="34" charset="-122"/>
                 <a:cs typeface="Trebuchet MS" pitchFamily="34" charset="-120"/>
               </a:rPr>
-              <a:t>pre-</a:t>
+              <a:t>post-</a:t>
             </a:r>
             <a:endParaRPr lang="en-US" sz="1300" dirty="0"/>
           </a:p>
@@ -38512,13 +38713,13 @@
       </p:sp>
       <p:sp>
         <p:nvSpPr>
-          <p:cNvPr id="46" name="Text 44"/>
-          <p:cNvSpPr/>
-          <p:nvPr/>
-        </p:nvSpPr>
-        <p:spPr>
-          <a:xfrm>
-            <a:off x="2487168" y="4178808"/>
+          <p:cNvPr id="34" name="Text 32"/>
+          <p:cNvSpPr/>
+          <p:nvPr/>
+        </p:nvSpPr>
+        <p:spPr>
+          <a:xfrm>
+            <a:off x="2633472" y="3264408"/>
             <a:ext cx="320040" cy="420624"/>
           </a:xfrm>
           <a:prstGeom prst="rect">
@@ -38551,13 +38752,13 @@
       </p:sp>
       <p:sp>
         <p:nvSpPr>
-          <p:cNvPr id="47" name="Shape 45"/>
-          <p:cNvSpPr/>
-          <p:nvPr/>
-        </p:nvSpPr>
-        <p:spPr>
-          <a:xfrm>
-            <a:off x="2834640" y="4178808"/>
+          <p:cNvPr id="35" name="Shape 33"/>
+          <p:cNvSpPr/>
+          <p:nvPr/>
+        </p:nvSpPr>
+        <p:spPr>
+          <a:xfrm>
+            <a:off x="2980944" y="3264408"/>
             <a:ext cx="1097280" cy="420624"/>
           </a:xfrm>
           <a:prstGeom prst="rect">
@@ -38585,13 +38786,13 @@
       </p:sp>
       <p:sp>
         <p:nvSpPr>
-          <p:cNvPr id="48" name="Text 46"/>
-          <p:cNvSpPr/>
-          <p:nvPr/>
-        </p:nvSpPr>
-        <p:spPr>
-          <a:xfrm>
-            <a:off x="2834640" y="4178808"/>
+          <p:cNvPr id="36" name="Text 34"/>
+          <p:cNvSpPr/>
+          <p:nvPr/>
+        </p:nvSpPr>
+        <p:spPr>
+          <a:xfrm>
+            <a:off x="2980944" y="3264408"/>
             <a:ext cx="1097280" cy="420624"/>
           </a:xfrm>
           <a:prstGeom prst="rect">
@@ -38624,13 +38825,13 @@
       </p:sp>
       <p:sp>
         <p:nvSpPr>
-          <p:cNvPr id="49" name="Text 47"/>
-          <p:cNvSpPr/>
-          <p:nvPr/>
-        </p:nvSpPr>
-        <p:spPr>
-          <a:xfrm>
-            <a:off x="3959352" y="4178808"/>
+          <p:cNvPr id="37" name="Text 35"/>
+          <p:cNvSpPr/>
+          <p:nvPr/>
+        </p:nvSpPr>
+        <p:spPr>
+          <a:xfrm>
+            <a:off x="4105656" y="3264408"/>
             <a:ext cx="320040" cy="420624"/>
           </a:xfrm>
           <a:prstGeom prst="rect">
@@ -38663,14 +38864,14 @@
       </p:sp>
       <p:sp>
         <p:nvSpPr>
-          <p:cNvPr id="50" name="Shape 48"/>
-          <p:cNvSpPr/>
-          <p:nvPr/>
-        </p:nvSpPr>
-        <p:spPr>
-          <a:xfrm>
-            <a:off x="4306824" y="4178808"/>
-            <a:ext cx="1097280" cy="420624"/>
+          <p:cNvPr id="38" name="Shape 36"/>
+          <p:cNvSpPr/>
+          <p:nvPr/>
+        </p:nvSpPr>
+        <p:spPr>
+          <a:xfrm>
+            <a:off x="4453128" y="3264408"/>
+            <a:ext cx="950976" cy="420624"/>
           </a:xfrm>
           <a:prstGeom prst="rect">
             <a:avLst>
@@ -38697,14 +38898,14 @@
       </p:sp>
       <p:sp>
         <p:nvSpPr>
-          <p:cNvPr id="51" name="Text 49"/>
-          <p:cNvSpPr/>
-          <p:nvPr/>
-        </p:nvSpPr>
-        <p:spPr>
-          <a:xfrm>
-            <a:off x="4306824" y="4178808"/>
-            <a:ext cx="1097280" cy="420624"/>
+          <p:cNvPr id="39" name="Text 37"/>
+          <p:cNvSpPr/>
+          <p:nvPr/>
+        </p:nvSpPr>
+        <p:spPr>
+          <a:xfrm>
+            <a:off x="4453128" y="3264408"/>
+            <a:ext cx="950976" cy="420624"/>
           </a:xfrm>
           <a:prstGeom prst="rect">
             <a:avLst/>
@@ -38728,7 +38929,7 @@
                 <a:ea typeface="Trebuchet MS" pitchFamily="34" charset="-122"/>
                 <a:cs typeface="Trebuchet MS" pitchFamily="34" charset="-120"/>
               </a:rPr>
-              <a:t>-fare</a:t>
+              <a:t>-ant</a:t>
             </a:r>
             <a:endParaRPr lang="en-US" sz="1300" dirty="0"/>
           </a:p>
@@ -38736,13 +38937,13 @@
       </p:sp>
       <p:sp>
         <p:nvSpPr>
-          <p:cNvPr id="52" name="Text 50"/>
-          <p:cNvSpPr/>
-          <p:nvPr/>
-        </p:nvSpPr>
-        <p:spPr>
-          <a:xfrm>
-            <a:off x="5477256" y="4178808"/>
+          <p:cNvPr id="40" name="Text 38"/>
+          <p:cNvSpPr/>
+          <p:nvPr/>
+        </p:nvSpPr>
+        <p:spPr>
+          <a:xfrm>
+            <a:off x="5477256" y="3264408"/>
             <a:ext cx="365760" cy="420624"/>
           </a:xfrm>
           <a:prstGeom prst="rect">
@@ -38775,13 +38976,13 @@
       </p:sp>
       <p:sp>
         <p:nvSpPr>
-          <p:cNvPr id="53" name="Shape 51"/>
-          <p:cNvSpPr/>
-          <p:nvPr/>
-        </p:nvSpPr>
-        <p:spPr>
-          <a:xfrm>
-            <a:off x="5888736" y="4178808"/>
+          <p:cNvPr id="41" name="Shape 39"/>
+          <p:cNvSpPr/>
+          <p:nvPr/>
+        </p:nvSpPr>
+        <p:spPr>
+          <a:xfrm>
+            <a:off x="5888736" y="3264408"/>
             <a:ext cx="2194560" cy="420624"/>
           </a:xfrm>
           <a:prstGeom prst="rect">
@@ -38802,13 +39003,13 @@
       </p:sp>
       <p:sp>
         <p:nvSpPr>
-          <p:cNvPr id="54" name="Text 52"/>
-          <p:cNvSpPr/>
-          <p:nvPr/>
-        </p:nvSpPr>
-        <p:spPr>
-          <a:xfrm>
-            <a:off x="5888736" y="4178808"/>
+          <p:cNvPr id="42" name="Text 40"/>
+          <p:cNvSpPr/>
+          <p:nvPr/>
+        </p:nvSpPr>
+        <p:spPr>
+          <a:xfrm>
+            <a:off x="5888736" y="3264408"/>
             <a:ext cx="2194560" cy="420624"/>
           </a:xfrm>
           <a:prstGeom prst="rect">
@@ -38833,7 +39034,7 @@
                 <a:ea typeface="Trebuchet MS" pitchFamily="34" charset="-122"/>
                 <a:cs typeface="Trebuchet MS" pitchFamily="34" charset="-120"/>
               </a:rPr>
-              <a:t>warfare</a:t>
+              <a:t>war</a:t>
             </a:r>
             <a:endParaRPr lang="en-US" sz="1400" dirty="0"/>
           </a:p>
@@ -39125,7 +39326,7 @@
                 <a:ea typeface="Calibri" pitchFamily="34" charset="-122"/>
                 <a:cs typeface="Calibri" pitchFamily="34" charset="-120"/>
               </a:rPr>
-              <a:t>Word Labs  •  wordlabs.app  •  Root: 'war' = conflict, fighting, armed struggle</a:t>
+              <a:t>Word Labs  •  wordlabs.app  •  Root: 'war' = armed conflict between groups</a:t>
             </a:r>
             <a:endParaRPr lang="en-US" sz="800" dirty="0"/>
           </a:p>
@@ -39237,7 +39438,7 @@
                 <a:ea typeface="Trebuchet MS" pitchFamily="34" charset="-122"/>
                 <a:cs typeface="Trebuchet MS" pitchFamily="34" charset="-120"/>
               </a:rPr>
-              <a:t>warfare</a:t>
+              <a:t>war</a:t>
             </a:r>
             <a:endParaRPr lang="en-US" sz="1200" dirty="0"/>
           </a:p>
@@ -39303,7 +39504,7 @@
                 <a:ea typeface="Calibri" pitchFamily="34" charset="-122"/>
                 <a:cs typeface="Calibri" pitchFamily="34" charset="-120"/>
               </a:rPr>
-              <a:t>A large military ship used in fighting at sea.</a:t>
+              <a:t>a network of connected underground tunnels and burrows where rabbits live</a:t>
             </a:r>
             <a:endParaRPr lang="en-US" sz="1200" dirty="0"/>
           </a:p>
@@ -39376,7 +39577,7 @@
                 <a:ea typeface="Trebuchet MS" pitchFamily="34" charset="-122"/>
                 <a:cs typeface="Trebuchet MS" pitchFamily="34" charset="-120"/>
               </a:rPr>
-              <a:t>warrior</a:t>
+              <a:t>wars</a:t>
             </a:r>
             <a:endParaRPr lang="en-US" sz="1200" dirty="0"/>
           </a:p>
@@ -39442,7 +39643,7 @@
                 <a:ea typeface="Calibri" pitchFamily="34" charset="-122"/>
                 <a:cs typeface="Calibri" pitchFamily="34" charset="-120"/>
               </a:rPr>
-              <a:t>Behaving in a way that is ready for or enjoys fighting.</a:t>
+              <a:t>a state of armed conflict between groups or countries</a:t>
             </a:r>
             <a:endParaRPr lang="en-US" sz="1200" dirty="0"/>
           </a:p>
@@ -39515,7 +39716,7 @@
                 <a:ea typeface="Trebuchet MS" pitchFamily="34" charset="-122"/>
                 <a:cs typeface="Trebuchet MS" pitchFamily="34" charset="-120"/>
               </a:rPr>
-              <a:t>warship</a:t>
+              <a:t>warren</a:t>
             </a:r>
             <a:endParaRPr lang="en-US" sz="1200" dirty="0"/>
           </a:p>
@@ -39581,563 +39782,7 @@
                 <a:ea typeface="Calibri" pitchFamily="34" charset="-122"/>
                 <a:cs typeface="Calibri" pitchFamily="34" charset="-120"/>
               </a:rPr>
-              <a:t>The time or events that happened before a war began.</a:t>
-            </a:r>
-            <a:endParaRPr lang="en-US" sz="1200" dirty="0"/>
-          </a:p>
-        </p:txBody>
-      </p:sp>
-      <p:sp>
-        <p:nvSpPr>
-          <p:cNvPr id="23" name="Shape 21"/>
-          <p:cNvSpPr/>
-          <p:nvPr/>
-        </p:nvSpPr>
-        <p:spPr>
-          <a:xfrm>
-            <a:off x="365760" y="2779776"/>
-            <a:ext cx="2011680" cy="457200"/>
-          </a:xfrm>
-          <a:prstGeom prst="rect">
-            <a:avLst>
-              <a:gd name="adj" fmla="val 12000"/>
-            </a:avLst>
-          </a:prstGeom>
-          <a:solidFill>
-            <a:srgbClr val="EEF2FF"/>
-          </a:solidFill>
-          <a:ln w="12700">
-            <a:solidFill>
-              <a:srgbClr val="6366F1"/>
-            </a:solidFill>
-            <a:prstDash val="solid"/>
-          </a:ln>
-          <a:effectLst>
-            <a:outerShdw sx="100000" sy="100000" kx="0" ky="0" algn="bl" rotWithShape="0" blurRad="101600" dist="38100" dir="8100000">
-              <a:srgbClr val="000000">
-                <a:alpha val="12000"/>
-              </a:srgbClr>
-            </a:outerShdw>
-          </a:effectLst>
-        </p:spPr>
-      </p:sp>
-      <p:sp>
-        <p:nvSpPr>
-          <p:cNvPr id="24" name="Text 22"/>
-          <p:cNvSpPr/>
-          <p:nvPr/>
-        </p:nvSpPr>
-        <p:spPr>
-          <a:xfrm>
-            <a:off x="365760" y="2779776"/>
-            <a:ext cx="2011680" cy="457200"/>
-          </a:xfrm>
-          <a:prstGeom prst="rect">
-            <a:avLst/>
-          </a:prstGeom>
-          <a:noFill/>
-          <a:ln/>
-        </p:spPr>
-        <p:txBody>
-          <a:bodyPr wrap="square" lIns="0" tIns="0" rIns="0" bIns="0" rtlCol="0" anchor="ctr"/>
-          <a:lstStyle/>
-          <a:p>
-            <a:pPr algn="ctr" indent="0" marL="0">
-              <a:buNone/>
-            </a:pPr>
-            <a:r>
-              <a:rPr lang="en-US" sz="1200" b="1" dirty="0">
-                <a:solidFill>
-                  <a:srgbClr val="4338CA"/>
-                </a:solidFill>
-                <a:latin typeface="Trebuchet MS" pitchFamily="34" charset="0"/>
-                <a:ea typeface="Trebuchet MS" pitchFamily="34" charset="-122"/>
-                <a:cs typeface="Trebuchet MS" pitchFamily="34" charset="-120"/>
-              </a:rPr>
-              <a:t>warlike</a:t>
-            </a:r>
-            <a:endParaRPr lang="en-US" sz="1200" dirty="0"/>
-          </a:p>
-        </p:txBody>
-      </p:sp>
-      <p:sp>
-        <p:nvSpPr>
-          <p:cNvPr id="25" name="Shape 23"/>
-          <p:cNvSpPr/>
-          <p:nvPr/>
-        </p:nvSpPr>
-        <p:spPr>
-          <a:xfrm>
-            <a:off x="2514600" y="2779776"/>
-            <a:ext cx="6263640" cy="457200"/>
-          </a:xfrm>
-          <a:prstGeom prst="rect">
-            <a:avLst>
-              <a:gd name="adj" fmla="val 12000"/>
-            </a:avLst>
-          </a:prstGeom>
-          <a:solidFill>
-            <a:srgbClr val="F8FAFC"/>
-          </a:solidFill>
-          <a:ln w="12700">
-            <a:solidFill>
-              <a:srgbClr val="E2E8F0"/>
-            </a:solidFill>
-            <a:prstDash val="solid"/>
-          </a:ln>
-        </p:spPr>
-      </p:sp>
-      <p:sp>
-        <p:nvSpPr>
-          <p:cNvPr id="26" name="Text 24"/>
-          <p:cNvSpPr/>
-          <p:nvPr/>
-        </p:nvSpPr>
-        <p:spPr>
-          <a:xfrm>
-            <a:off x="2651760" y="2779776"/>
-            <a:ext cx="6035040" cy="457200"/>
-          </a:xfrm>
-          <a:prstGeom prst="rect">
-            <a:avLst/>
-          </a:prstGeom>
-          <a:noFill/>
-          <a:ln/>
-        </p:spPr>
-        <p:txBody>
-          <a:bodyPr wrap="square" rtlCol="0" anchor="ctr"/>
-          <a:lstStyle/>
-          <a:p>
-            <a:pPr algn="l" indent="0" marL="0">
-              <a:buNone/>
-            </a:pPr>
-            <a:r>
-              <a:rPr lang="en-US" sz="1200" dirty="0">
-                <a:solidFill>
-                  <a:srgbClr val="0F172A"/>
-                </a:solidFill>
-                <a:latin typeface="Calibri" pitchFamily="34" charset="0"/>
-                <a:ea typeface="Calibri" pitchFamily="34" charset="-122"/>
-                <a:cs typeface="Calibri" pitchFamily="34" charset="-120"/>
-              </a:rPr>
-              <a:t>Describing groups or countries that are fighting each other.</a:t>
-            </a:r>
-            <a:endParaRPr lang="en-US" sz="1200" dirty="0"/>
-          </a:p>
-        </p:txBody>
-      </p:sp>
-      <p:sp>
-        <p:nvSpPr>
-          <p:cNvPr id="27" name="Shape 25"/>
-          <p:cNvSpPr/>
-          <p:nvPr/>
-        </p:nvSpPr>
-        <p:spPr>
-          <a:xfrm>
-            <a:off x="365760" y="3310128"/>
-            <a:ext cx="2011680" cy="457200"/>
-          </a:xfrm>
-          <a:prstGeom prst="rect">
-            <a:avLst>
-              <a:gd name="adj" fmla="val 12000"/>
-            </a:avLst>
-          </a:prstGeom>
-          <a:solidFill>
-            <a:srgbClr val="EEF2FF"/>
-          </a:solidFill>
-          <a:ln w="12700">
-            <a:solidFill>
-              <a:srgbClr val="6366F1"/>
-            </a:solidFill>
-            <a:prstDash val="solid"/>
-          </a:ln>
-          <a:effectLst>
-            <a:outerShdw sx="100000" sy="100000" kx="0" ky="0" algn="bl" rotWithShape="0" blurRad="101600" dist="38100" dir="8100000">
-              <a:srgbClr val="000000">
-                <a:alpha val="12000"/>
-              </a:srgbClr>
-            </a:outerShdw>
-          </a:effectLst>
-        </p:spPr>
-      </p:sp>
-      <p:sp>
-        <p:nvSpPr>
-          <p:cNvPr id="28" name="Text 26"/>
-          <p:cNvSpPr/>
-          <p:nvPr/>
-        </p:nvSpPr>
-        <p:spPr>
-          <a:xfrm>
-            <a:off x="365760" y="3310128"/>
-            <a:ext cx="2011680" cy="457200"/>
-          </a:xfrm>
-          <a:prstGeom prst="rect">
-            <a:avLst/>
-          </a:prstGeom>
-          <a:noFill/>
-          <a:ln/>
-        </p:spPr>
-        <p:txBody>
-          <a:bodyPr wrap="square" lIns="0" tIns="0" rIns="0" bIns="0" rtlCol="0" anchor="ctr"/>
-          <a:lstStyle/>
-          <a:p>
-            <a:pPr algn="ctr" indent="0" marL="0">
-              <a:buNone/>
-            </a:pPr>
-            <a:r>
-              <a:rPr lang="en-US" sz="1200" b="1" dirty="0">
-                <a:solidFill>
-                  <a:srgbClr val="4338CA"/>
-                </a:solidFill>
-                <a:latin typeface="Trebuchet MS" pitchFamily="34" charset="0"/>
-                <a:ea typeface="Trebuchet MS" pitchFamily="34" charset="-122"/>
-                <a:cs typeface="Trebuchet MS" pitchFamily="34" charset="-120"/>
-              </a:rPr>
-              <a:t>warden</a:t>
-            </a:r>
-            <a:endParaRPr lang="en-US" sz="1200" dirty="0"/>
-          </a:p>
-        </p:txBody>
-      </p:sp>
-      <p:sp>
-        <p:nvSpPr>
-          <p:cNvPr id="29" name="Shape 27"/>
-          <p:cNvSpPr/>
-          <p:nvPr/>
-        </p:nvSpPr>
-        <p:spPr>
-          <a:xfrm>
-            <a:off x="2514600" y="3310128"/>
-            <a:ext cx="6263640" cy="457200"/>
-          </a:xfrm>
-          <a:prstGeom prst="rect">
-            <a:avLst>
-              <a:gd name="adj" fmla="val 12000"/>
-            </a:avLst>
-          </a:prstGeom>
-          <a:solidFill>
-            <a:srgbClr val="F8FAFC"/>
-          </a:solidFill>
-          <a:ln w="12700">
-            <a:solidFill>
-              <a:srgbClr val="E2E8F0"/>
-            </a:solidFill>
-            <a:prstDash val="solid"/>
-          </a:ln>
-        </p:spPr>
-      </p:sp>
-      <p:sp>
-        <p:nvSpPr>
-          <p:cNvPr id="30" name="Text 28"/>
-          <p:cNvSpPr/>
-          <p:nvPr/>
-        </p:nvSpPr>
-        <p:spPr>
-          <a:xfrm>
-            <a:off x="2651760" y="3310128"/>
-            <a:ext cx="6035040" cy="457200"/>
-          </a:xfrm>
-          <a:prstGeom prst="rect">
-            <a:avLst/>
-          </a:prstGeom>
-          <a:noFill/>
-          <a:ln/>
-        </p:spPr>
-        <p:txBody>
-          <a:bodyPr wrap="square" rtlCol="0" anchor="ctr"/>
-          <a:lstStyle/>
-          <a:p>
-            <a:pPr algn="l" indent="0" marL="0">
-              <a:buNone/>
-            </a:pPr>
-            <a:r>
-              <a:rPr lang="en-US" sz="1200" dirty="0">
-                <a:solidFill>
-                  <a:srgbClr val="0F172A"/>
-                </a:solidFill>
-                <a:latin typeface="Calibri" pitchFamily="34" charset="0"/>
-                <a:ea typeface="Calibri" pitchFamily="34" charset="-122"/>
-                <a:cs typeface="Calibri" pitchFamily="34" charset="-120"/>
-              </a:rPr>
-              <a:t>The fighting and activities that happen during a war.</a:t>
-            </a:r>
-            <a:endParaRPr lang="en-US" sz="1200" dirty="0"/>
-          </a:p>
-        </p:txBody>
-      </p:sp>
-      <p:sp>
-        <p:nvSpPr>
-          <p:cNvPr id="31" name="Shape 29"/>
-          <p:cNvSpPr/>
-          <p:nvPr/>
-        </p:nvSpPr>
-        <p:spPr>
-          <a:xfrm>
-            <a:off x="365760" y="3840480"/>
-            <a:ext cx="2011680" cy="457200"/>
-          </a:xfrm>
-          <a:prstGeom prst="rect">
-            <a:avLst>
-              <a:gd name="adj" fmla="val 12000"/>
-            </a:avLst>
-          </a:prstGeom>
-          <a:solidFill>
-            <a:srgbClr val="EEF2FF"/>
-          </a:solidFill>
-          <a:ln w="12700">
-            <a:solidFill>
-              <a:srgbClr val="6366F1"/>
-            </a:solidFill>
-            <a:prstDash val="solid"/>
-          </a:ln>
-          <a:effectLst>
-            <a:outerShdw sx="100000" sy="100000" kx="0" ky="0" algn="bl" rotWithShape="0" blurRad="101600" dist="38100" dir="8100000">
-              <a:srgbClr val="000000">
-                <a:alpha val="12000"/>
-              </a:srgbClr>
-            </a:outerShdw>
-          </a:effectLst>
-        </p:spPr>
-      </p:sp>
-      <p:sp>
-        <p:nvSpPr>
-          <p:cNvPr id="32" name="Text 30"/>
-          <p:cNvSpPr/>
-          <p:nvPr/>
-        </p:nvSpPr>
-        <p:spPr>
-          <a:xfrm>
-            <a:off x="365760" y="3840480"/>
-            <a:ext cx="2011680" cy="457200"/>
-          </a:xfrm>
-          <a:prstGeom prst="rect">
-            <a:avLst/>
-          </a:prstGeom>
-          <a:noFill/>
-          <a:ln/>
-        </p:spPr>
-        <p:txBody>
-          <a:bodyPr wrap="square" lIns="0" tIns="0" rIns="0" bIns="0" rtlCol="0" anchor="ctr"/>
-          <a:lstStyle/>
-          <a:p>
-            <a:pPr algn="ctr" indent="0" marL="0">
-              <a:buNone/>
-            </a:pPr>
-            <a:r>
-              <a:rPr lang="en-US" sz="1200" b="1" dirty="0">
-                <a:solidFill>
-                  <a:srgbClr val="4338CA"/>
-                </a:solidFill>
-                <a:latin typeface="Trebuchet MS" pitchFamily="34" charset="0"/>
-                <a:ea typeface="Trebuchet MS" pitchFamily="34" charset="-122"/>
-                <a:cs typeface="Trebuchet MS" pitchFamily="34" charset="-120"/>
-              </a:rPr>
-              <a:t>warring</a:t>
-            </a:r>
-            <a:endParaRPr lang="en-US" sz="1200" dirty="0"/>
-          </a:p>
-        </p:txBody>
-      </p:sp>
-      <p:sp>
-        <p:nvSpPr>
-          <p:cNvPr id="33" name="Shape 31"/>
-          <p:cNvSpPr/>
-          <p:nvPr/>
-        </p:nvSpPr>
-        <p:spPr>
-          <a:xfrm>
-            <a:off x="2514600" y="3840480"/>
-            <a:ext cx="6263640" cy="457200"/>
-          </a:xfrm>
-          <a:prstGeom prst="rect">
-            <a:avLst>
-              <a:gd name="adj" fmla="val 12000"/>
-            </a:avLst>
-          </a:prstGeom>
-          <a:solidFill>
-            <a:srgbClr val="F8FAFC"/>
-          </a:solidFill>
-          <a:ln w="12700">
-            <a:solidFill>
-              <a:srgbClr val="E2E8F0"/>
-            </a:solidFill>
-            <a:prstDash val="solid"/>
-          </a:ln>
-        </p:spPr>
-      </p:sp>
-      <p:sp>
-        <p:nvSpPr>
-          <p:cNvPr id="34" name="Text 32"/>
-          <p:cNvSpPr/>
-          <p:nvPr/>
-        </p:nvSpPr>
-        <p:spPr>
-          <a:xfrm>
-            <a:off x="2651760" y="3840480"/>
-            <a:ext cx="6035040" cy="457200"/>
-          </a:xfrm>
-          <a:prstGeom prst="rect">
-            <a:avLst/>
-          </a:prstGeom>
-          <a:noFill/>
-          <a:ln/>
-        </p:spPr>
-        <p:txBody>
-          <a:bodyPr wrap="square" rtlCol="0" anchor="ctr"/>
-          <a:lstStyle/>
-          <a:p>
-            <a:pPr algn="l" indent="0" marL="0">
-              <a:buNone/>
-            </a:pPr>
-            <a:r>
-              <a:rPr lang="en-US" sz="1200" dirty="0">
-                <a:solidFill>
-                  <a:srgbClr val="0F172A"/>
-                </a:solidFill>
-                <a:latin typeface="Calibri" pitchFamily="34" charset="0"/>
-                <a:ea typeface="Calibri" pitchFamily="34" charset="-122"/>
-                <a:cs typeface="Calibri" pitchFamily="34" charset="-120"/>
-              </a:rPr>
-              <a:t>A person who is in charge of keeping a place or people safe.</a:t>
-            </a:r>
-            <a:endParaRPr lang="en-US" sz="1200" dirty="0"/>
-          </a:p>
-        </p:txBody>
-      </p:sp>
-      <p:sp>
-        <p:nvSpPr>
-          <p:cNvPr id="35" name="Shape 33"/>
-          <p:cNvSpPr/>
-          <p:nvPr/>
-        </p:nvSpPr>
-        <p:spPr>
-          <a:xfrm>
-            <a:off x="365760" y="4370832"/>
-            <a:ext cx="2011680" cy="457200"/>
-          </a:xfrm>
-          <a:prstGeom prst="rect">
-            <a:avLst>
-              <a:gd name="adj" fmla="val 12000"/>
-            </a:avLst>
-          </a:prstGeom>
-          <a:solidFill>
-            <a:srgbClr val="EEF2FF"/>
-          </a:solidFill>
-          <a:ln w="12700">
-            <a:solidFill>
-              <a:srgbClr val="6366F1"/>
-            </a:solidFill>
-            <a:prstDash val="solid"/>
-          </a:ln>
-          <a:effectLst>
-            <a:outerShdw sx="100000" sy="100000" kx="0" ky="0" algn="bl" rotWithShape="0" blurRad="101600" dist="38100" dir="8100000">
-              <a:srgbClr val="000000">
-                <a:alpha val="12000"/>
-              </a:srgbClr>
-            </a:outerShdw>
-          </a:effectLst>
-        </p:spPr>
-      </p:sp>
-      <p:sp>
-        <p:nvSpPr>
-          <p:cNvPr id="36" name="Text 34"/>
-          <p:cNvSpPr/>
-          <p:nvPr/>
-        </p:nvSpPr>
-        <p:spPr>
-          <a:xfrm>
-            <a:off x="365760" y="4370832"/>
-            <a:ext cx="2011680" cy="457200"/>
-          </a:xfrm>
-          <a:prstGeom prst="rect">
-            <a:avLst/>
-          </a:prstGeom>
-          <a:noFill/>
-          <a:ln/>
-        </p:spPr>
-        <p:txBody>
-          <a:bodyPr wrap="square" lIns="0" tIns="0" rIns="0" bIns="0" rtlCol="0" anchor="ctr"/>
-          <a:lstStyle/>
-          <a:p>
-            <a:pPr algn="ctr" indent="0" marL="0">
-              <a:buNone/>
-            </a:pPr>
-            <a:r>
-              <a:rPr lang="en-US" sz="1200" b="1" dirty="0">
-                <a:solidFill>
-                  <a:srgbClr val="4338CA"/>
-                </a:solidFill>
-                <a:latin typeface="Trebuchet MS" pitchFamily="34" charset="0"/>
-                <a:ea typeface="Trebuchet MS" pitchFamily="34" charset="-122"/>
-                <a:cs typeface="Trebuchet MS" pitchFamily="34" charset="-120"/>
-              </a:rPr>
-              <a:t>prewar</a:t>
-            </a:r>
-            <a:endParaRPr lang="en-US" sz="1200" dirty="0"/>
-          </a:p>
-        </p:txBody>
-      </p:sp>
-      <p:sp>
-        <p:nvSpPr>
-          <p:cNvPr id="37" name="Shape 35"/>
-          <p:cNvSpPr/>
-          <p:nvPr/>
-        </p:nvSpPr>
-        <p:spPr>
-          <a:xfrm>
-            <a:off x="2514600" y="4370832"/>
-            <a:ext cx="6263640" cy="457200"/>
-          </a:xfrm>
-          <a:prstGeom prst="rect">
-            <a:avLst>
-              <a:gd name="adj" fmla="val 12000"/>
-            </a:avLst>
-          </a:prstGeom>
-          <a:solidFill>
-            <a:srgbClr val="F8FAFC"/>
-          </a:solidFill>
-          <a:ln w="12700">
-            <a:solidFill>
-              <a:srgbClr val="E2E8F0"/>
-            </a:solidFill>
-            <a:prstDash val="solid"/>
-          </a:ln>
-        </p:spPr>
-      </p:sp>
-      <p:sp>
-        <p:nvSpPr>
-          <p:cNvPr id="38" name="Text 36"/>
-          <p:cNvSpPr/>
-          <p:nvPr/>
-        </p:nvSpPr>
-        <p:spPr>
-          <a:xfrm>
-            <a:off x="2651760" y="4370832"/>
-            <a:ext cx="6035040" cy="457200"/>
-          </a:xfrm>
-          <a:prstGeom prst="rect">
-            <a:avLst/>
-          </a:prstGeom>
-          <a:noFill/>
-          <a:ln/>
-        </p:spPr>
-        <p:txBody>
-          <a:bodyPr wrap="square" rtlCol="0" anchor="ctr"/>
-          <a:lstStyle/>
-          <a:p>
-            <a:pPr algn="l" indent="0" marL="0">
-              <a:buNone/>
-            </a:pPr>
-            <a:r>
-              <a:rPr lang="en-US" sz="1200" dirty="0">
-                <a:solidFill>
-                  <a:srgbClr val="0F172A"/>
-                </a:solidFill>
-                <a:latin typeface="Calibri" pitchFamily="34" charset="0"/>
-                <a:ea typeface="Calibri" pitchFamily="34" charset="-122"/>
-                <a:cs typeface="Calibri" pitchFamily="34" charset="-120"/>
-              </a:rPr>
-              <a:t>A brave person who fights in battles or wars.</a:t>
+              <a:t>armed fighting between countries or groups, plural of war</a:t>
             </a:r>
             <a:endParaRPr lang="en-US" sz="1200" dirty="0"/>
           </a:p>
@@ -40429,7 +40074,7 @@
                 <a:ea typeface="Calibri" pitchFamily="34" charset="-122"/>
                 <a:cs typeface="Calibri" pitchFamily="34" charset="-120"/>
               </a:rPr>
-              <a:t>Word Labs  •  wordlabs.app  •  Root: 'war' = conflict, fighting, armed struggle</a:t>
+              <a:t>Word Labs  •  wordlabs.app  •  Root: 'war' = armed conflict between groups</a:t>
             </a:r>
             <a:endParaRPr lang="en-US" sz="800" dirty="0"/>
           </a:p>
@@ -40632,7 +40277,7 @@
                 <a:ea typeface="Calibri" pitchFamily="34" charset="-122"/>
                 <a:cs typeface="Calibri" pitchFamily="34" charset="-120"/>
               </a:rPr>
-              <a:t>The documentary showed how warfare changed dramatically with the invention of new technology.</a:t>
+              <a:t>The soldiers fought bravely during the war.</a:t>
             </a:r>
             <a:endParaRPr lang="en-US" sz="1500" dirty="0"/>
           </a:p>
@@ -40796,7 +40441,7 @@
                 <a:ea typeface="Calibri" pitchFamily="34" charset="-122"/>
                 <a:cs typeface="Calibri" pitchFamily="34" charset="-120"/>
               </a:rPr>
-              <a:t>A skilled warrior must have courage, strength, and loyalty to their people.</a:t>
+              <a:t>Many wars were fought over land and power.</a:t>
             </a:r>
             <a:endParaRPr lang="en-US" sz="1500" dirty="0"/>
           </a:p>
@@ -40960,7 +40605,7 @@
                 <a:ea typeface="Calibri" pitchFamily="34" charset="-122"/>
                 <a:cs typeface="Calibri" pitchFamily="34" charset="-120"/>
               </a:rPr>
-              <a:t>Life in the postwar years was difficult, but families slowly rebuilt their homes and communities.</a:t>
+              <a:t>The rabbits disappeared into their warren.</a:t>
             </a:r>
             <a:endParaRPr lang="en-US" sz="1500" dirty="0"/>
           </a:p>
